--- a/examples/BOUV.OL/BOUV.OL_deck.pptx
+++ b/examples/BOUV.OL/BOUV.OL_deck.pptx
@@ -15,6 +15,8 @@
     <p:sldId id="263" r:id="rId14"/>
     <p:sldId id="264" r:id="rId15"/>
     <p:sldId id="265" r:id="rId16"/>
+    <p:sldId id="266" r:id="rId17"/>
+    <p:sldId id="267" r:id="rId18"/>
   </p:sldIdLst>
   <p:sldSz cx="12191695" cy="6858000" type="screen4x3"/>
   <p:notesSz cx="6858000" cy="9144000"/>
@@ -3351,7 +3353,7 @@
                 </a:solidFill>
                 <a:latin typeface="Cambria"/>
               </a:rPr>
-              <a:t>Initiation of coverage – BUY, target price NOK 78.50</a:t>
+              <a:t>Initiation of coverage – BUY, target price NOK 77.00</a:t>
             </a:r>
           </a:p>
         </p:txBody>
@@ -3386,7 +3388,7 @@
                 </a:solidFill>
                 <a:latin typeface="Arial"/>
               </a:rPr>
-              <a:t>21.09.2026</a:t>
+              <a:t>23.09.2026</a:t>
             </a:r>
           </a:p>
         </p:txBody>
@@ -3544,7 +3546,7 @@
                 </a:solidFill>
                 <a:latin typeface="Arial"/>
               </a:rPr>
-              <a:t>Bouvet trades at 8.3x trailing EV/EBITDA against a 3.5-year median of 11.3x</a:t>
+              <a:t>Bouvet trades at 8.1x trailing EV/EBITDA against a 3.5-year median of 11.3x</a:t>
             </a:r>
           </a:p>
         </p:txBody>
@@ -4147,7 +4149,7 @@
                 </a:solidFill>
                 <a:latin typeface="Arial"/>
               </a:rPr>
-              <a:t> 8.3x today vs a median of 11.3x and an interquartile band of 9.7x–12.0x; 11% of weeks were cheaper. At its own median the share is worth NOK 63.79 (+35% vs price)</a:t>
+              <a:t> 8.1x today vs a median of 11.3x and an interquartile band of 9.7x–12.0x; 11% of weeks were cheaper. At its own median the share is worth NOK 59.68 (+26% vs price)</a:t>
             </a:r>
           </a:p>
           <a:p>
@@ -4180,7 +4182,7 @@
                 </a:solidFill>
                 <a:latin typeface="Arial"/>
               </a:rPr>
-              <a:t> 13.7x today vs a median of 17.1x and an interquartile band of 15.4x–18.9x; 11% of weeks were cheaper. At its own median the share is worth NOK 59.10 (+25% vs price)</a:t>
+              <a:t> 13.5x today vs a median of 17.1x and an interquartile band of 15.4x–18.9x; 11% of weeks were cheaper. At its own median the share is worth NOK 59.10 (+25% vs price)</a:t>
             </a:r>
           </a:p>
           <a:p>
@@ -4213,7 +4215,7 @@
                 </a:solidFill>
                 <a:latin typeface="Arial"/>
               </a:rPr>
-              <a:t> the DCF is 45% above the peer-multiple value (NOK 52.13) and our target is 57% above the consensus of 2 analysts (NOK 50.00); the recommendation rests on the DCF assumptions alone — treat the target as a hypothesis, not a result</a:t>
+              <a:t> the DCF is 58% above the peer-multiple value (NOK 46.77) and our target is 54% above the consensus of 2 analysts (NOK 50.00); the recommendation rests on the DCF assumptions alone — treat the target as a hypothesis, not a result</a:t>
             </a:r>
           </a:p>
           <a:p>
@@ -4425,6 +4427,7255 @@
                 <a:latin typeface="Arial"/>
               </a:rPr>
               <a:t>10</a:t>
+            </a:r>
+          </a:p>
+        </p:txBody>
+      </p:sp>
+    </p:spTree>
+  </p:cSld>
+  <p:clrMapOvr>
+    <a:masterClrMapping/>
+  </p:clrMapOvr>
+</p:sld>
+</file>
+
+<file path=ppt/slides/slide11.xml><?xml version="1.0" encoding="utf-8"?>
+<p:sld xmlns:a="http://schemas.openxmlformats.org/drawingml/2006/main" xmlns:p="http://schemas.openxmlformats.org/presentationml/2006/main" xmlns:r="http://schemas.openxmlformats.org/officeDocument/2006/relationships">
+  <p:cSld>
+    <p:spTree>
+      <p:nvGrpSpPr>
+        <p:cNvPr id="1" name=""/>
+        <p:cNvGrpSpPr/>
+        <p:nvPr/>
+      </p:nvGrpSpPr>
+      <p:grpSpPr/>
+      <p:sp>
+        <p:nvSpPr>
+          <p:cNvPr id="2" name="TextBox 1"/>
+          <p:cNvSpPr txBox="1"/>
+          <p:nvPr/>
+        </p:nvSpPr>
+        <p:spPr>
+          <a:xfrm>
+            <a:off x="429768" y="164592"/>
+            <a:ext cx="11332159" cy="219456"/>
+          </a:xfrm>
+          <a:prstGeom prst="rect">
+            <a:avLst/>
+          </a:prstGeom>
+          <a:noFill/>
+        </p:spPr>
+        <p:txBody>
+          <a:bodyPr wrap="square" anchor="t" lIns="0" rIns="0" tIns="0" bIns="0">
+            <a:spAutoFit/>
+          </a:bodyPr>
+          <a:lstStyle/>
+          <a:p>
+            <a:pPr algn="l"/>
+            <a:r>
+              <a:rPr sz="800" b="1" i="0">
+                <a:solidFill>
+                  <a:srgbClr val="003255"/>
+                </a:solidFill>
+                <a:latin typeface="Arial"/>
+              </a:rPr>
+              <a:t>Appendix #4.5</a:t>
+            </a:r>
+          </a:p>
+        </p:txBody>
+      </p:sp>
+      <p:sp>
+        <p:nvSpPr>
+          <p:cNvPr id="3" name="TextBox 2"/>
+          <p:cNvSpPr txBox="1"/>
+          <p:nvPr/>
+        </p:nvSpPr>
+        <p:spPr>
+          <a:xfrm>
+            <a:off x="429768" y="384048"/>
+            <a:ext cx="11332159" cy="502920"/>
+          </a:xfrm>
+          <a:prstGeom prst="rect">
+            <a:avLst/>
+          </a:prstGeom>
+          <a:noFill/>
+        </p:spPr>
+        <p:txBody>
+          <a:bodyPr wrap="square" anchor="t" lIns="0" rIns="0" tIns="0" bIns="0">
+            <a:spAutoFit/>
+          </a:bodyPr>
+          <a:lstStyle/>
+          <a:p>
+            <a:pPr algn="l"/>
+            <a:r>
+              <a:rPr sz="2600" b="0" i="0">
+                <a:solidFill>
+                  <a:srgbClr val="003255"/>
+                </a:solidFill>
+                <a:latin typeface="Cambria"/>
+              </a:rPr>
+              <a:t>Estimates vs consensus and value drivers</a:t>
+            </a:r>
+          </a:p>
+        </p:txBody>
+      </p:sp>
+      <p:sp>
+        <p:nvSpPr>
+          <p:cNvPr id="4" name="TextBox 3"/>
+          <p:cNvSpPr txBox="1"/>
+          <p:nvPr/>
+        </p:nvSpPr>
+        <p:spPr>
+          <a:xfrm>
+            <a:off x="429768" y="896112"/>
+            <a:ext cx="11332159" cy="274320"/>
+          </a:xfrm>
+          <a:prstGeom prst="rect">
+            <a:avLst/>
+          </a:prstGeom>
+          <a:noFill/>
+        </p:spPr>
+        <p:txBody>
+          <a:bodyPr wrap="square" anchor="t" lIns="0" rIns="0" tIns="0" bIns="0">
+            <a:spAutoFit/>
+          </a:bodyPr>
+          <a:lstStyle/>
+          <a:p>
+            <a:pPr algn="l"/>
+            <a:r>
+              <a:rPr sz="1200" b="0" i="0">
+                <a:solidFill>
+                  <a:srgbClr val="003154"/>
+                </a:solidFill>
+                <a:latin typeface="Arial"/>
+              </a:rPr>
+              <a:t>Our 2026E EPS of NOK 3.60 is 10% above consensus; estimate momentum is negative</a:t>
+            </a:r>
+          </a:p>
+        </p:txBody>
+      </p:sp>
+      <p:sp>
+        <p:nvSpPr>
+          <p:cNvPr id="5" name="TextBox 4"/>
+          <p:cNvSpPr txBox="1"/>
+          <p:nvPr/>
+        </p:nvSpPr>
+        <p:spPr>
+          <a:xfrm>
+            <a:off x="429768" y="1280160"/>
+            <a:ext cx="6217920" cy="237744"/>
+          </a:xfrm>
+          <a:prstGeom prst="rect">
+            <a:avLst/>
+          </a:prstGeom>
+          <a:noFill/>
+        </p:spPr>
+        <p:txBody>
+          <a:bodyPr wrap="none" anchor="b" lIns="18288" rIns="18288" tIns="18288" bIns="18288">
+            <a:spAutoFit/>
+          </a:bodyPr>
+          <a:lstStyle/>
+          <a:p>
+            <a:pPr algn="l"/>
+            <a:r>
+              <a:rPr sz="950" b="1" i="0">
+                <a:solidFill>
+                  <a:srgbClr val="003255"/>
+                </a:solidFill>
+                <a:latin typeface="Arial"/>
+              </a:rPr>
+              <a:t>Our estimates vs consensus</a:t>
+            </a:r>
+          </a:p>
+        </p:txBody>
+      </p:sp>
+      <p:cxnSp>
+        <p:nvCxnSpPr>
+          <p:cNvPr id="6" name="Connector 5"/>
+          <p:cNvCxnSpPr/>
+          <p:nvPr/>
+        </p:nvCxnSpPr>
+        <p:spPr>
+          <a:xfrm>
+            <a:off x="429768" y="1527048"/>
+            <a:ext cx="6217920" cy="0"/>
+          </a:xfrm>
+          <a:prstGeom prst="line">
+            <a:avLst/>
+          </a:prstGeom>
+          <a:ln w="12700">
+            <a:solidFill>
+              <a:srgbClr val="003255"/>
+            </a:solidFill>
+          </a:ln>
+        </p:spPr>
+        <p:style>
+          <a:lnRef idx="2">
+            <a:schemeClr val="accent1"/>
+          </a:lnRef>
+          <a:fillRef idx="0">
+            <a:schemeClr val="accent1"/>
+          </a:fillRef>
+          <a:effectRef idx="1">
+            <a:schemeClr val="accent1"/>
+          </a:effectRef>
+          <a:fontRef idx="minor">
+            <a:schemeClr val="tx1"/>
+          </a:fontRef>
+        </p:style>
+      </p:cxnSp>
+      <p:sp>
+        <p:nvSpPr>
+          <p:cNvPr id="7" name="Rectangle 6"/>
+          <p:cNvSpPr/>
+          <p:nvPr/>
+        </p:nvSpPr>
+        <p:spPr>
+          <a:xfrm>
+            <a:off x="6739128" y="1316736"/>
+            <a:ext cx="256032" cy="256032"/>
+          </a:xfrm>
+          <a:prstGeom prst="rect">
+            <a:avLst/>
+          </a:prstGeom>
+          <a:solidFill>
+            <a:srgbClr val="003255"/>
+          </a:solidFill>
+          <a:ln>
+            <a:noFill/>
+          </a:ln>
+          <a:effectLst/>
+        </p:spPr>
+        <p:style>
+          <a:lnRef idx="1">
+            <a:schemeClr val="accent1"/>
+          </a:lnRef>
+          <a:fillRef idx="3">
+            <a:schemeClr val="accent1"/>
+          </a:fillRef>
+          <a:effectRef idx="2">
+            <a:schemeClr val="accent1"/>
+          </a:effectRef>
+          <a:fontRef idx="minor">
+            <a:schemeClr val="lt1"/>
+          </a:fontRef>
+        </p:style>
+        <p:txBody>
+          <a:bodyPr rtlCol="0" anchor="ctr" lIns="0" rIns="0" tIns="0" bIns="0"/>
+          <a:lstStyle/>
+          <a:p>
+            <a:pPr algn="ctr"/>
+            <a:r>
+              <a:rPr sz="900" b="1" i="0">
+                <a:solidFill>
+                  <a:srgbClr val="FFFFFF"/>
+                </a:solidFill>
+                <a:latin typeface="Arial"/>
+              </a:rPr>
+              <a:t>1</a:t>
+            </a:r>
+          </a:p>
+        </p:txBody>
+      </p:sp>
+      <p:graphicFrame>
+        <p:nvGraphicFramePr>
+          <p:cNvPr id="8" name="Table 7"/>
+          <p:cNvGraphicFramePr>
+            <a:graphicFrameLocks noGrp="1"/>
+          </p:cNvGraphicFramePr>
+          <p:nvPr/>
+        </p:nvGraphicFramePr>
+        <p:xfrm>
+          <a:off x="429768" y="1618488"/>
+          <a:ext cx="6583680" cy="1143000"/>
+        </p:xfrm>
+        <a:graphic>
+          <a:graphicData uri="http://schemas.openxmlformats.org/drawingml/2006/table">
+            <a:tbl>
+              <a:tblPr/>
+              <a:tblGrid>
+                <a:gridCol w="1828800"/>
+                <a:gridCol w="792480"/>
+                <a:gridCol w="792480"/>
+                <a:gridCol w="792480"/>
+                <a:gridCol w="792480"/>
+                <a:gridCol w="792480"/>
+                <a:gridCol w="792480"/>
+              </a:tblGrid>
+              <a:tr h="228600">
+                <a:tc>
+                  <a:txBody>
+                    <a:bodyPr wrap="none"/>
+                    <a:lstStyle/>
+                    <a:p>
+                      <a:pPr algn="l"/>
+                      <a:r>
+                        <a:rPr sz="800" b="1" i="0">
+                          <a:solidFill>
+                            <a:srgbClr val="FFFFFF"/>
+                          </a:solidFill>
+                          <a:latin typeface="Arial"/>
+                        </a:rPr>
+                        <a:t>Estimate</a:t>
+                      </a:r>
+                    </a:p>
+                  </a:txBody>
+                  <a:tcPr marL="36576" marR="36576" marT="9144" marB="9144" anchor="ctr">
+                    <a:solidFill>
+                      <a:srgbClr val="003255"/>
+                    </a:solidFill>
+                    <a:lnL w="0">
+                      <a:noFill/>
+                    </a:lnL>
+                    <a:lnR w="0">
+                      <a:noFill/>
+                    </a:lnR>
+                    <a:lnT w="0">
+                      <a:noFill/>
+                    </a:lnT>
+                    <a:lnB w="0">
+                      <a:noFill/>
+                    </a:lnB>
+                  </a:tcPr>
+                </a:tc>
+                <a:tc>
+                  <a:txBody>
+                    <a:bodyPr wrap="none"/>
+                    <a:lstStyle/>
+                    <a:p>
+                      <a:pPr algn="r"/>
+                      <a:r>
+                        <a:rPr sz="800" b="1" i="0">
+                          <a:solidFill>
+                            <a:srgbClr val="FFFFFF"/>
+                          </a:solidFill>
+                          <a:latin typeface="Arial"/>
+                        </a:rPr>
+                        <a:t>Ours</a:t>
+                      </a:r>
+                    </a:p>
+                  </a:txBody>
+                  <a:tcPr marL="36576" marR="36576" marT="9144" marB="9144" anchor="ctr">
+                    <a:solidFill>
+                      <a:srgbClr val="003255"/>
+                    </a:solidFill>
+                    <a:lnL w="0">
+                      <a:noFill/>
+                    </a:lnL>
+                    <a:lnR w="0">
+                      <a:noFill/>
+                    </a:lnR>
+                    <a:lnT w="0">
+                      <a:noFill/>
+                    </a:lnT>
+                    <a:lnB w="0">
+                      <a:noFill/>
+                    </a:lnB>
+                  </a:tcPr>
+                </a:tc>
+                <a:tc>
+                  <a:txBody>
+                    <a:bodyPr wrap="none"/>
+                    <a:lstStyle/>
+                    <a:p>
+                      <a:pPr algn="r"/>
+                      <a:r>
+                        <a:rPr sz="800" b="1" i="0">
+                          <a:solidFill>
+                            <a:srgbClr val="FFFFFF"/>
+                          </a:solidFill>
+                          <a:latin typeface="Arial"/>
+                        </a:rPr>
+                        <a:t>Consensus</a:t>
+                      </a:r>
+                    </a:p>
+                  </a:txBody>
+                  <a:tcPr marL="36576" marR="36576" marT="9144" marB="9144" anchor="ctr">
+                    <a:solidFill>
+                      <a:srgbClr val="003255"/>
+                    </a:solidFill>
+                    <a:lnL w="0">
+                      <a:noFill/>
+                    </a:lnL>
+                    <a:lnR w="0">
+                      <a:noFill/>
+                    </a:lnR>
+                    <a:lnT w="0">
+                      <a:noFill/>
+                    </a:lnT>
+                    <a:lnB w="0">
+                      <a:noFill/>
+                    </a:lnB>
+                  </a:tcPr>
+                </a:tc>
+                <a:tc>
+                  <a:txBody>
+                    <a:bodyPr wrap="none"/>
+                    <a:lstStyle/>
+                    <a:p>
+                      <a:pPr algn="r"/>
+                      <a:r>
+                        <a:rPr sz="800" b="1" i="0">
+                          <a:solidFill>
+                            <a:srgbClr val="FFFFFF"/>
+                          </a:solidFill>
+                          <a:latin typeface="Arial"/>
+                        </a:rPr>
+                        <a:t>Difference</a:t>
+                      </a:r>
+                    </a:p>
+                  </a:txBody>
+                  <a:tcPr marL="36576" marR="36576" marT="9144" marB="9144" anchor="ctr">
+                    <a:solidFill>
+                      <a:srgbClr val="003255"/>
+                    </a:solidFill>
+                    <a:lnL w="0">
+                      <a:noFill/>
+                    </a:lnL>
+                    <a:lnR w="0">
+                      <a:noFill/>
+                    </a:lnR>
+                    <a:lnT w="0">
+                      <a:noFill/>
+                    </a:lnT>
+                    <a:lnB w="0">
+                      <a:noFill/>
+                    </a:lnB>
+                  </a:tcPr>
+                </a:tc>
+                <a:tc>
+                  <a:txBody>
+                    <a:bodyPr wrap="none"/>
+                    <a:lstStyle/>
+                    <a:p>
+                      <a:pPr algn="r"/>
+                      <a:r>
+                        <a:rPr sz="800" b="1" i="0">
+                          <a:solidFill>
+                            <a:srgbClr val="FFFFFF"/>
+                          </a:solidFill>
+                          <a:latin typeface="Arial"/>
+                        </a:rPr>
+                        <a:t>Low</a:t>
+                      </a:r>
+                    </a:p>
+                  </a:txBody>
+                  <a:tcPr marL="36576" marR="36576" marT="9144" marB="9144" anchor="ctr">
+                    <a:solidFill>
+                      <a:srgbClr val="003255"/>
+                    </a:solidFill>
+                    <a:lnL w="0">
+                      <a:noFill/>
+                    </a:lnL>
+                    <a:lnR w="0">
+                      <a:noFill/>
+                    </a:lnR>
+                    <a:lnT w="0">
+                      <a:noFill/>
+                    </a:lnT>
+                    <a:lnB w="0">
+                      <a:noFill/>
+                    </a:lnB>
+                  </a:tcPr>
+                </a:tc>
+                <a:tc>
+                  <a:txBody>
+                    <a:bodyPr wrap="none"/>
+                    <a:lstStyle/>
+                    <a:p>
+                      <a:pPr algn="r"/>
+                      <a:r>
+                        <a:rPr sz="800" b="1" i="0">
+                          <a:solidFill>
+                            <a:srgbClr val="FFFFFF"/>
+                          </a:solidFill>
+                          <a:latin typeface="Arial"/>
+                        </a:rPr>
+                        <a:t>High</a:t>
+                      </a:r>
+                    </a:p>
+                  </a:txBody>
+                  <a:tcPr marL="36576" marR="36576" marT="9144" marB="9144" anchor="ctr">
+                    <a:solidFill>
+                      <a:srgbClr val="003255"/>
+                    </a:solidFill>
+                    <a:lnL w="0">
+                      <a:noFill/>
+                    </a:lnL>
+                    <a:lnR w="0">
+                      <a:noFill/>
+                    </a:lnR>
+                    <a:lnT w="0">
+                      <a:noFill/>
+                    </a:lnT>
+                    <a:lnB w="0">
+                      <a:noFill/>
+                    </a:lnB>
+                  </a:tcPr>
+                </a:tc>
+                <a:tc>
+                  <a:txBody>
+                    <a:bodyPr wrap="none"/>
+                    <a:lstStyle/>
+                    <a:p>
+                      <a:pPr algn="r"/>
+                      <a:r>
+                        <a:rPr sz="800" b="1" i="0">
+                          <a:solidFill>
+                            <a:srgbClr val="FFFFFF"/>
+                          </a:solidFill>
+                          <a:latin typeface="Arial"/>
+                        </a:rPr>
+                        <a:t>Analysts</a:t>
+                      </a:r>
+                    </a:p>
+                  </a:txBody>
+                  <a:tcPr marL="36576" marR="36576" marT="9144" marB="9144" anchor="ctr">
+                    <a:solidFill>
+                      <a:srgbClr val="003255"/>
+                    </a:solidFill>
+                    <a:lnL w="0">
+                      <a:noFill/>
+                    </a:lnL>
+                    <a:lnR w="0">
+                      <a:noFill/>
+                    </a:lnR>
+                    <a:lnT w="0">
+                      <a:noFill/>
+                    </a:lnT>
+                    <a:lnB w="0">
+                      <a:noFill/>
+                    </a:lnB>
+                  </a:tcPr>
+                </a:tc>
+              </a:tr>
+              <a:tr h="228600">
+                <a:tc>
+                  <a:txBody>
+                    <a:bodyPr wrap="none"/>
+                    <a:lstStyle/>
+                    <a:p>
+                      <a:pPr algn="l"/>
+                      <a:r>
+                        <a:rPr sz="800" b="0" i="0">
+                          <a:solidFill>
+                            <a:srgbClr val="000000"/>
+                          </a:solidFill>
+                          <a:latin typeface="Arial"/>
+                        </a:rPr>
+                        <a:t>Revenue 2026E (NOKm)</a:t>
+                      </a:r>
+                    </a:p>
+                  </a:txBody>
+                  <a:tcPr marL="36576" marR="36576" marT="9144" marB="9144" anchor="ctr">
+                    <a:solidFill>
+                      <a:srgbClr val="FFFFFF"/>
+                    </a:solidFill>
+                    <a:lnL w="0">
+                      <a:noFill/>
+                    </a:lnL>
+                    <a:lnR w="0">
+                      <a:noFill/>
+                    </a:lnR>
+                    <a:lnT w="6350">
+                      <a:solidFill>
+                        <a:srgbClr val="003255"/>
+                      </a:solidFill>
+                    </a:lnT>
+                    <a:lnB w="0">
+                      <a:noFill/>
+                    </a:lnB>
+                  </a:tcPr>
+                </a:tc>
+                <a:tc>
+                  <a:txBody>
+                    <a:bodyPr wrap="none"/>
+                    <a:lstStyle/>
+                    <a:p>
+                      <a:pPr algn="r"/>
+                      <a:r>
+                        <a:rPr sz="800" b="0" i="0">
+                          <a:solidFill>
+                            <a:srgbClr val="000000"/>
+                          </a:solidFill>
+                          <a:latin typeface="Arial"/>
+                        </a:rPr>
+                        <a:t>3,970</a:t>
+                      </a:r>
+                    </a:p>
+                  </a:txBody>
+                  <a:tcPr marL="36576" marR="36576" marT="9144" marB="9144" anchor="ctr">
+                    <a:solidFill>
+                      <a:srgbClr val="FFFFFF"/>
+                    </a:solidFill>
+                    <a:lnL w="0">
+                      <a:noFill/>
+                    </a:lnL>
+                    <a:lnR w="0">
+                      <a:noFill/>
+                    </a:lnR>
+                    <a:lnT w="6350">
+                      <a:solidFill>
+                        <a:srgbClr val="003255"/>
+                      </a:solidFill>
+                    </a:lnT>
+                    <a:lnB w="0">
+                      <a:noFill/>
+                    </a:lnB>
+                  </a:tcPr>
+                </a:tc>
+                <a:tc>
+                  <a:txBody>
+                    <a:bodyPr wrap="none"/>
+                    <a:lstStyle/>
+                    <a:p>
+                      <a:pPr algn="r"/>
+                      <a:r>
+                        <a:rPr sz="800" b="0" i="0">
+                          <a:solidFill>
+                            <a:srgbClr val="000000"/>
+                          </a:solidFill>
+                          <a:latin typeface="Arial"/>
+                        </a:rPr>
+                        <a:t>3,970</a:t>
+                      </a:r>
+                    </a:p>
+                  </a:txBody>
+                  <a:tcPr marL="36576" marR="36576" marT="9144" marB="9144" anchor="ctr">
+                    <a:solidFill>
+                      <a:srgbClr val="FFFFFF"/>
+                    </a:solidFill>
+                    <a:lnL w="0">
+                      <a:noFill/>
+                    </a:lnL>
+                    <a:lnR w="0">
+                      <a:noFill/>
+                    </a:lnR>
+                    <a:lnT w="6350">
+                      <a:solidFill>
+                        <a:srgbClr val="003255"/>
+                      </a:solidFill>
+                    </a:lnT>
+                    <a:lnB w="0">
+                      <a:noFill/>
+                    </a:lnB>
+                  </a:tcPr>
+                </a:tc>
+                <a:tc>
+                  <a:txBody>
+                    <a:bodyPr wrap="none"/>
+                    <a:lstStyle/>
+                    <a:p>
+                      <a:pPr algn="r"/>
+                      <a:r>
+                        <a:rPr sz="800" b="0" i="0">
+                          <a:solidFill>
+                            <a:srgbClr val="000000"/>
+                          </a:solidFill>
+                          <a:latin typeface="Arial"/>
+                        </a:rPr>
+                        <a:t>-0.0%</a:t>
+                      </a:r>
+                    </a:p>
+                  </a:txBody>
+                  <a:tcPr marL="36576" marR="36576" marT="9144" marB="9144" anchor="ctr">
+                    <a:solidFill>
+                      <a:srgbClr val="FFFFFF"/>
+                    </a:solidFill>
+                    <a:lnL w="0">
+                      <a:noFill/>
+                    </a:lnL>
+                    <a:lnR w="0">
+                      <a:noFill/>
+                    </a:lnR>
+                    <a:lnT w="6350">
+                      <a:solidFill>
+                        <a:srgbClr val="003255"/>
+                      </a:solidFill>
+                    </a:lnT>
+                    <a:lnB w="0">
+                      <a:noFill/>
+                    </a:lnB>
+                  </a:tcPr>
+                </a:tc>
+                <a:tc>
+                  <a:txBody>
+                    <a:bodyPr wrap="none"/>
+                    <a:lstStyle/>
+                    <a:p>
+                      <a:pPr algn="r"/>
+                      <a:r>
+                        <a:rPr sz="800" b="0" i="0">
+                          <a:solidFill>
+                            <a:srgbClr val="000000"/>
+                          </a:solidFill>
+                          <a:latin typeface="Arial"/>
+                        </a:rPr>
+                        <a:t>3,966</a:t>
+                      </a:r>
+                    </a:p>
+                  </a:txBody>
+                  <a:tcPr marL="36576" marR="36576" marT="9144" marB="9144" anchor="ctr">
+                    <a:solidFill>
+                      <a:srgbClr val="FFFFFF"/>
+                    </a:solidFill>
+                    <a:lnL w="0">
+                      <a:noFill/>
+                    </a:lnL>
+                    <a:lnR w="0">
+                      <a:noFill/>
+                    </a:lnR>
+                    <a:lnT w="6350">
+                      <a:solidFill>
+                        <a:srgbClr val="003255"/>
+                      </a:solidFill>
+                    </a:lnT>
+                    <a:lnB w="0">
+                      <a:noFill/>
+                    </a:lnB>
+                  </a:tcPr>
+                </a:tc>
+                <a:tc>
+                  <a:txBody>
+                    <a:bodyPr wrap="none"/>
+                    <a:lstStyle/>
+                    <a:p>
+                      <a:pPr algn="r"/>
+                      <a:r>
+                        <a:rPr sz="800" b="0" i="0">
+                          <a:solidFill>
+                            <a:srgbClr val="000000"/>
+                          </a:solidFill>
+                          <a:latin typeface="Arial"/>
+                        </a:rPr>
+                        <a:t>3,974</a:t>
+                      </a:r>
+                    </a:p>
+                  </a:txBody>
+                  <a:tcPr marL="36576" marR="36576" marT="9144" marB="9144" anchor="ctr">
+                    <a:solidFill>
+                      <a:srgbClr val="FFFFFF"/>
+                    </a:solidFill>
+                    <a:lnL w="0">
+                      <a:noFill/>
+                    </a:lnL>
+                    <a:lnR w="0">
+                      <a:noFill/>
+                    </a:lnR>
+                    <a:lnT w="6350">
+                      <a:solidFill>
+                        <a:srgbClr val="003255"/>
+                      </a:solidFill>
+                    </a:lnT>
+                    <a:lnB w="0">
+                      <a:noFill/>
+                    </a:lnB>
+                  </a:tcPr>
+                </a:tc>
+                <a:tc>
+                  <a:txBody>
+                    <a:bodyPr wrap="none"/>
+                    <a:lstStyle/>
+                    <a:p>
+                      <a:pPr algn="r"/>
+                      <a:r>
+                        <a:rPr sz="800" b="0" i="0">
+                          <a:solidFill>
+                            <a:srgbClr val="000000"/>
+                          </a:solidFill>
+                          <a:latin typeface="Arial"/>
+                        </a:rPr>
+                        <a:t>2</a:t>
+                      </a:r>
+                    </a:p>
+                  </a:txBody>
+                  <a:tcPr marL="36576" marR="36576" marT="9144" marB="9144" anchor="ctr">
+                    <a:solidFill>
+                      <a:srgbClr val="FFFFFF"/>
+                    </a:solidFill>
+                    <a:lnL w="0">
+                      <a:noFill/>
+                    </a:lnL>
+                    <a:lnR w="0">
+                      <a:noFill/>
+                    </a:lnR>
+                    <a:lnT w="6350">
+                      <a:solidFill>
+                        <a:srgbClr val="003255"/>
+                      </a:solidFill>
+                    </a:lnT>
+                    <a:lnB w="0">
+                      <a:noFill/>
+                    </a:lnB>
+                  </a:tcPr>
+                </a:tc>
+              </a:tr>
+              <a:tr h="228600">
+                <a:tc>
+                  <a:txBody>
+                    <a:bodyPr wrap="none"/>
+                    <a:lstStyle/>
+                    <a:p>
+                      <a:pPr algn="l"/>
+                      <a:r>
+                        <a:rPr sz="800" b="0" i="0">
+                          <a:solidFill>
+                            <a:srgbClr val="000000"/>
+                          </a:solidFill>
+                          <a:latin typeface="Arial"/>
+                        </a:rPr>
+                        <a:t>Revenue 2027E (NOKm)</a:t>
+                      </a:r>
+                    </a:p>
+                  </a:txBody>
+                  <a:tcPr marL="36576" marR="36576" marT="9144" marB="9144" anchor="ctr">
+                    <a:solidFill>
+                      <a:srgbClr val="EDEDED"/>
+                    </a:solidFill>
+                    <a:lnL w="0">
+                      <a:noFill/>
+                    </a:lnL>
+                    <a:lnR w="0">
+                      <a:noFill/>
+                    </a:lnR>
+                    <a:lnT w="0">
+                      <a:noFill/>
+                    </a:lnT>
+                    <a:lnB w="0">
+                      <a:noFill/>
+                    </a:lnB>
+                  </a:tcPr>
+                </a:tc>
+                <a:tc>
+                  <a:txBody>
+                    <a:bodyPr wrap="none"/>
+                    <a:lstStyle/>
+                    <a:p>
+                      <a:pPr algn="r"/>
+                      <a:r>
+                        <a:rPr sz="800" b="0" i="0">
+                          <a:solidFill>
+                            <a:srgbClr val="000000"/>
+                          </a:solidFill>
+                          <a:latin typeface="Arial"/>
+                        </a:rPr>
+                        <a:t>4,278</a:t>
+                      </a:r>
+                    </a:p>
+                  </a:txBody>
+                  <a:tcPr marL="36576" marR="36576" marT="9144" marB="9144" anchor="ctr">
+                    <a:solidFill>
+                      <a:srgbClr val="EDEDED"/>
+                    </a:solidFill>
+                    <a:lnL w="0">
+                      <a:noFill/>
+                    </a:lnL>
+                    <a:lnR w="0">
+                      <a:noFill/>
+                    </a:lnR>
+                    <a:lnT w="0">
+                      <a:noFill/>
+                    </a:lnT>
+                    <a:lnB w="0">
+                      <a:noFill/>
+                    </a:lnB>
+                  </a:tcPr>
+                </a:tc>
+                <a:tc>
+                  <a:txBody>
+                    <a:bodyPr wrap="none"/>
+                    <a:lstStyle/>
+                    <a:p>
+                      <a:pPr algn="r"/>
+                      <a:r>
+                        <a:rPr sz="800" b="0" i="0">
+                          <a:solidFill>
+                            <a:srgbClr val="000000"/>
+                          </a:solidFill>
+                          <a:latin typeface="Arial"/>
+                        </a:rPr>
+                        <a:t>4,278</a:t>
+                      </a:r>
+                    </a:p>
+                  </a:txBody>
+                  <a:tcPr marL="36576" marR="36576" marT="9144" marB="9144" anchor="ctr">
+                    <a:solidFill>
+                      <a:srgbClr val="EDEDED"/>
+                    </a:solidFill>
+                    <a:lnL w="0">
+                      <a:noFill/>
+                    </a:lnL>
+                    <a:lnR w="0">
+                      <a:noFill/>
+                    </a:lnR>
+                    <a:lnT w="0">
+                      <a:noFill/>
+                    </a:lnT>
+                    <a:lnB w="0">
+                      <a:noFill/>
+                    </a:lnB>
+                  </a:tcPr>
+                </a:tc>
+                <a:tc>
+                  <a:txBody>
+                    <a:bodyPr wrap="none"/>
+                    <a:lstStyle/>
+                    <a:p>
+                      <a:pPr algn="r"/>
+                      <a:r>
+                        <a:rPr sz="800" b="0" i="0">
+                          <a:solidFill>
+                            <a:srgbClr val="000000"/>
+                          </a:solidFill>
+                          <a:latin typeface="Arial"/>
+                        </a:rPr>
+                        <a:t>-0.0%</a:t>
+                      </a:r>
+                    </a:p>
+                  </a:txBody>
+                  <a:tcPr marL="36576" marR="36576" marT="9144" marB="9144" anchor="ctr">
+                    <a:solidFill>
+                      <a:srgbClr val="EDEDED"/>
+                    </a:solidFill>
+                    <a:lnL w="0">
+                      <a:noFill/>
+                    </a:lnL>
+                    <a:lnR w="0">
+                      <a:noFill/>
+                    </a:lnR>
+                    <a:lnT w="0">
+                      <a:noFill/>
+                    </a:lnT>
+                    <a:lnB w="0">
+                      <a:noFill/>
+                    </a:lnB>
+                  </a:tcPr>
+                </a:tc>
+                <a:tc>
+                  <a:txBody>
+                    <a:bodyPr wrap="none"/>
+                    <a:lstStyle/>
+                    <a:p>
+                      <a:pPr algn="r"/>
+                      <a:r>
+                        <a:rPr sz="800" b="0" i="0">
+                          <a:solidFill>
+                            <a:srgbClr val="000000"/>
+                          </a:solidFill>
+                          <a:latin typeface="Arial"/>
+                        </a:rPr>
+                        <a:t>4,254</a:t>
+                      </a:r>
+                    </a:p>
+                  </a:txBody>
+                  <a:tcPr marL="36576" marR="36576" marT="9144" marB="9144" anchor="ctr">
+                    <a:solidFill>
+                      <a:srgbClr val="EDEDED"/>
+                    </a:solidFill>
+                    <a:lnL w="0">
+                      <a:noFill/>
+                    </a:lnL>
+                    <a:lnR w="0">
+                      <a:noFill/>
+                    </a:lnR>
+                    <a:lnT w="0">
+                      <a:noFill/>
+                    </a:lnT>
+                    <a:lnB w="0">
+                      <a:noFill/>
+                    </a:lnB>
+                  </a:tcPr>
+                </a:tc>
+                <a:tc>
+                  <a:txBody>
+                    <a:bodyPr wrap="none"/>
+                    <a:lstStyle/>
+                    <a:p>
+                      <a:pPr algn="r"/>
+                      <a:r>
+                        <a:rPr sz="800" b="0" i="0">
+                          <a:solidFill>
+                            <a:srgbClr val="000000"/>
+                          </a:solidFill>
+                          <a:latin typeface="Arial"/>
+                        </a:rPr>
+                        <a:t>4,302</a:t>
+                      </a:r>
+                    </a:p>
+                  </a:txBody>
+                  <a:tcPr marL="36576" marR="36576" marT="9144" marB="9144" anchor="ctr">
+                    <a:solidFill>
+                      <a:srgbClr val="EDEDED"/>
+                    </a:solidFill>
+                    <a:lnL w="0">
+                      <a:noFill/>
+                    </a:lnL>
+                    <a:lnR w="0">
+                      <a:noFill/>
+                    </a:lnR>
+                    <a:lnT w="0">
+                      <a:noFill/>
+                    </a:lnT>
+                    <a:lnB w="0">
+                      <a:noFill/>
+                    </a:lnB>
+                  </a:tcPr>
+                </a:tc>
+                <a:tc>
+                  <a:txBody>
+                    <a:bodyPr wrap="none"/>
+                    <a:lstStyle/>
+                    <a:p>
+                      <a:pPr algn="r"/>
+                      <a:r>
+                        <a:rPr sz="800" b="0" i="0">
+                          <a:solidFill>
+                            <a:srgbClr val="000000"/>
+                          </a:solidFill>
+                          <a:latin typeface="Arial"/>
+                        </a:rPr>
+                        <a:t>2</a:t>
+                      </a:r>
+                    </a:p>
+                  </a:txBody>
+                  <a:tcPr marL="36576" marR="36576" marT="9144" marB="9144" anchor="ctr">
+                    <a:solidFill>
+                      <a:srgbClr val="EDEDED"/>
+                    </a:solidFill>
+                    <a:lnL w="0">
+                      <a:noFill/>
+                    </a:lnL>
+                    <a:lnR w="0">
+                      <a:noFill/>
+                    </a:lnR>
+                    <a:lnT w="0">
+                      <a:noFill/>
+                    </a:lnT>
+                    <a:lnB w="0">
+                      <a:noFill/>
+                    </a:lnB>
+                  </a:tcPr>
+                </a:tc>
+              </a:tr>
+              <a:tr h="228600">
+                <a:tc>
+                  <a:txBody>
+                    <a:bodyPr wrap="none"/>
+                    <a:lstStyle/>
+                    <a:p>
+                      <a:pPr algn="l"/>
+                      <a:r>
+                        <a:rPr sz="800" b="0" i="0">
+                          <a:solidFill>
+                            <a:srgbClr val="000000"/>
+                          </a:solidFill>
+                          <a:latin typeface="Arial"/>
+                        </a:rPr>
+                        <a:t>EPS 2026E (NOK)</a:t>
+                      </a:r>
+                    </a:p>
+                  </a:txBody>
+                  <a:tcPr marL="36576" marR="36576" marT="9144" marB="9144" anchor="ctr">
+                    <a:solidFill>
+                      <a:srgbClr val="FFFFFF"/>
+                    </a:solidFill>
+                    <a:lnL w="0">
+                      <a:noFill/>
+                    </a:lnL>
+                    <a:lnR w="0">
+                      <a:noFill/>
+                    </a:lnR>
+                    <a:lnT w="0">
+                      <a:noFill/>
+                    </a:lnT>
+                    <a:lnB w="0">
+                      <a:noFill/>
+                    </a:lnB>
+                  </a:tcPr>
+                </a:tc>
+                <a:tc>
+                  <a:txBody>
+                    <a:bodyPr wrap="none"/>
+                    <a:lstStyle/>
+                    <a:p>
+                      <a:pPr algn="r"/>
+                      <a:r>
+                        <a:rPr sz="800" b="0" i="0">
+                          <a:solidFill>
+                            <a:srgbClr val="000000"/>
+                          </a:solidFill>
+                          <a:latin typeface="Arial"/>
+                        </a:rPr>
+                        <a:t>3.60</a:t>
+                      </a:r>
+                    </a:p>
+                  </a:txBody>
+                  <a:tcPr marL="36576" marR="36576" marT="9144" marB="9144" anchor="ctr">
+                    <a:solidFill>
+                      <a:srgbClr val="FFFFFF"/>
+                    </a:solidFill>
+                    <a:lnL w="0">
+                      <a:noFill/>
+                    </a:lnL>
+                    <a:lnR w="0">
+                      <a:noFill/>
+                    </a:lnR>
+                    <a:lnT w="0">
+                      <a:noFill/>
+                    </a:lnT>
+                    <a:lnB w="0">
+                      <a:noFill/>
+                    </a:lnB>
+                  </a:tcPr>
+                </a:tc>
+                <a:tc>
+                  <a:txBody>
+                    <a:bodyPr wrap="none"/>
+                    <a:lstStyle/>
+                    <a:p>
+                      <a:pPr algn="r"/>
+                      <a:r>
+                        <a:rPr sz="800" b="0" i="0">
+                          <a:solidFill>
+                            <a:srgbClr val="000000"/>
+                          </a:solidFill>
+                          <a:latin typeface="Arial"/>
+                        </a:rPr>
+                        <a:t>3.28</a:t>
+                      </a:r>
+                    </a:p>
+                  </a:txBody>
+                  <a:tcPr marL="36576" marR="36576" marT="9144" marB="9144" anchor="ctr">
+                    <a:solidFill>
+                      <a:srgbClr val="FFFFFF"/>
+                    </a:solidFill>
+                    <a:lnL w="0">
+                      <a:noFill/>
+                    </a:lnL>
+                    <a:lnR w="0">
+                      <a:noFill/>
+                    </a:lnR>
+                    <a:lnT w="0">
+                      <a:noFill/>
+                    </a:lnT>
+                    <a:lnB w="0">
+                      <a:noFill/>
+                    </a:lnB>
+                  </a:tcPr>
+                </a:tc>
+                <a:tc>
+                  <a:txBody>
+                    <a:bodyPr wrap="none"/>
+                    <a:lstStyle/>
+                    <a:p>
+                      <a:pPr algn="r"/>
+                      <a:r>
+                        <a:rPr sz="800" b="0" i="0">
+                          <a:solidFill>
+                            <a:srgbClr val="000000"/>
+                          </a:solidFill>
+                          <a:latin typeface="Arial"/>
+                        </a:rPr>
+                        <a:t>+9.5%</a:t>
+                      </a:r>
+                    </a:p>
+                  </a:txBody>
+                  <a:tcPr marL="36576" marR="36576" marT="9144" marB="9144" anchor="ctr">
+                    <a:solidFill>
+                      <a:srgbClr val="E3EEE9"/>
+                    </a:solidFill>
+                    <a:lnL w="0">
+                      <a:noFill/>
+                    </a:lnL>
+                    <a:lnR w="0">
+                      <a:noFill/>
+                    </a:lnR>
+                    <a:lnT w="0">
+                      <a:noFill/>
+                    </a:lnT>
+                    <a:lnB w="0">
+                      <a:noFill/>
+                    </a:lnB>
+                  </a:tcPr>
+                </a:tc>
+                <a:tc>
+                  <a:txBody>
+                    <a:bodyPr wrap="none"/>
+                    <a:lstStyle/>
+                    <a:p>
+                      <a:pPr algn="r"/>
+                      <a:r>
+                        <a:rPr sz="800" b="0" i="0">
+                          <a:solidFill>
+                            <a:srgbClr val="000000"/>
+                          </a:solidFill>
+                          <a:latin typeface="Arial"/>
+                        </a:rPr>
+                        <a:t>3.26</a:t>
+                      </a:r>
+                    </a:p>
+                  </a:txBody>
+                  <a:tcPr marL="36576" marR="36576" marT="9144" marB="9144" anchor="ctr">
+                    <a:solidFill>
+                      <a:srgbClr val="FFFFFF"/>
+                    </a:solidFill>
+                    <a:lnL w="0">
+                      <a:noFill/>
+                    </a:lnL>
+                    <a:lnR w="0">
+                      <a:noFill/>
+                    </a:lnR>
+                    <a:lnT w="0">
+                      <a:noFill/>
+                    </a:lnT>
+                    <a:lnB w="0">
+                      <a:noFill/>
+                    </a:lnB>
+                  </a:tcPr>
+                </a:tc>
+                <a:tc>
+                  <a:txBody>
+                    <a:bodyPr wrap="none"/>
+                    <a:lstStyle/>
+                    <a:p>
+                      <a:pPr algn="r"/>
+                      <a:r>
+                        <a:rPr sz="800" b="0" i="0">
+                          <a:solidFill>
+                            <a:srgbClr val="000000"/>
+                          </a:solidFill>
+                          <a:latin typeface="Arial"/>
+                        </a:rPr>
+                        <a:t>3.31</a:t>
+                      </a:r>
+                    </a:p>
+                  </a:txBody>
+                  <a:tcPr marL="36576" marR="36576" marT="9144" marB="9144" anchor="ctr">
+                    <a:solidFill>
+                      <a:srgbClr val="FFFFFF"/>
+                    </a:solidFill>
+                    <a:lnL w="0">
+                      <a:noFill/>
+                    </a:lnL>
+                    <a:lnR w="0">
+                      <a:noFill/>
+                    </a:lnR>
+                    <a:lnT w="0">
+                      <a:noFill/>
+                    </a:lnT>
+                    <a:lnB w="0">
+                      <a:noFill/>
+                    </a:lnB>
+                  </a:tcPr>
+                </a:tc>
+                <a:tc>
+                  <a:txBody>
+                    <a:bodyPr wrap="none"/>
+                    <a:lstStyle/>
+                    <a:p>
+                      <a:pPr algn="r"/>
+                      <a:r>
+                        <a:rPr sz="800" b="0" i="0">
+                          <a:solidFill>
+                            <a:srgbClr val="000000"/>
+                          </a:solidFill>
+                          <a:latin typeface="Arial"/>
+                        </a:rPr>
+                        <a:t>2</a:t>
+                      </a:r>
+                    </a:p>
+                  </a:txBody>
+                  <a:tcPr marL="36576" marR="36576" marT="9144" marB="9144" anchor="ctr">
+                    <a:solidFill>
+                      <a:srgbClr val="FFFFFF"/>
+                    </a:solidFill>
+                    <a:lnL w="0">
+                      <a:noFill/>
+                    </a:lnL>
+                    <a:lnR w="0">
+                      <a:noFill/>
+                    </a:lnR>
+                    <a:lnT w="0">
+                      <a:noFill/>
+                    </a:lnT>
+                    <a:lnB w="0">
+                      <a:noFill/>
+                    </a:lnB>
+                  </a:tcPr>
+                </a:tc>
+              </a:tr>
+              <a:tr h="228600">
+                <a:tc>
+                  <a:txBody>
+                    <a:bodyPr wrap="none"/>
+                    <a:lstStyle/>
+                    <a:p>
+                      <a:pPr algn="l"/>
+                      <a:r>
+                        <a:rPr sz="800" b="0" i="0">
+                          <a:solidFill>
+                            <a:srgbClr val="000000"/>
+                          </a:solidFill>
+                          <a:latin typeface="Arial"/>
+                        </a:rPr>
+                        <a:t>EPS 2027E (NOK)</a:t>
+                      </a:r>
+                    </a:p>
+                  </a:txBody>
+                  <a:tcPr marL="36576" marR="36576" marT="9144" marB="9144" anchor="ctr">
+                    <a:solidFill>
+                      <a:srgbClr val="EDEDED"/>
+                    </a:solidFill>
+                    <a:lnL w="0">
+                      <a:noFill/>
+                    </a:lnL>
+                    <a:lnR w="0">
+                      <a:noFill/>
+                    </a:lnR>
+                    <a:lnT w="0">
+                      <a:noFill/>
+                    </a:lnT>
+                    <a:lnB w="6350">
+                      <a:solidFill>
+                        <a:srgbClr val="BFC5CA"/>
+                      </a:solidFill>
+                    </a:lnB>
+                  </a:tcPr>
+                </a:tc>
+                <a:tc>
+                  <a:txBody>
+                    <a:bodyPr wrap="none"/>
+                    <a:lstStyle/>
+                    <a:p>
+                      <a:pPr algn="r"/>
+                      <a:r>
+                        <a:rPr sz="800" b="0" i="0">
+                          <a:solidFill>
+                            <a:srgbClr val="000000"/>
+                          </a:solidFill>
+                          <a:latin typeface="Arial"/>
+                        </a:rPr>
+                        <a:t>3.89</a:t>
+                      </a:r>
+                    </a:p>
+                  </a:txBody>
+                  <a:tcPr marL="36576" marR="36576" marT="9144" marB="9144" anchor="ctr">
+                    <a:solidFill>
+                      <a:srgbClr val="EDEDED"/>
+                    </a:solidFill>
+                    <a:lnL w="0">
+                      <a:noFill/>
+                    </a:lnL>
+                    <a:lnR w="0">
+                      <a:noFill/>
+                    </a:lnR>
+                    <a:lnT w="0">
+                      <a:noFill/>
+                    </a:lnT>
+                    <a:lnB w="6350">
+                      <a:solidFill>
+                        <a:srgbClr val="BFC5CA"/>
+                      </a:solidFill>
+                    </a:lnB>
+                  </a:tcPr>
+                </a:tc>
+                <a:tc>
+                  <a:txBody>
+                    <a:bodyPr wrap="none"/>
+                    <a:lstStyle/>
+                    <a:p>
+                      <a:pPr algn="r"/>
+                      <a:r>
+                        <a:rPr sz="800" b="0" i="0">
+                          <a:solidFill>
+                            <a:srgbClr val="000000"/>
+                          </a:solidFill>
+                          <a:latin typeface="Arial"/>
+                        </a:rPr>
+                        <a:t>3.66</a:t>
+                      </a:r>
+                    </a:p>
+                  </a:txBody>
+                  <a:tcPr marL="36576" marR="36576" marT="9144" marB="9144" anchor="ctr">
+                    <a:solidFill>
+                      <a:srgbClr val="EDEDED"/>
+                    </a:solidFill>
+                    <a:lnL w="0">
+                      <a:noFill/>
+                    </a:lnL>
+                    <a:lnR w="0">
+                      <a:noFill/>
+                    </a:lnR>
+                    <a:lnT w="0">
+                      <a:noFill/>
+                    </a:lnT>
+                    <a:lnB w="6350">
+                      <a:solidFill>
+                        <a:srgbClr val="BFC5CA"/>
+                      </a:solidFill>
+                    </a:lnB>
+                  </a:tcPr>
+                </a:tc>
+                <a:tc>
+                  <a:txBody>
+                    <a:bodyPr wrap="none"/>
+                    <a:lstStyle/>
+                    <a:p>
+                      <a:pPr algn="r"/>
+                      <a:r>
+                        <a:rPr sz="800" b="0" i="0">
+                          <a:solidFill>
+                            <a:srgbClr val="000000"/>
+                          </a:solidFill>
+                          <a:latin typeface="Arial"/>
+                        </a:rPr>
+                        <a:t>+6.4%</a:t>
+                      </a:r>
+                    </a:p>
+                  </a:txBody>
+                  <a:tcPr marL="36576" marR="36576" marT="9144" marB="9144" anchor="ctr">
+                    <a:solidFill>
+                      <a:srgbClr val="E3EEE9"/>
+                    </a:solidFill>
+                    <a:lnL w="0">
+                      <a:noFill/>
+                    </a:lnL>
+                    <a:lnR w="0">
+                      <a:noFill/>
+                    </a:lnR>
+                    <a:lnT w="0">
+                      <a:noFill/>
+                    </a:lnT>
+                    <a:lnB w="6350">
+                      <a:solidFill>
+                        <a:srgbClr val="BFC5CA"/>
+                      </a:solidFill>
+                    </a:lnB>
+                  </a:tcPr>
+                </a:tc>
+                <a:tc>
+                  <a:txBody>
+                    <a:bodyPr wrap="none"/>
+                    <a:lstStyle/>
+                    <a:p>
+                      <a:pPr algn="r"/>
+                      <a:r>
+                        <a:rPr sz="800" b="0" i="0">
+                          <a:solidFill>
+                            <a:srgbClr val="000000"/>
+                          </a:solidFill>
+                          <a:latin typeface="Arial"/>
+                        </a:rPr>
+                        <a:t>3.59</a:t>
+                      </a:r>
+                    </a:p>
+                  </a:txBody>
+                  <a:tcPr marL="36576" marR="36576" marT="9144" marB="9144" anchor="ctr">
+                    <a:solidFill>
+                      <a:srgbClr val="EDEDED"/>
+                    </a:solidFill>
+                    <a:lnL w="0">
+                      <a:noFill/>
+                    </a:lnL>
+                    <a:lnR w="0">
+                      <a:noFill/>
+                    </a:lnR>
+                    <a:lnT w="0">
+                      <a:noFill/>
+                    </a:lnT>
+                    <a:lnB w="6350">
+                      <a:solidFill>
+                        <a:srgbClr val="BFC5CA"/>
+                      </a:solidFill>
+                    </a:lnB>
+                  </a:tcPr>
+                </a:tc>
+                <a:tc>
+                  <a:txBody>
+                    <a:bodyPr wrap="none"/>
+                    <a:lstStyle/>
+                    <a:p>
+                      <a:pPr algn="r"/>
+                      <a:r>
+                        <a:rPr sz="800" b="0" i="0">
+                          <a:solidFill>
+                            <a:srgbClr val="000000"/>
+                          </a:solidFill>
+                          <a:latin typeface="Arial"/>
+                        </a:rPr>
+                        <a:t>3.73</a:t>
+                      </a:r>
+                    </a:p>
+                  </a:txBody>
+                  <a:tcPr marL="36576" marR="36576" marT="9144" marB="9144" anchor="ctr">
+                    <a:solidFill>
+                      <a:srgbClr val="EDEDED"/>
+                    </a:solidFill>
+                    <a:lnL w="0">
+                      <a:noFill/>
+                    </a:lnL>
+                    <a:lnR w="0">
+                      <a:noFill/>
+                    </a:lnR>
+                    <a:lnT w="0">
+                      <a:noFill/>
+                    </a:lnT>
+                    <a:lnB w="6350">
+                      <a:solidFill>
+                        <a:srgbClr val="BFC5CA"/>
+                      </a:solidFill>
+                    </a:lnB>
+                  </a:tcPr>
+                </a:tc>
+                <a:tc>
+                  <a:txBody>
+                    <a:bodyPr wrap="none"/>
+                    <a:lstStyle/>
+                    <a:p>
+                      <a:pPr algn="r"/>
+                      <a:r>
+                        <a:rPr sz="800" b="0" i="0">
+                          <a:solidFill>
+                            <a:srgbClr val="000000"/>
+                          </a:solidFill>
+                          <a:latin typeface="Arial"/>
+                        </a:rPr>
+                        <a:t>2</a:t>
+                      </a:r>
+                    </a:p>
+                  </a:txBody>
+                  <a:tcPr marL="36576" marR="36576" marT="9144" marB="9144" anchor="ctr">
+                    <a:solidFill>
+                      <a:srgbClr val="EDEDED"/>
+                    </a:solidFill>
+                    <a:lnL w="0">
+                      <a:noFill/>
+                    </a:lnL>
+                    <a:lnR w="0">
+                      <a:noFill/>
+                    </a:lnR>
+                    <a:lnT w="0">
+                      <a:noFill/>
+                    </a:lnT>
+                    <a:lnB w="6350">
+                      <a:solidFill>
+                        <a:srgbClr val="BFC5CA"/>
+                      </a:solidFill>
+                    </a:lnB>
+                  </a:tcPr>
+                </a:tc>
+              </a:tr>
+            </a:tbl>
+          </a:graphicData>
+        </a:graphic>
+      </p:graphicFrame>
+      <p:sp>
+        <p:nvSpPr>
+          <p:cNvPr id="9" name="TextBox 8"/>
+          <p:cNvSpPr txBox="1"/>
+          <p:nvPr/>
+        </p:nvSpPr>
+        <p:spPr>
+          <a:xfrm>
+            <a:off x="429768" y="2962656"/>
+            <a:ext cx="6217920" cy="237744"/>
+          </a:xfrm>
+          <a:prstGeom prst="rect">
+            <a:avLst/>
+          </a:prstGeom>
+          <a:noFill/>
+        </p:spPr>
+        <p:txBody>
+          <a:bodyPr wrap="none" anchor="b" lIns="18288" rIns="18288" tIns="18288" bIns="18288">
+            <a:spAutoFit/>
+          </a:bodyPr>
+          <a:lstStyle/>
+          <a:p>
+            <a:pPr algn="l"/>
+            <a:r>
+              <a:rPr sz="950" b="1" i="0">
+                <a:solidFill>
+                  <a:srgbClr val="003255"/>
+                </a:solidFill>
+                <a:latin typeface="Arial"/>
+              </a:rPr>
+              <a:t>Variant view, estimate momentum and catalysts</a:t>
+            </a:r>
+          </a:p>
+        </p:txBody>
+      </p:sp>
+      <p:cxnSp>
+        <p:nvCxnSpPr>
+          <p:cNvPr id="10" name="Connector 9"/>
+          <p:cNvCxnSpPr/>
+          <p:nvPr/>
+        </p:nvCxnSpPr>
+        <p:spPr>
+          <a:xfrm>
+            <a:off x="429768" y="3209544"/>
+            <a:ext cx="6217920" cy="0"/>
+          </a:xfrm>
+          <a:prstGeom prst="line">
+            <a:avLst/>
+          </a:prstGeom>
+          <a:ln w="12700">
+            <a:solidFill>
+              <a:srgbClr val="003255"/>
+            </a:solidFill>
+          </a:ln>
+        </p:spPr>
+        <p:style>
+          <a:lnRef idx="2">
+            <a:schemeClr val="accent1"/>
+          </a:lnRef>
+          <a:fillRef idx="0">
+            <a:schemeClr val="accent1"/>
+          </a:fillRef>
+          <a:effectRef idx="1">
+            <a:schemeClr val="accent1"/>
+          </a:effectRef>
+          <a:fontRef idx="minor">
+            <a:schemeClr val="tx1"/>
+          </a:fontRef>
+        </p:style>
+      </p:cxnSp>
+      <p:sp>
+        <p:nvSpPr>
+          <p:cNvPr id="11" name="Rectangle 10"/>
+          <p:cNvSpPr/>
+          <p:nvPr/>
+        </p:nvSpPr>
+        <p:spPr>
+          <a:xfrm>
+            <a:off x="6739128" y="2999232"/>
+            <a:ext cx="256032" cy="256032"/>
+          </a:xfrm>
+          <a:prstGeom prst="rect">
+            <a:avLst/>
+          </a:prstGeom>
+          <a:solidFill>
+            <a:srgbClr val="003255"/>
+          </a:solidFill>
+          <a:ln>
+            <a:noFill/>
+          </a:ln>
+          <a:effectLst/>
+        </p:spPr>
+        <p:style>
+          <a:lnRef idx="1">
+            <a:schemeClr val="accent1"/>
+          </a:lnRef>
+          <a:fillRef idx="3">
+            <a:schemeClr val="accent1"/>
+          </a:fillRef>
+          <a:effectRef idx="2">
+            <a:schemeClr val="accent1"/>
+          </a:effectRef>
+          <a:fontRef idx="minor">
+            <a:schemeClr val="lt1"/>
+          </a:fontRef>
+        </p:style>
+        <p:txBody>
+          <a:bodyPr rtlCol="0" anchor="ctr" lIns="0" rIns="0" tIns="0" bIns="0"/>
+          <a:lstStyle/>
+          <a:p>
+            <a:pPr algn="ctr"/>
+            <a:r>
+              <a:rPr sz="900" b="1" i="0">
+                <a:solidFill>
+                  <a:srgbClr val="FFFFFF"/>
+                </a:solidFill>
+                <a:latin typeface="Arial"/>
+              </a:rPr>
+              <a:t>2</a:t>
+            </a:r>
+          </a:p>
+        </p:txBody>
+      </p:sp>
+      <p:sp>
+        <p:nvSpPr>
+          <p:cNvPr id="12" name="Rectangle 11"/>
+          <p:cNvSpPr/>
+          <p:nvPr/>
+        </p:nvSpPr>
+        <p:spPr>
+          <a:xfrm>
+            <a:off x="429768" y="3273552"/>
+            <a:ext cx="6583680" cy="2953511"/>
+          </a:xfrm>
+          <a:prstGeom prst="rect">
+            <a:avLst/>
+          </a:prstGeom>
+          <a:solidFill>
+            <a:srgbClr val="EDEDED"/>
+          </a:solidFill>
+          <a:ln>
+            <a:noFill/>
+          </a:ln>
+          <a:effectLst/>
+        </p:spPr>
+        <p:style>
+          <a:lnRef idx="1">
+            <a:schemeClr val="accent1"/>
+          </a:lnRef>
+          <a:fillRef idx="3">
+            <a:schemeClr val="accent1"/>
+          </a:fillRef>
+          <a:effectRef idx="2">
+            <a:schemeClr val="accent1"/>
+          </a:effectRef>
+          <a:fontRef idx="minor">
+            <a:schemeClr val="lt1"/>
+          </a:fontRef>
+        </p:style>
+        <p:txBody>
+          <a:bodyPr rtlCol="0" anchor="ctr"/>
+          <a:lstStyle/>
+          <a:p/>
+        </p:txBody>
+      </p:sp>
+      <p:sp>
+        <p:nvSpPr>
+          <p:cNvPr id="13" name="TextBox 12"/>
+          <p:cNvSpPr txBox="1"/>
+          <p:nvPr/>
+        </p:nvSpPr>
+        <p:spPr>
+          <a:xfrm>
+            <a:off x="448056" y="3319272"/>
+            <a:ext cx="6547104" cy="2862072"/>
+          </a:xfrm>
+          <a:prstGeom prst="rect">
+            <a:avLst/>
+          </a:prstGeom>
+          <a:noFill/>
+        </p:spPr>
+        <p:txBody>
+          <a:bodyPr wrap="square" anchor="t" lIns="54864" rIns="54864" tIns="54864" bIns="54864">
+            <a:spAutoFit/>
+          </a:bodyPr>
+          <a:lstStyle/>
+          <a:p>
+            <a:pPr marL="128016" indent="-128016">
+              <a:lnSpc>
+                <a:spcPct val="105000"/>
+              </a:lnSpc>
+              <a:spcAft>
+                <a:spcPts val="400"/>
+              </a:spcAft>
+              <a:buClr>
+                <a:srgbClr val="003255"/>
+              </a:buClr>
+              <a:buFont typeface="Arial"/>
+              <a:buChar char="▪"/>
+            </a:pPr>
+            <a:r>
+              <a:rPr sz="819" b="1" i="0">
+                <a:solidFill>
+                  <a:srgbClr val="000000"/>
+                </a:solidFill>
+                <a:latin typeface="Arial"/>
+              </a:rPr>
+              <a:t>EPS 2026E NOK 3.60 vs consensus NOK 3.28 (+10%):</a:t>
+            </a:r>
+            <a:r>
+              <a:rPr sz="819" b="0" i="0">
+                <a:solidFill>
+                  <a:srgbClr val="000000"/>
+                </a:solidFill>
+                <a:latin typeface="Arial"/>
+              </a:rPr>
+              <a:t> we are above the 2 analysts – outside the range of estimates; 2027E +6%; our view rests on a 13.5% 2026E EBITDA margin and a 22% tax rate</a:t>
+            </a:r>
+          </a:p>
+          <a:p>
+            <a:pPr marL="128016" indent="-128016">
+              <a:lnSpc>
+                <a:spcPct val="105000"/>
+              </a:lnSpc>
+              <a:spcAft>
+                <a:spcPts val="400"/>
+              </a:spcAft>
+              <a:buClr>
+                <a:srgbClr val="003255"/>
+              </a:buClr>
+              <a:buFont typeface="Arial"/>
+              <a:buChar char="▪"/>
+            </a:pPr>
+            <a:r>
+              <a:rPr sz="819" b="1" i="0">
+                <a:solidFill>
+                  <a:srgbClr val="000000"/>
+                </a:solidFill>
+                <a:latin typeface="Arial"/>
+              </a:rPr>
+              <a:t>Revenue 2026E NOK 3,970m vs consensus NOK 3,970m (-0.0%):</a:t>
+            </a:r>
+            <a:r>
+              <a:rPr sz="819" b="0" i="0">
+                <a:solidFill>
+                  <a:srgbClr val="000000"/>
+                </a:solidFill>
+                <a:latin typeface="Arial"/>
+              </a:rPr>
+              <a:t> in line by construction – our growth is anchored on consensus, so the differentiated view sits in margins</a:t>
+            </a:r>
+          </a:p>
+          <a:p>
+            <a:pPr marL="128016" indent="-128016">
+              <a:lnSpc>
+                <a:spcPct val="105000"/>
+              </a:lnSpc>
+              <a:spcAft>
+                <a:spcPts val="400"/>
+              </a:spcAft>
+              <a:buClr>
+                <a:srgbClr val="003255"/>
+              </a:buClr>
+              <a:buFont typeface="Arial"/>
+              <a:buChar char="▪"/>
+            </a:pPr>
+            <a:r>
+              <a:rPr sz="819" b="1" i="0">
+                <a:solidFill>
+                  <a:srgbClr val="000000"/>
+                </a:solidFill>
+                <a:latin typeface="Arial"/>
+              </a:rPr>
+              <a:t>Estimate momentum negative:</a:t>
+            </a:r>
+            <a:r>
+              <a:rPr sz="819" b="0" i="0">
+                <a:solidFill>
+                  <a:srgbClr val="000000"/>
+                </a:solidFill>
+                <a:latin typeface="Arial"/>
+              </a:rPr>
+              <a:t> consensus EPS over the last 90 days 2026E -4.1%, 2027E -3.2%; 2 upward and 2 downward revisions in the last 30 days</a:t>
+            </a:r>
+          </a:p>
+          <a:p>
+            <a:pPr marL="128016" indent="-128016">
+              <a:lnSpc>
+                <a:spcPct val="105000"/>
+              </a:lnSpc>
+              <a:spcAft>
+                <a:spcPts val="400"/>
+              </a:spcAft>
+              <a:buClr>
+                <a:srgbClr val="003255"/>
+              </a:buClr>
+              <a:buFont typeface="Arial"/>
+              <a:buChar char="▪"/>
+            </a:pPr>
+            <a:r>
+              <a:rPr sz="819" b="1" i="0">
+                <a:solidFill>
+                  <a:srgbClr val="000000"/>
+                </a:solidFill>
+                <a:latin typeface="Arial"/>
+              </a:rPr>
+              <a:t>Tension:</a:t>
+            </a:r>
+            <a:r>
+              <a:rPr sz="819" b="0" i="0">
+                <a:solidFill>
+                  <a:srgbClr val="000000"/>
+                </a:solidFill>
+                <a:latin typeface="Arial"/>
+              </a:rPr>
+              <a:t> our BUY runs against falling consensus estimates – shares rarely re-rate before revisions turn, so the timing of the case depends on the next reports</a:t>
+            </a:r>
+          </a:p>
+          <a:p>
+            <a:pPr marL="128016" indent="-128016">
+              <a:lnSpc>
+                <a:spcPct val="105000"/>
+              </a:lnSpc>
+              <a:spcAft>
+                <a:spcPts val="400"/>
+              </a:spcAft>
+              <a:buClr>
+                <a:srgbClr val="003255"/>
+              </a:buClr>
+              <a:buFont typeface="Arial"/>
+              <a:buChar char="▪"/>
+            </a:pPr>
+            <a:r>
+              <a:rPr sz="819" b="1" i="0">
+                <a:solidFill>
+                  <a:srgbClr val="000000"/>
+                </a:solidFill>
+                <a:latin typeface="Arial"/>
+              </a:rPr>
+              <a:t>04.11.2026 – Quarterly results</a:t>
+            </a:r>
+            <a:r>
+              <a:rPr sz="819" b="0" i="0">
+                <a:solidFill>
+                  <a:srgbClr val="000000"/>
+                </a:solidFill>
+                <a:latin typeface="Arial"/>
+              </a:rPr>
+              <a:t>: consensus revenue 893, EPS 0.60</a:t>
+            </a:r>
+          </a:p>
+        </p:txBody>
+      </p:sp>
+      <p:sp>
+        <p:nvSpPr>
+          <p:cNvPr id="14" name="TextBox 13"/>
+          <p:cNvSpPr txBox="1"/>
+          <p:nvPr/>
+        </p:nvSpPr>
+        <p:spPr>
+          <a:xfrm>
+            <a:off x="7287768" y="1280160"/>
+            <a:ext cx="4108399" cy="237744"/>
+          </a:xfrm>
+          <a:prstGeom prst="rect">
+            <a:avLst/>
+          </a:prstGeom>
+          <a:noFill/>
+        </p:spPr>
+        <p:txBody>
+          <a:bodyPr wrap="none" anchor="b" lIns="18288" rIns="18288" tIns="18288" bIns="18288">
+            <a:spAutoFit/>
+          </a:bodyPr>
+          <a:lstStyle/>
+          <a:p>
+            <a:pPr algn="l"/>
+            <a:r>
+              <a:rPr sz="950" b="1" i="0">
+                <a:solidFill>
+                  <a:srgbClr val="003255"/>
+                </a:solidFill>
+                <a:latin typeface="Arial"/>
+              </a:rPr>
+              <a:t>What moves the value – one driver at a time</a:t>
+            </a:r>
+          </a:p>
+        </p:txBody>
+      </p:sp>
+      <p:cxnSp>
+        <p:nvCxnSpPr>
+          <p:cNvPr id="15" name="Connector 14"/>
+          <p:cNvCxnSpPr/>
+          <p:nvPr/>
+        </p:nvCxnSpPr>
+        <p:spPr>
+          <a:xfrm>
+            <a:off x="7287768" y="1527048"/>
+            <a:ext cx="4108399" cy="0"/>
+          </a:xfrm>
+          <a:prstGeom prst="line">
+            <a:avLst/>
+          </a:prstGeom>
+          <a:ln w="12700">
+            <a:solidFill>
+              <a:srgbClr val="003255"/>
+            </a:solidFill>
+          </a:ln>
+        </p:spPr>
+        <p:style>
+          <a:lnRef idx="2">
+            <a:schemeClr val="accent1"/>
+          </a:lnRef>
+          <a:fillRef idx="0">
+            <a:schemeClr val="accent1"/>
+          </a:fillRef>
+          <a:effectRef idx="1">
+            <a:schemeClr val="accent1"/>
+          </a:effectRef>
+          <a:fontRef idx="minor">
+            <a:schemeClr val="tx1"/>
+          </a:fontRef>
+        </p:style>
+      </p:cxnSp>
+      <p:sp>
+        <p:nvSpPr>
+          <p:cNvPr id="16" name="Rectangle 15"/>
+          <p:cNvSpPr/>
+          <p:nvPr/>
+        </p:nvSpPr>
+        <p:spPr>
+          <a:xfrm>
+            <a:off x="11487607" y="1316736"/>
+            <a:ext cx="256032" cy="256032"/>
+          </a:xfrm>
+          <a:prstGeom prst="rect">
+            <a:avLst/>
+          </a:prstGeom>
+          <a:solidFill>
+            <a:srgbClr val="003255"/>
+          </a:solidFill>
+          <a:ln>
+            <a:noFill/>
+          </a:ln>
+          <a:effectLst/>
+        </p:spPr>
+        <p:style>
+          <a:lnRef idx="1">
+            <a:schemeClr val="accent1"/>
+          </a:lnRef>
+          <a:fillRef idx="3">
+            <a:schemeClr val="accent1"/>
+          </a:fillRef>
+          <a:effectRef idx="2">
+            <a:schemeClr val="accent1"/>
+          </a:effectRef>
+          <a:fontRef idx="minor">
+            <a:schemeClr val="lt1"/>
+          </a:fontRef>
+        </p:style>
+        <p:txBody>
+          <a:bodyPr rtlCol="0" anchor="ctr" lIns="0" rIns="0" tIns="0" bIns="0"/>
+          <a:lstStyle/>
+          <a:p>
+            <a:pPr algn="ctr"/>
+            <a:r>
+              <a:rPr sz="900" b="1" i="0">
+                <a:solidFill>
+                  <a:srgbClr val="FFFFFF"/>
+                </a:solidFill>
+                <a:latin typeface="Arial"/>
+              </a:rPr>
+              <a:t>3</a:t>
+            </a:r>
+          </a:p>
+        </p:txBody>
+      </p:sp>
+      <p:sp>
+        <p:nvSpPr>
+          <p:cNvPr id="17" name="Rectangle 16"/>
+          <p:cNvSpPr/>
+          <p:nvPr/>
+        </p:nvSpPr>
+        <p:spPr>
+          <a:xfrm>
+            <a:off x="7287768" y="1591056"/>
+            <a:ext cx="4474159" cy="4636007"/>
+          </a:xfrm>
+          <a:prstGeom prst="rect">
+            <a:avLst/>
+          </a:prstGeom>
+          <a:solidFill>
+            <a:srgbClr val="FFFFFF"/>
+          </a:solidFill>
+          <a:ln w="9525">
+            <a:solidFill>
+              <a:srgbClr val="003255"/>
+            </a:solidFill>
+          </a:ln>
+          <a:effectLst/>
+        </p:spPr>
+        <p:style>
+          <a:lnRef idx="1">
+            <a:schemeClr val="accent1"/>
+          </a:lnRef>
+          <a:fillRef idx="3">
+            <a:schemeClr val="accent1"/>
+          </a:fillRef>
+          <a:effectRef idx="2">
+            <a:schemeClr val="accent1"/>
+          </a:effectRef>
+          <a:fontRef idx="minor">
+            <a:schemeClr val="lt1"/>
+          </a:fontRef>
+        </p:style>
+        <p:txBody>
+          <a:bodyPr rtlCol="0" anchor="ctr"/>
+          <a:lstStyle/>
+          <a:p/>
+        </p:txBody>
+      </p:sp>
+      <p:pic>
+        <p:nvPicPr>
+          <p:cNvPr id="18" name="Picture 17" descr="tornado.png"/>
+          <p:cNvPicPr>
+            <a:picLocks noChangeAspect="1"/>
+          </p:cNvPicPr>
+          <p:nvPr/>
+        </p:nvPicPr>
+        <p:blipFill>
+          <a:blip r:embed="rId2"/>
+          <a:stretch>
+            <a:fillRect/>
+          </a:stretch>
+        </p:blipFill>
+        <p:spPr>
+          <a:xfrm>
+            <a:off x="7360919" y="2219881"/>
+            <a:ext cx="4327855" cy="3360068"/>
+          </a:xfrm>
+          <a:prstGeom prst="rect">
+            <a:avLst/>
+          </a:prstGeom>
+        </p:spPr>
+      </p:pic>
+      <p:cxnSp>
+        <p:nvCxnSpPr>
+          <p:cNvPr id="19" name="Connector 18"/>
+          <p:cNvCxnSpPr/>
+          <p:nvPr/>
+        </p:nvCxnSpPr>
+        <p:spPr>
+          <a:xfrm>
+            <a:off x="429768" y="6336792"/>
+            <a:ext cx="10024567" cy="0"/>
+          </a:xfrm>
+          <a:prstGeom prst="line">
+            <a:avLst/>
+          </a:prstGeom>
+          <a:ln w="9525">
+            <a:solidFill>
+              <a:srgbClr val="003255"/>
+            </a:solidFill>
+          </a:ln>
+        </p:spPr>
+        <p:style>
+          <a:lnRef idx="2">
+            <a:schemeClr val="accent1"/>
+          </a:lnRef>
+          <a:fillRef idx="0">
+            <a:schemeClr val="accent1"/>
+          </a:fillRef>
+          <a:effectRef idx="1">
+            <a:schemeClr val="accent1"/>
+          </a:effectRef>
+          <a:fontRef idx="minor">
+            <a:schemeClr val="tx1"/>
+          </a:fontRef>
+        </p:style>
+      </p:cxnSp>
+      <p:sp>
+        <p:nvSpPr>
+          <p:cNvPr id="20" name="TextBox 19"/>
+          <p:cNvSpPr txBox="1"/>
+          <p:nvPr/>
+        </p:nvSpPr>
+        <p:spPr>
+          <a:xfrm>
+            <a:off x="429768" y="6355079"/>
+            <a:ext cx="9905695" cy="310896"/>
+          </a:xfrm>
+          <a:prstGeom prst="rect">
+            <a:avLst/>
+          </a:prstGeom>
+          <a:noFill/>
+        </p:spPr>
+        <p:txBody>
+          <a:bodyPr wrap="square" anchor="t" lIns="0" rIns="0" tIns="0" bIns="0">
+            <a:spAutoFit/>
+          </a:bodyPr>
+          <a:lstStyle/>
+          <a:p>
+            <a:pPr algn="l"/>
+            <a:r>
+              <a:rPr sz="650" b="0" i="1">
+                <a:solidFill>
+                  <a:srgbClr val="4A4A4A"/>
+                </a:solidFill>
+                <a:latin typeface="Arial"/>
+              </a:rPr>
+              <a:t>Sources: Company reports, Yahoo Finance, Equity Research Engine estimates; consensus: Yahoo Finance (mean of analyst estimates), revisions over 90 days; value drivers move one input at a time with everything else at the base case</a:t>
+            </a:r>
+          </a:p>
+          <a:p>
+            <a:pPr algn="l"/>
+            <a:r>
+              <a:rPr sz="650" b="0" i="1">
+                <a:solidFill>
+                  <a:srgbClr val="4A4A4A"/>
+                </a:solidFill>
+                <a:latin typeface="Arial"/>
+              </a:rPr>
+              <a:t>For illustration only — not investment advice</a:t>
+            </a:r>
+          </a:p>
+        </p:txBody>
+      </p:sp>
+      <p:cxnSp>
+        <p:nvCxnSpPr>
+          <p:cNvPr id="21" name="Connector 20"/>
+          <p:cNvCxnSpPr/>
+          <p:nvPr/>
+        </p:nvCxnSpPr>
+        <p:spPr>
+          <a:xfrm>
+            <a:off x="10591495" y="6336792"/>
+            <a:ext cx="1170432" cy="0"/>
+          </a:xfrm>
+          <a:prstGeom prst="line">
+            <a:avLst/>
+          </a:prstGeom>
+          <a:ln w="9525">
+            <a:solidFill>
+              <a:srgbClr val="003255"/>
+            </a:solidFill>
+          </a:ln>
+        </p:spPr>
+        <p:style>
+          <a:lnRef idx="2">
+            <a:schemeClr val="accent1"/>
+          </a:lnRef>
+          <a:fillRef idx="0">
+            <a:schemeClr val="accent1"/>
+          </a:fillRef>
+          <a:effectRef idx="1">
+            <a:schemeClr val="accent1"/>
+          </a:effectRef>
+          <a:fontRef idx="minor">
+            <a:schemeClr val="tx1"/>
+          </a:fontRef>
+        </p:style>
+      </p:cxnSp>
+      <p:sp>
+        <p:nvSpPr>
+          <p:cNvPr id="22" name="TextBox 21"/>
+          <p:cNvSpPr txBox="1"/>
+          <p:nvPr/>
+        </p:nvSpPr>
+        <p:spPr>
+          <a:xfrm>
+            <a:off x="10591495" y="6373368"/>
+            <a:ext cx="914400" cy="274320"/>
+          </a:xfrm>
+          <a:prstGeom prst="rect">
+            <a:avLst/>
+          </a:prstGeom>
+          <a:noFill/>
+        </p:spPr>
+        <p:txBody>
+          <a:bodyPr wrap="square" anchor="t" lIns="0" rIns="0" tIns="0" bIns="0">
+            <a:spAutoFit/>
+          </a:bodyPr>
+          <a:lstStyle/>
+          <a:p>
+            <a:pPr algn="l"/>
+            <a:r>
+              <a:rPr sz="750" b="1" i="0">
+                <a:solidFill>
+                  <a:srgbClr val="003255"/>
+                </a:solidFill>
+                <a:latin typeface="Cambria"/>
+              </a:rPr>
+              <a:t>Equity Research Engine</a:t>
+            </a:r>
+          </a:p>
+        </p:txBody>
+      </p:sp>
+      <p:sp>
+        <p:nvSpPr>
+          <p:cNvPr id="23" name="TextBox 22"/>
+          <p:cNvSpPr txBox="1"/>
+          <p:nvPr/>
+        </p:nvSpPr>
+        <p:spPr>
+          <a:xfrm>
+            <a:off x="11533327" y="6373368"/>
+            <a:ext cx="228600" cy="274320"/>
+          </a:xfrm>
+          <a:prstGeom prst="rect">
+            <a:avLst/>
+          </a:prstGeom>
+          <a:noFill/>
+        </p:spPr>
+        <p:txBody>
+          <a:bodyPr wrap="square" anchor="t" lIns="0" rIns="0" tIns="0" bIns="0">
+            <a:spAutoFit/>
+          </a:bodyPr>
+          <a:lstStyle/>
+          <a:p>
+            <a:pPr algn="r"/>
+            <a:r>
+              <a:rPr sz="800" b="0" i="0">
+                <a:solidFill>
+                  <a:srgbClr val="003255"/>
+                </a:solidFill>
+                <a:latin typeface="Arial"/>
+              </a:rPr>
+              <a:t>11</a:t>
+            </a:r>
+          </a:p>
+        </p:txBody>
+      </p:sp>
+    </p:spTree>
+  </p:cSld>
+  <p:clrMapOvr>
+    <a:masterClrMapping/>
+  </p:clrMapOvr>
+</p:sld>
+</file>
+
+<file path=ppt/slides/slide12.xml><?xml version="1.0" encoding="utf-8"?>
+<p:sld xmlns:a="http://schemas.openxmlformats.org/drawingml/2006/main" xmlns:p="http://schemas.openxmlformats.org/presentationml/2006/main" xmlns:r="http://schemas.openxmlformats.org/officeDocument/2006/relationships">
+  <p:cSld>
+    <p:spTree>
+      <p:nvGrpSpPr>
+        <p:cNvPr id="1" name=""/>
+        <p:cNvGrpSpPr/>
+        <p:nvPr/>
+      </p:nvGrpSpPr>
+      <p:grpSpPr/>
+      <p:sp>
+        <p:nvSpPr>
+          <p:cNvPr id="2" name="TextBox 1"/>
+          <p:cNvSpPr txBox="1"/>
+          <p:nvPr/>
+        </p:nvSpPr>
+        <p:spPr>
+          <a:xfrm>
+            <a:off x="429768" y="164592"/>
+            <a:ext cx="11332159" cy="219456"/>
+          </a:xfrm>
+          <a:prstGeom prst="rect">
+            <a:avLst/>
+          </a:prstGeom>
+          <a:noFill/>
+        </p:spPr>
+        <p:txBody>
+          <a:bodyPr wrap="square" anchor="t" lIns="0" rIns="0" tIns="0" bIns="0">
+            <a:spAutoFit/>
+          </a:bodyPr>
+          <a:lstStyle/>
+          <a:p>
+            <a:pPr algn="l"/>
+            <a:r>
+              <a:rPr sz="800" b="1" i="0">
+                <a:solidFill>
+                  <a:srgbClr val="003255"/>
+                </a:solidFill>
+                <a:latin typeface="Arial"/>
+              </a:rPr>
+              <a:t>Appendix #4.6</a:t>
+            </a:r>
+          </a:p>
+        </p:txBody>
+      </p:sp>
+      <p:sp>
+        <p:nvSpPr>
+          <p:cNvPr id="3" name="TextBox 2"/>
+          <p:cNvSpPr txBox="1"/>
+          <p:nvPr/>
+        </p:nvSpPr>
+        <p:spPr>
+          <a:xfrm>
+            <a:off x="429768" y="384048"/>
+            <a:ext cx="11332159" cy="502920"/>
+          </a:xfrm>
+          <a:prstGeom prst="rect">
+            <a:avLst/>
+          </a:prstGeom>
+          <a:noFill/>
+        </p:spPr>
+        <p:txBody>
+          <a:bodyPr wrap="square" anchor="t" lIns="0" rIns="0" tIns="0" bIns="0">
+            <a:spAutoFit/>
+          </a:bodyPr>
+          <a:lstStyle/>
+          <a:p>
+            <a:pPr algn="l"/>
+            <a:r>
+              <a:rPr sz="2600" b="0" i="0">
+                <a:solidFill>
+                  <a:srgbClr val="003255"/>
+                </a:solidFill>
+                <a:latin typeface="Cambria"/>
+              </a:rPr>
+              <a:t>Multiples in depth</a:t>
+            </a:r>
+          </a:p>
+        </p:txBody>
+      </p:sp>
+      <p:sp>
+        <p:nvSpPr>
+          <p:cNvPr id="4" name="TextBox 3"/>
+          <p:cNvSpPr txBox="1"/>
+          <p:nvPr/>
+        </p:nvSpPr>
+        <p:spPr>
+          <a:xfrm>
+            <a:off x="429768" y="896112"/>
+            <a:ext cx="11332159" cy="274320"/>
+          </a:xfrm>
+          <a:prstGeom prst="rect">
+            <a:avLst/>
+          </a:prstGeom>
+          <a:noFill/>
+        </p:spPr>
+        <p:txBody>
+          <a:bodyPr wrap="square" anchor="t" lIns="0" rIns="0" tIns="0" bIns="0">
+            <a:spAutoFit/>
+          </a:bodyPr>
+          <a:lstStyle/>
+          <a:p>
+            <a:pPr algn="l"/>
+            <a:r>
+              <a:rPr sz="1200" b="0" i="0">
+                <a:solidFill>
+                  <a:srgbClr val="003154"/>
+                </a:solidFill>
+                <a:latin typeface="Arial"/>
+              </a:rPr>
+              <a:t>Growth and margin explain 38% of the dispersion in peer EV/EBITDA; fundamentals justify 12.5x for Bouvet against 9.5x today</a:t>
+            </a:r>
+          </a:p>
+        </p:txBody>
+      </p:sp>
+      <p:sp>
+        <p:nvSpPr>
+          <p:cNvPr id="5" name="TextBox 4"/>
+          <p:cNvSpPr txBox="1"/>
+          <p:nvPr/>
+        </p:nvSpPr>
+        <p:spPr>
+          <a:xfrm>
+            <a:off x="429768" y="1280160"/>
+            <a:ext cx="4480559" cy="237744"/>
+          </a:xfrm>
+          <a:prstGeom prst="rect">
+            <a:avLst/>
+          </a:prstGeom>
+          <a:noFill/>
+        </p:spPr>
+        <p:txBody>
+          <a:bodyPr wrap="none" anchor="b" lIns="18288" rIns="18288" tIns="18288" bIns="18288">
+            <a:spAutoFit/>
+          </a:bodyPr>
+          <a:lstStyle/>
+          <a:p>
+            <a:pPr algn="l"/>
+            <a:r>
+              <a:rPr sz="950" b="1" i="0">
+                <a:solidFill>
+                  <a:srgbClr val="003255"/>
+                </a:solidFill>
+                <a:latin typeface="Arial"/>
+              </a:rPr>
+              <a:t>EV/EBITDA against expected revenue growth</a:t>
+            </a:r>
+          </a:p>
+        </p:txBody>
+      </p:sp>
+      <p:cxnSp>
+        <p:nvCxnSpPr>
+          <p:cNvPr id="6" name="Connector 5"/>
+          <p:cNvCxnSpPr/>
+          <p:nvPr/>
+        </p:nvCxnSpPr>
+        <p:spPr>
+          <a:xfrm>
+            <a:off x="429768" y="1527048"/>
+            <a:ext cx="4480559" cy="0"/>
+          </a:xfrm>
+          <a:prstGeom prst="line">
+            <a:avLst/>
+          </a:prstGeom>
+          <a:ln w="12700">
+            <a:solidFill>
+              <a:srgbClr val="003255"/>
+            </a:solidFill>
+          </a:ln>
+        </p:spPr>
+        <p:style>
+          <a:lnRef idx="2">
+            <a:schemeClr val="accent1"/>
+          </a:lnRef>
+          <a:fillRef idx="0">
+            <a:schemeClr val="accent1"/>
+          </a:fillRef>
+          <a:effectRef idx="1">
+            <a:schemeClr val="accent1"/>
+          </a:effectRef>
+          <a:fontRef idx="minor">
+            <a:schemeClr val="tx1"/>
+          </a:fontRef>
+        </p:style>
+      </p:cxnSp>
+      <p:sp>
+        <p:nvSpPr>
+          <p:cNvPr id="7" name="Rectangle 6"/>
+          <p:cNvSpPr/>
+          <p:nvPr/>
+        </p:nvSpPr>
+        <p:spPr>
+          <a:xfrm>
+            <a:off x="5001768" y="1316736"/>
+            <a:ext cx="256032" cy="256032"/>
+          </a:xfrm>
+          <a:prstGeom prst="rect">
+            <a:avLst/>
+          </a:prstGeom>
+          <a:solidFill>
+            <a:srgbClr val="003255"/>
+          </a:solidFill>
+          <a:ln>
+            <a:noFill/>
+          </a:ln>
+          <a:effectLst/>
+        </p:spPr>
+        <p:style>
+          <a:lnRef idx="1">
+            <a:schemeClr val="accent1"/>
+          </a:lnRef>
+          <a:fillRef idx="3">
+            <a:schemeClr val="accent1"/>
+          </a:fillRef>
+          <a:effectRef idx="2">
+            <a:schemeClr val="accent1"/>
+          </a:effectRef>
+          <a:fontRef idx="minor">
+            <a:schemeClr val="lt1"/>
+          </a:fontRef>
+        </p:style>
+        <p:txBody>
+          <a:bodyPr rtlCol="0" anchor="ctr" lIns="0" rIns="0" tIns="0" bIns="0"/>
+          <a:lstStyle/>
+          <a:p>
+            <a:pPr algn="ctr"/>
+            <a:r>
+              <a:rPr sz="900" b="1" i="0">
+                <a:solidFill>
+                  <a:srgbClr val="FFFFFF"/>
+                </a:solidFill>
+                <a:latin typeface="Arial"/>
+              </a:rPr>
+              <a:t>1</a:t>
+            </a:r>
+          </a:p>
+        </p:txBody>
+      </p:sp>
+      <p:sp>
+        <p:nvSpPr>
+          <p:cNvPr id="8" name="Rectangle 7"/>
+          <p:cNvSpPr/>
+          <p:nvPr/>
+        </p:nvSpPr>
+        <p:spPr>
+          <a:xfrm>
+            <a:off x="429768" y="1591056"/>
+            <a:ext cx="4846320" cy="2606040"/>
+          </a:xfrm>
+          <a:prstGeom prst="rect">
+            <a:avLst/>
+          </a:prstGeom>
+          <a:solidFill>
+            <a:srgbClr val="FFFFFF"/>
+          </a:solidFill>
+          <a:ln w="9525">
+            <a:solidFill>
+              <a:srgbClr val="003255"/>
+            </a:solidFill>
+          </a:ln>
+          <a:effectLst/>
+        </p:spPr>
+        <p:style>
+          <a:lnRef idx="1">
+            <a:schemeClr val="accent1"/>
+          </a:lnRef>
+          <a:fillRef idx="3">
+            <a:schemeClr val="accent1"/>
+          </a:fillRef>
+          <a:effectRef idx="2">
+            <a:schemeClr val="accent1"/>
+          </a:effectRef>
+          <a:fontRef idx="minor">
+            <a:schemeClr val="lt1"/>
+          </a:fontRef>
+        </p:style>
+        <p:txBody>
+          <a:bodyPr rtlCol="0" anchor="ctr"/>
+          <a:lstStyle/>
+          <a:p/>
+        </p:txBody>
+      </p:sp>
+      <p:pic>
+        <p:nvPicPr>
+          <p:cNvPr id="9" name="Picture 8" descr="mult_regression.png"/>
+          <p:cNvPicPr>
+            <a:picLocks noChangeAspect="1"/>
+          </p:cNvPicPr>
+          <p:nvPr/>
+        </p:nvPicPr>
+        <p:blipFill>
+          <a:blip r:embed="rId2"/>
+          <a:stretch>
+            <a:fillRect/>
+          </a:stretch>
+        </p:blipFill>
+        <p:spPr>
+          <a:xfrm>
+            <a:off x="877183" y="1645920"/>
+            <a:ext cx="3951489" cy="2496312"/>
+          </a:xfrm>
+          <a:prstGeom prst="rect">
+            <a:avLst/>
+          </a:prstGeom>
+        </p:spPr>
+      </p:pic>
+      <p:sp>
+        <p:nvSpPr>
+          <p:cNvPr id="10" name="TextBox 9"/>
+          <p:cNvSpPr txBox="1"/>
+          <p:nvPr/>
+        </p:nvSpPr>
+        <p:spPr>
+          <a:xfrm>
+            <a:off x="429768" y="4361688"/>
+            <a:ext cx="4480559" cy="237744"/>
+          </a:xfrm>
+          <a:prstGeom prst="rect">
+            <a:avLst/>
+          </a:prstGeom>
+          <a:noFill/>
+        </p:spPr>
+        <p:txBody>
+          <a:bodyPr wrap="none" anchor="b" lIns="18288" rIns="18288" tIns="18288" bIns="18288">
+            <a:spAutoFit/>
+          </a:bodyPr>
+          <a:lstStyle/>
+          <a:p>
+            <a:pPr algn="l"/>
+            <a:r>
+              <a:rPr sz="950" b="1" i="0">
+                <a:solidFill>
+                  <a:srgbClr val="003255"/>
+                </a:solidFill>
+                <a:latin typeface="Arial"/>
+              </a:rPr>
+              <a:t>Reading the multiples</a:t>
+            </a:r>
+          </a:p>
+        </p:txBody>
+      </p:sp>
+      <p:cxnSp>
+        <p:nvCxnSpPr>
+          <p:cNvPr id="11" name="Connector 10"/>
+          <p:cNvCxnSpPr/>
+          <p:nvPr/>
+        </p:nvCxnSpPr>
+        <p:spPr>
+          <a:xfrm>
+            <a:off x="429768" y="4608575"/>
+            <a:ext cx="4480559" cy="0"/>
+          </a:xfrm>
+          <a:prstGeom prst="line">
+            <a:avLst/>
+          </a:prstGeom>
+          <a:ln w="12700">
+            <a:solidFill>
+              <a:srgbClr val="003255"/>
+            </a:solidFill>
+          </a:ln>
+        </p:spPr>
+        <p:style>
+          <a:lnRef idx="2">
+            <a:schemeClr val="accent1"/>
+          </a:lnRef>
+          <a:fillRef idx="0">
+            <a:schemeClr val="accent1"/>
+          </a:fillRef>
+          <a:effectRef idx="1">
+            <a:schemeClr val="accent1"/>
+          </a:effectRef>
+          <a:fontRef idx="minor">
+            <a:schemeClr val="tx1"/>
+          </a:fontRef>
+        </p:style>
+      </p:cxnSp>
+      <p:sp>
+        <p:nvSpPr>
+          <p:cNvPr id="12" name="Rectangle 11"/>
+          <p:cNvSpPr/>
+          <p:nvPr/>
+        </p:nvSpPr>
+        <p:spPr>
+          <a:xfrm>
+            <a:off x="5001768" y="4398264"/>
+            <a:ext cx="256032" cy="256032"/>
+          </a:xfrm>
+          <a:prstGeom prst="rect">
+            <a:avLst/>
+          </a:prstGeom>
+          <a:solidFill>
+            <a:srgbClr val="003255"/>
+          </a:solidFill>
+          <a:ln>
+            <a:noFill/>
+          </a:ln>
+          <a:effectLst/>
+        </p:spPr>
+        <p:style>
+          <a:lnRef idx="1">
+            <a:schemeClr val="accent1"/>
+          </a:lnRef>
+          <a:fillRef idx="3">
+            <a:schemeClr val="accent1"/>
+          </a:fillRef>
+          <a:effectRef idx="2">
+            <a:schemeClr val="accent1"/>
+          </a:effectRef>
+          <a:fontRef idx="minor">
+            <a:schemeClr val="lt1"/>
+          </a:fontRef>
+        </p:style>
+        <p:txBody>
+          <a:bodyPr rtlCol="0" anchor="ctr" lIns="0" rIns="0" tIns="0" bIns="0"/>
+          <a:lstStyle/>
+          <a:p>
+            <a:pPr algn="ctr"/>
+            <a:r>
+              <a:rPr sz="900" b="1" i="0">
+                <a:solidFill>
+                  <a:srgbClr val="FFFFFF"/>
+                </a:solidFill>
+                <a:latin typeface="Arial"/>
+              </a:rPr>
+              <a:t>3</a:t>
+            </a:r>
+          </a:p>
+        </p:txBody>
+      </p:sp>
+      <p:sp>
+        <p:nvSpPr>
+          <p:cNvPr id="13" name="Rectangle 12"/>
+          <p:cNvSpPr/>
+          <p:nvPr/>
+        </p:nvSpPr>
+        <p:spPr>
+          <a:xfrm>
+            <a:off x="429768" y="4672583"/>
+            <a:ext cx="4846320" cy="1554480"/>
+          </a:xfrm>
+          <a:prstGeom prst="rect">
+            <a:avLst/>
+          </a:prstGeom>
+          <a:solidFill>
+            <a:srgbClr val="EDEDED"/>
+          </a:solidFill>
+          <a:ln>
+            <a:noFill/>
+          </a:ln>
+          <a:effectLst/>
+        </p:spPr>
+        <p:style>
+          <a:lnRef idx="1">
+            <a:schemeClr val="accent1"/>
+          </a:lnRef>
+          <a:fillRef idx="3">
+            <a:schemeClr val="accent1"/>
+          </a:fillRef>
+          <a:effectRef idx="2">
+            <a:schemeClr val="accent1"/>
+          </a:effectRef>
+          <a:fontRef idx="minor">
+            <a:schemeClr val="lt1"/>
+          </a:fontRef>
+        </p:style>
+        <p:txBody>
+          <a:bodyPr rtlCol="0" anchor="ctr"/>
+          <a:lstStyle/>
+          <a:p/>
+        </p:txBody>
+      </p:sp>
+      <p:sp>
+        <p:nvSpPr>
+          <p:cNvPr id="14" name="TextBox 13"/>
+          <p:cNvSpPr txBox="1"/>
+          <p:nvPr/>
+        </p:nvSpPr>
+        <p:spPr>
+          <a:xfrm>
+            <a:off x="448056" y="4718303"/>
+            <a:ext cx="4809744" cy="1463040"/>
+          </a:xfrm>
+          <a:prstGeom prst="rect">
+            <a:avLst/>
+          </a:prstGeom>
+          <a:noFill/>
+        </p:spPr>
+        <p:txBody>
+          <a:bodyPr wrap="square" anchor="t" lIns="54864" rIns="54864" tIns="54864" bIns="54864">
+            <a:spAutoFit/>
+          </a:bodyPr>
+          <a:lstStyle/>
+          <a:p>
+            <a:pPr marL="128016" indent="-128016">
+              <a:lnSpc>
+                <a:spcPct val="105000"/>
+              </a:lnSpc>
+              <a:spcAft>
+                <a:spcPts val="400"/>
+              </a:spcAft>
+              <a:buClr>
+                <a:srgbClr val="003255"/>
+              </a:buClr>
+              <a:buFont typeface="Arial"/>
+              <a:buChar char="▪"/>
+            </a:pPr>
+            <a:r>
+              <a:rPr sz="780" b="1" i="0">
+                <a:solidFill>
+                  <a:srgbClr val="000000"/>
+                </a:solidFill>
+                <a:latin typeface="Arial"/>
+              </a:rPr>
+              <a:t>On next-twelve-month consensus</a:t>
+            </a:r>
+            <a:r>
+              <a:rPr sz="780" b="0" i="0">
+                <a:solidFill>
+                  <a:srgbClr val="000000"/>
+                </a:solidFill>
+                <a:latin typeface="Arial"/>
+              </a:rPr>
+              <a:t> Bouvet trades at 13.3x P/E (peers 12.9x), 1.1x EV/Sales (peers 1.2x), 8.8x EV/EBITDA at the LTM margin (peers 8.0x); PEG 1.16 vs 1.19</a:t>
+            </a:r>
+          </a:p>
+          <a:p>
+            <a:pPr marL="128016" indent="-128016">
+              <a:lnSpc>
+                <a:spcPct val="105000"/>
+              </a:lnSpc>
+              <a:spcAft>
+                <a:spcPts val="400"/>
+              </a:spcAft>
+              <a:buClr>
+                <a:srgbClr val="003255"/>
+              </a:buClr>
+              <a:buFont typeface="Arial"/>
+              <a:buChar char="▪"/>
+            </a:pPr>
+            <a:r>
+              <a:rPr sz="780" b="1" i="0">
+                <a:solidFill>
+                  <a:srgbClr val="000000"/>
+                </a:solidFill>
+                <a:latin typeface="Arial"/>
+              </a:rPr>
+              <a:t>Growth and margin explain 38% of the dispersion in peer EV/EBITDA</a:t>
+            </a:r>
+            <a:r>
+              <a:rPr sz="780" b="0" i="0">
+                <a:solidFill>
+                  <a:srgbClr val="000000"/>
+                </a:solidFill>
+                <a:latin typeface="Arial"/>
+              </a:rPr>
+              <a:t> (8 peers): fundamentals justify 12.5x against the 9.0x median (+39%); the actual 9.5x leaves -24% unexplained. Evidence moderate</a:t>
+            </a:r>
+          </a:p>
+          <a:p>
+            <a:pPr marL="128016" indent="-128016">
+              <a:lnSpc>
+                <a:spcPct val="105000"/>
+              </a:lnSpc>
+              <a:spcAft>
+                <a:spcPts val="400"/>
+              </a:spcAft>
+              <a:buClr>
+                <a:srgbClr val="003255"/>
+              </a:buClr>
+              <a:buFont typeface="Arial"/>
+              <a:buChar char="▪"/>
+            </a:pPr>
+            <a:r>
+              <a:rPr sz="780" b="1" i="0">
+                <a:solidFill>
+                  <a:srgbClr val="000000"/>
+                </a:solidFill>
+                <a:latin typeface="Arial"/>
+              </a:rPr>
+              <a:t>Regression-implied value NOK 61.92</a:t>
+            </a:r>
+            <a:r>
+              <a:rPr sz="780" b="0" i="0">
+                <a:solidFill>
+                  <a:srgbClr val="000000"/>
+                </a:solidFill>
+                <a:latin typeface="Arial"/>
+              </a:rPr>
+              <a:t> per share (NOK 44–80 within one residual standard deviation)</a:t>
+            </a:r>
+          </a:p>
+          <a:p>
+            <a:pPr marL="128016" indent="-128016">
+              <a:lnSpc>
+                <a:spcPct val="105000"/>
+              </a:lnSpc>
+              <a:spcAft>
+                <a:spcPts val="400"/>
+              </a:spcAft>
+              <a:buClr>
+                <a:srgbClr val="003255"/>
+              </a:buClr>
+              <a:buFont typeface="Arial"/>
+              <a:buChar char="▪"/>
+            </a:pPr>
+            <a:r>
+              <a:rPr sz="780" b="1" i="0">
+                <a:solidFill>
+                  <a:srgbClr val="000000"/>
+                </a:solidFill>
+                <a:latin typeface="Arial"/>
+              </a:rPr>
+              <a:t>Cash and payout:</a:t>
+            </a:r>
+            <a:r>
+              <a:rPr sz="780" b="0" i="0">
+                <a:solidFill>
+                  <a:srgbClr val="000000"/>
+                </a:solidFill>
+                <a:latin typeface="Arial"/>
+              </a:rPr>
+              <a:t> 5.4% levered FCF yield vs 9.2% for peers; 6.3% dividend yield vs 3.3%</a:t>
+            </a:r>
+          </a:p>
+          <a:p>
+            <a:pPr marL="128016" indent="-128016">
+              <a:lnSpc>
+                <a:spcPct val="105000"/>
+              </a:lnSpc>
+              <a:spcAft>
+                <a:spcPts val="400"/>
+              </a:spcAft>
+              <a:buClr>
+                <a:srgbClr val="003255"/>
+              </a:buClr>
+              <a:buFont typeface="Arial"/>
+              <a:buChar char="▪"/>
+            </a:pPr>
+            <a:r>
+              <a:rPr sz="780" b="1" i="0">
+                <a:solidFill>
+                  <a:srgbClr val="000000"/>
+                </a:solidFill>
+                <a:latin typeface="Arial"/>
+              </a:rPr>
+              <a:t>Consensus EPS growth FY1:</a:t>
+            </a:r>
+            <a:r>
+              <a:rPr sz="780" b="0" i="0">
+                <a:solidFill>
+                  <a:srgbClr val="000000"/>
+                </a:solidFill>
+                <a:latin typeface="Arial"/>
+              </a:rPr>
+              <a:t> +12% for Bouvet vs +9% for the peer median – the growth the forward multiple is buying</a:t>
+            </a:r>
+          </a:p>
+        </p:txBody>
+      </p:sp>
+      <p:sp>
+        <p:nvSpPr>
+          <p:cNvPr id="15" name="TextBox 14"/>
+          <p:cNvSpPr txBox="1"/>
+          <p:nvPr/>
+        </p:nvSpPr>
+        <p:spPr>
+          <a:xfrm>
+            <a:off x="5550407" y="1280160"/>
+            <a:ext cx="5845759" cy="237744"/>
+          </a:xfrm>
+          <a:prstGeom prst="rect">
+            <a:avLst/>
+          </a:prstGeom>
+          <a:noFill/>
+        </p:spPr>
+        <p:txBody>
+          <a:bodyPr wrap="none" anchor="b" lIns="18288" rIns="18288" tIns="18288" bIns="18288">
+            <a:spAutoFit/>
+          </a:bodyPr>
+          <a:lstStyle/>
+          <a:p>
+            <a:pPr algn="l"/>
+            <a:r>
+              <a:rPr sz="950" b="1" i="0">
+                <a:solidFill>
+                  <a:srgbClr val="003255"/>
+                </a:solidFill>
+                <a:latin typeface="Arial"/>
+              </a:rPr>
+              <a:t>Forward multiples and quality – consensus, calendarised to the next twelve months</a:t>
+            </a:r>
+          </a:p>
+        </p:txBody>
+      </p:sp>
+      <p:cxnSp>
+        <p:nvCxnSpPr>
+          <p:cNvPr id="16" name="Connector 15"/>
+          <p:cNvCxnSpPr/>
+          <p:nvPr/>
+        </p:nvCxnSpPr>
+        <p:spPr>
+          <a:xfrm>
+            <a:off x="5550407" y="1527048"/>
+            <a:ext cx="5845760" cy="0"/>
+          </a:xfrm>
+          <a:prstGeom prst="line">
+            <a:avLst/>
+          </a:prstGeom>
+          <a:ln w="12700">
+            <a:solidFill>
+              <a:srgbClr val="003255"/>
+            </a:solidFill>
+          </a:ln>
+        </p:spPr>
+        <p:style>
+          <a:lnRef idx="2">
+            <a:schemeClr val="accent1"/>
+          </a:lnRef>
+          <a:fillRef idx="0">
+            <a:schemeClr val="accent1"/>
+          </a:fillRef>
+          <a:effectRef idx="1">
+            <a:schemeClr val="accent1"/>
+          </a:effectRef>
+          <a:fontRef idx="minor">
+            <a:schemeClr val="tx1"/>
+          </a:fontRef>
+        </p:style>
+      </p:cxnSp>
+      <p:sp>
+        <p:nvSpPr>
+          <p:cNvPr id="17" name="Rectangle 16"/>
+          <p:cNvSpPr/>
+          <p:nvPr/>
+        </p:nvSpPr>
+        <p:spPr>
+          <a:xfrm>
+            <a:off x="11487607" y="1316736"/>
+            <a:ext cx="256032" cy="256032"/>
+          </a:xfrm>
+          <a:prstGeom prst="rect">
+            <a:avLst/>
+          </a:prstGeom>
+          <a:solidFill>
+            <a:srgbClr val="003255"/>
+          </a:solidFill>
+          <a:ln>
+            <a:noFill/>
+          </a:ln>
+          <a:effectLst/>
+        </p:spPr>
+        <p:style>
+          <a:lnRef idx="1">
+            <a:schemeClr val="accent1"/>
+          </a:lnRef>
+          <a:fillRef idx="3">
+            <a:schemeClr val="accent1"/>
+          </a:fillRef>
+          <a:effectRef idx="2">
+            <a:schemeClr val="accent1"/>
+          </a:effectRef>
+          <a:fontRef idx="minor">
+            <a:schemeClr val="lt1"/>
+          </a:fontRef>
+        </p:style>
+        <p:txBody>
+          <a:bodyPr rtlCol="0" anchor="ctr" lIns="0" rIns="0" tIns="0" bIns="0"/>
+          <a:lstStyle/>
+          <a:p>
+            <a:pPr algn="ctr"/>
+            <a:r>
+              <a:rPr sz="900" b="1" i="0">
+                <a:solidFill>
+                  <a:srgbClr val="FFFFFF"/>
+                </a:solidFill>
+                <a:latin typeface="Arial"/>
+              </a:rPr>
+              <a:t>2</a:t>
+            </a:r>
+          </a:p>
+        </p:txBody>
+      </p:sp>
+      <p:graphicFrame>
+        <p:nvGraphicFramePr>
+          <p:cNvPr id="18" name="Table 17"/>
+          <p:cNvGraphicFramePr>
+            <a:graphicFrameLocks noGrp="1"/>
+          </p:cNvGraphicFramePr>
+          <p:nvPr/>
+        </p:nvGraphicFramePr>
+        <p:xfrm>
+          <a:off x="5550407" y="1618488"/>
+          <a:ext cx="6211512" cy="2615184"/>
+        </p:xfrm>
+        <a:graphic>
+          <a:graphicData uri="http://schemas.openxmlformats.org/drawingml/2006/table">
+            <a:tbl>
+              <a:tblPr/>
+              <a:tblGrid>
+                <a:gridCol w="1325880"/>
+                <a:gridCol w="512406"/>
+                <a:gridCol w="786384"/>
+                <a:gridCol w="512406"/>
+                <a:gridCol w="512406"/>
+                <a:gridCol w="512406"/>
+                <a:gridCol w="512406"/>
+                <a:gridCol w="512406"/>
+                <a:gridCol w="512406"/>
+                <a:gridCol w="512406"/>
+              </a:tblGrid>
+              <a:tr h="237744">
+                <a:tc>
+                  <a:txBody>
+                    <a:bodyPr wrap="none"/>
+                    <a:lstStyle/>
+                    <a:p>
+                      <a:pPr algn="l"/>
+                      <a:r>
+                        <a:rPr sz="750" b="1" i="0">
+                          <a:solidFill>
+                            <a:srgbClr val="FFFFFF"/>
+                          </a:solidFill>
+                          <a:latin typeface="Arial"/>
+                        </a:rPr>
+                        <a:t>Company</a:t>
+                      </a:r>
+                    </a:p>
+                  </a:txBody>
+                  <a:tcPr marL="36576" marR="36576" marT="9144" marB="9144" anchor="ctr">
+                    <a:solidFill>
+                      <a:srgbClr val="003255"/>
+                    </a:solidFill>
+                    <a:lnL w="0">
+                      <a:noFill/>
+                    </a:lnL>
+                    <a:lnR w="0">
+                      <a:noFill/>
+                    </a:lnR>
+                    <a:lnT w="0">
+                      <a:noFill/>
+                    </a:lnT>
+                    <a:lnB w="0">
+                      <a:noFill/>
+                    </a:lnB>
+                  </a:tcPr>
+                </a:tc>
+                <a:tc>
+                  <a:txBody>
+                    <a:bodyPr wrap="none"/>
+                    <a:lstStyle/>
+                    <a:p>
+                      <a:pPr algn="r"/>
+                      <a:r>
+                        <a:rPr sz="750" b="1" i="0">
+                          <a:solidFill>
+                            <a:srgbClr val="FFFFFF"/>
+                          </a:solidFill>
+                          <a:latin typeface="Arial"/>
+                        </a:rPr>
+                        <a:t>EV/Sales NTM</a:t>
+                      </a:r>
+                    </a:p>
+                  </a:txBody>
+                  <a:tcPr marL="36576" marR="36576" marT="9144" marB="9144" anchor="ctr">
+                    <a:solidFill>
+                      <a:srgbClr val="003255"/>
+                    </a:solidFill>
+                    <a:lnL w="0">
+                      <a:noFill/>
+                    </a:lnL>
+                    <a:lnR w="0">
+                      <a:noFill/>
+                    </a:lnR>
+                    <a:lnT w="0">
+                      <a:noFill/>
+                    </a:lnT>
+                    <a:lnB w="0">
+                      <a:noFill/>
+                    </a:lnB>
+                  </a:tcPr>
+                </a:tc>
+                <a:tc>
+                  <a:txBody>
+                    <a:bodyPr wrap="none"/>
+                    <a:lstStyle/>
+                    <a:p>
+                      <a:pPr algn="r"/>
+                      <a:r>
+                        <a:rPr sz="750" b="1" i="0">
+                          <a:solidFill>
+                            <a:srgbClr val="FFFFFF"/>
+                          </a:solidFill>
+                          <a:latin typeface="Arial"/>
+                        </a:rPr>
+                        <a:t>EV/EBITDA NTM*</a:t>
+                      </a:r>
+                    </a:p>
+                  </a:txBody>
+                  <a:tcPr marL="36576" marR="36576" marT="9144" marB="9144" anchor="ctr">
+                    <a:solidFill>
+                      <a:srgbClr val="003255"/>
+                    </a:solidFill>
+                    <a:lnL w="0">
+                      <a:noFill/>
+                    </a:lnL>
+                    <a:lnR w="0">
+                      <a:noFill/>
+                    </a:lnR>
+                    <a:lnT w="0">
+                      <a:noFill/>
+                    </a:lnT>
+                    <a:lnB w="0">
+                      <a:noFill/>
+                    </a:lnB>
+                  </a:tcPr>
+                </a:tc>
+                <a:tc>
+                  <a:txBody>
+                    <a:bodyPr wrap="none"/>
+                    <a:lstStyle/>
+                    <a:p>
+                      <a:pPr algn="r"/>
+                      <a:r>
+                        <a:rPr sz="750" b="1" i="0">
+                          <a:solidFill>
+                            <a:srgbClr val="FFFFFF"/>
+                          </a:solidFill>
+                          <a:latin typeface="Arial"/>
+                        </a:rPr>
+                        <a:t>P/E FY0</a:t>
+                      </a:r>
+                    </a:p>
+                  </a:txBody>
+                  <a:tcPr marL="36576" marR="36576" marT="9144" marB="9144" anchor="ctr">
+                    <a:solidFill>
+                      <a:srgbClr val="003255"/>
+                    </a:solidFill>
+                    <a:lnL w="0">
+                      <a:noFill/>
+                    </a:lnL>
+                    <a:lnR w="0">
+                      <a:noFill/>
+                    </a:lnR>
+                    <a:lnT w="0">
+                      <a:noFill/>
+                    </a:lnT>
+                    <a:lnB w="0">
+                      <a:noFill/>
+                    </a:lnB>
+                  </a:tcPr>
+                </a:tc>
+                <a:tc>
+                  <a:txBody>
+                    <a:bodyPr wrap="none"/>
+                    <a:lstStyle/>
+                    <a:p>
+                      <a:pPr algn="r"/>
+                      <a:r>
+                        <a:rPr sz="750" b="1" i="0">
+                          <a:solidFill>
+                            <a:srgbClr val="FFFFFF"/>
+                          </a:solidFill>
+                          <a:latin typeface="Arial"/>
+                        </a:rPr>
+                        <a:t>P/E FY1</a:t>
+                      </a:r>
+                    </a:p>
+                  </a:txBody>
+                  <a:tcPr marL="36576" marR="36576" marT="9144" marB="9144" anchor="ctr">
+                    <a:solidFill>
+                      <a:srgbClr val="003255"/>
+                    </a:solidFill>
+                    <a:lnL w="0">
+                      <a:noFill/>
+                    </a:lnL>
+                    <a:lnR w="0">
+                      <a:noFill/>
+                    </a:lnR>
+                    <a:lnT w="0">
+                      <a:noFill/>
+                    </a:lnT>
+                    <a:lnB w="0">
+                      <a:noFill/>
+                    </a:lnB>
+                  </a:tcPr>
+                </a:tc>
+                <a:tc>
+                  <a:txBody>
+                    <a:bodyPr wrap="none"/>
+                    <a:lstStyle/>
+                    <a:p>
+                      <a:pPr algn="r"/>
+                      <a:r>
+                        <a:rPr sz="750" b="1" i="0">
+                          <a:solidFill>
+                            <a:srgbClr val="FFFFFF"/>
+                          </a:solidFill>
+                          <a:latin typeface="Arial"/>
+                        </a:rPr>
+                        <a:t>P/E NTM</a:t>
+                      </a:r>
+                    </a:p>
+                  </a:txBody>
+                  <a:tcPr marL="36576" marR="36576" marT="9144" marB="9144" anchor="ctr">
+                    <a:solidFill>
+                      <a:srgbClr val="003255"/>
+                    </a:solidFill>
+                    <a:lnL w="0">
+                      <a:noFill/>
+                    </a:lnL>
+                    <a:lnR w="0">
+                      <a:noFill/>
+                    </a:lnR>
+                    <a:lnT w="0">
+                      <a:noFill/>
+                    </a:lnT>
+                    <a:lnB w="0">
+                      <a:noFill/>
+                    </a:lnB>
+                  </a:tcPr>
+                </a:tc>
+                <a:tc>
+                  <a:txBody>
+                    <a:bodyPr wrap="none"/>
+                    <a:lstStyle/>
+                    <a:p>
+                      <a:pPr algn="r"/>
+                      <a:r>
+                        <a:rPr sz="750" b="1" i="0">
+                          <a:solidFill>
+                            <a:srgbClr val="FFFFFF"/>
+                          </a:solidFill>
+                          <a:latin typeface="Arial"/>
+                        </a:rPr>
+                        <a:t>EPS growth</a:t>
+                      </a:r>
+                    </a:p>
+                  </a:txBody>
+                  <a:tcPr marL="36576" marR="36576" marT="9144" marB="9144" anchor="ctr">
+                    <a:solidFill>
+                      <a:srgbClr val="003255"/>
+                    </a:solidFill>
+                    <a:lnL w="0">
+                      <a:noFill/>
+                    </a:lnL>
+                    <a:lnR w="0">
+                      <a:noFill/>
+                    </a:lnR>
+                    <a:lnT w="0">
+                      <a:noFill/>
+                    </a:lnT>
+                    <a:lnB w="0">
+                      <a:noFill/>
+                    </a:lnB>
+                  </a:tcPr>
+                </a:tc>
+                <a:tc>
+                  <a:txBody>
+                    <a:bodyPr wrap="none"/>
+                    <a:lstStyle/>
+                    <a:p>
+                      <a:pPr algn="r"/>
+                      <a:r>
+                        <a:rPr sz="750" b="1" i="0">
+                          <a:solidFill>
+                            <a:srgbClr val="FFFFFF"/>
+                          </a:solidFill>
+                          <a:latin typeface="Arial"/>
+                        </a:rPr>
+                        <a:t>PEG</a:t>
+                      </a:r>
+                    </a:p>
+                  </a:txBody>
+                  <a:tcPr marL="36576" marR="36576" marT="9144" marB="9144" anchor="ctr">
+                    <a:solidFill>
+                      <a:srgbClr val="003255"/>
+                    </a:solidFill>
+                    <a:lnL w="0">
+                      <a:noFill/>
+                    </a:lnL>
+                    <a:lnR w="0">
+                      <a:noFill/>
+                    </a:lnR>
+                    <a:lnT w="0">
+                      <a:noFill/>
+                    </a:lnT>
+                    <a:lnB w="0">
+                      <a:noFill/>
+                    </a:lnB>
+                  </a:tcPr>
+                </a:tc>
+                <a:tc>
+                  <a:txBody>
+                    <a:bodyPr wrap="none"/>
+                    <a:lstStyle/>
+                    <a:p>
+                      <a:pPr algn="r"/>
+                      <a:r>
+                        <a:rPr sz="750" b="1" i="0">
+                          <a:solidFill>
+                            <a:srgbClr val="FFFFFF"/>
+                          </a:solidFill>
+                          <a:latin typeface="Arial"/>
+                        </a:rPr>
+                        <a:t>FCF yield</a:t>
+                      </a:r>
+                    </a:p>
+                  </a:txBody>
+                  <a:tcPr marL="36576" marR="36576" marT="9144" marB="9144" anchor="ctr">
+                    <a:solidFill>
+                      <a:srgbClr val="003255"/>
+                    </a:solidFill>
+                    <a:lnL w="0">
+                      <a:noFill/>
+                    </a:lnL>
+                    <a:lnR w="0">
+                      <a:noFill/>
+                    </a:lnR>
+                    <a:lnT w="0">
+                      <a:noFill/>
+                    </a:lnT>
+                    <a:lnB w="0">
+                      <a:noFill/>
+                    </a:lnB>
+                  </a:tcPr>
+                </a:tc>
+                <a:tc>
+                  <a:txBody>
+                    <a:bodyPr wrap="none"/>
+                    <a:lstStyle/>
+                    <a:p>
+                      <a:pPr algn="r"/>
+                      <a:r>
+                        <a:rPr sz="750" b="1" i="0">
+                          <a:solidFill>
+                            <a:srgbClr val="FFFFFF"/>
+                          </a:solidFill>
+                          <a:latin typeface="Arial"/>
+                        </a:rPr>
+                        <a:t>Div. yield</a:t>
+                      </a:r>
+                    </a:p>
+                  </a:txBody>
+                  <a:tcPr marL="36576" marR="36576" marT="9144" marB="9144" anchor="ctr">
+                    <a:solidFill>
+                      <a:srgbClr val="003255"/>
+                    </a:solidFill>
+                    <a:lnL w="0">
+                      <a:noFill/>
+                    </a:lnL>
+                    <a:lnR w="0">
+                      <a:noFill/>
+                    </a:lnR>
+                    <a:lnT w="0">
+                      <a:noFill/>
+                    </a:lnT>
+                    <a:lnB w="0">
+                      <a:noFill/>
+                    </a:lnB>
+                  </a:tcPr>
+                </a:tc>
+              </a:tr>
+              <a:tr h="237744">
+                <a:tc>
+                  <a:txBody>
+                    <a:bodyPr wrap="none"/>
+                    <a:lstStyle/>
+                    <a:p>
+                      <a:pPr algn="l"/>
+                      <a:r>
+                        <a:rPr sz="750" b="0" i="0">
+                          <a:solidFill>
+                            <a:srgbClr val="000000"/>
+                          </a:solidFill>
+                          <a:latin typeface="Arial"/>
+                        </a:rPr>
+                        <a:t>Knowit</a:t>
+                      </a:r>
+                    </a:p>
+                  </a:txBody>
+                  <a:tcPr marL="36576" marR="36576" marT="9144" marB="9144" anchor="ctr">
+                    <a:solidFill>
+                      <a:srgbClr val="FFFFFF"/>
+                    </a:solidFill>
+                    <a:lnL w="0">
+                      <a:noFill/>
+                    </a:lnL>
+                    <a:lnR w="0">
+                      <a:noFill/>
+                    </a:lnR>
+                    <a:lnT w="6350">
+                      <a:solidFill>
+                        <a:srgbClr val="003255"/>
+                      </a:solidFill>
+                    </a:lnT>
+                    <a:lnB w="0">
+                      <a:noFill/>
+                    </a:lnB>
+                  </a:tcPr>
+                </a:tc>
+                <a:tc>
+                  <a:txBody>
+                    <a:bodyPr wrap="none"/>
+                    <a:lstStyle/>
+                    <a:p>
+                      <a:pPr algn="r"/>
+                      <a:r>
+                        <a:rPr sz="750" b="0" i="0">
+                          <a:solidFill>
+                            <a:srgbClr val="000000"/>
+                          </a:solidFill>
+                          <a:latin typeface="Arial"/>
+                        </a:rPr>
+                        <a:t>0.5x</a:t>
+                      </a:r>
+                    </a:p>
+                  </a:txBody>
+                  <a:tcPr marL="36576" marR="36576" marT="9144" marB="9144" anchor="ctr">
+                    <a:solidFill>
+                      <a:srgbClr val="FFFFFF"/>
+                    </a:solidFill>
+                    <a:lnL w="0">
+                      <a:noFill/>
+                    </a:lnL>
+                    <a:lnR w="0">
+                      <a:noFill/>
+                    </a:lnR>
+                    <a:lnT w="6350">
+                      <a:solidFill>
+                        <a:srgbClr val="003255"/>
+                      </a:solidFill>
+                    </a:lnT>
+                    <a:lnB w="0">
+                      <a:noFill/>
+                    </a:lnB>
+                  </a:tcPr>
+                </a:tc>
+                <a:tc>
+                  <a:txBody>
+                    <a:bodyPr wrap="none"/>
+                    <a:lstStyle/>
+                    <a:p>
+                      <a:pPr algn="r"/>
+                      <a:r>
+                        <a:rPr sz="750" b="0" i="0">
+                          <a:solidFill>
+                            <a:srgbClr val="000000"/>
+                          </a:solidFill>
+                          <a:latin typeface="Arial"/>
+                        </a:rPr>
+                        <a:t>6.0x</a:t>
+                      </a:r>
+                    </a:p>
+                  </a:txBody>
+                  <a:tcPr marL="36576" marR="36576" marT="9144" marB="9144" anchor="ctr">
+                    <a:solidFill>
+                      <a:srgbClr val="FFFFFF"/>
+                    </a:solidFill>
+                    <a:lnL w="0">
+                      <a:noFill/>
+                    </a:lnL>
+                    <a:lnR w="0">
+                      <a:noFill/>
+                    </a:lnR>
+                    <a:lnT w="6350">
+                      <a:solidFill>
+                        <a:srgbClr val="003255"/>
+                      </a:solidFill>
+                    </a:lnT>
+                    <a:lnB w="0">
+                      <a:noFill/>
+                    </a:lnB>
+                  </a:tcPr>
+                </a:tc>
+                <a:tc>
+                  <a:txBody>
+                    <a:bodyPr wrap="none"/>
+                    <a:lstStyle/>
+                    <a:p>
+                      <a:pPr algn="r"/>
+                      <a:r>
+                        <a:rPr sz="750" b="0" i="0">
+                          <a:solidFill>
+                            <a:srgbClr val="000000"/>
+                          </a:solidFill>
+                          <a:latin typeface="Arial"/>
+                        </a:rPr>
+                        <a:t>14.8x</a:t>
+                      </a:r>
+                    </a:p>
+                  </a:txBody>
+                  <a:tcPr marL="36576" marR="36576" marT="9144" marB="9144" anchor="ctr">
+                    <a:solidFill>
+                      <a:srgbClr val="FFFFFF"/>
+                    </a:solidFill>
+                    <a:lnL w="0">
+                      <a:noFill/>
+                    </a:lnL>
+                    <a:lnR w="0">
+                      <a:noFill/>
+                    </a:lnR>
+                    <a:lnT w="6350">
+                      <a:solidFill>
+                        <a:srgbClr val="003255"/>
+                      </a:solidFill>
+                    </a:lnT>
+                    <a:lnB w="0">
+                      <a:noFill/>
+                    </a:lnB>
+                  </a:tcPr>
+                </a:tc>
+                <a:tc>
+                  <a:txBody>
+                    <a:bodyPr wrap="none"/>
+                    <a:lstStyle/>
+                    <a:p>
+                      <a:pPr algn="r"/>
+                      <a:r>
+                        <a:rPr sz="750" b="0" i="0">
+                          <a:solidFill>
+                            <a:srgbClr val="000000"/>
+                          </a:solidFill>
+                          <a:latin typeface="Arial"/>
+                        </a:rPr>
+                        <a:t>12.7x</a:t>
+                      </a:r>
+                    </a:p>
+                  </a:txBody>
+                  <a:tcPr marL="36576" marR="36576" marT="9144" marB="9144" anchor="ctr">
+                    <a:solidFill>
+                      <a:srgbClr val="FFFFFF"/>
+                    </a:solidFill>
+                    <a:lnL w="0">
+                      <a:noFill/>
+                    </a:lnL>
+                    <a:lnR w="0">
+                      <a:noFill/>
+                    </a:lnR>
+                    <a:lnT w="6350">
+                      <a:solidFill>
+                        <a:srgbClr val="003255"/>
+                      </a:solidFill>
+                    </a:lnT>
+                    <a:lnB w="0">
+                      <a:noFill/>
+                    </a:lnB>
+                  </a:tcPr>
+                </a:tc>
+                <a:tc>
+                  <a:txBody>
+                    <a:bodyPr wrap="none"/>
+                    <a:lstStyle/>
+                    <a:p>
+                      <a:pPr algn="r"/>
+                      <a:r>
+                        <a:rPr sz="750" b="0" i="0">
+                          <a:solidFill>
+                            <a:srgbClr val="000000"/>
+                          </a:solidFill>
+                          <a:latin typeface="Arial"/>
+                        </a:rPr>
+                        <a:t>13.2x</a:t>
+                      </a:r>
+                    </a:p>
+                  </a:txBody>
+                  <a:tcPr marL="36576" marR="36576" marT="9144" marB="9144" anchor="ctr">
+                    <a:solidFill>
+                      <a:srgbClr val="FFFFFF"/>
+                    </a:solidFill>
+                    <a:lnL w="0">
+                      <a:noFill/>
+                    </a:lnL>
+                    <a:lnR w="0">
+                      <a:noFill/>
+                    </a:lnR>
+                    <a:lnT w="6350">
+                      <a:solidFill>
+                        <a:srgbClr val="003255"/>
+                      </a:solidFill>
+                    </a:lnT>
+                    <a:lnB w="0">
+                      <a:noFill/>
+                    </a:lnB>
+                  </a:tcPr>
+                </a:tc>
+                <a:tc>
+                  <a:txBody>
+                    <a:bodyPr wrap="none"/>
+                    <a:lstStyle/>
+                    <a:p>
+                      <a:pPr algn="r"/>
+                      <a:r>
+                        <a:rPr sz="750" b="0" i="0">
+                          <a:solidFill>
+                            <a:srgbClr val="000000"/>
+                          </a:solidFill>
+                          <a:latin typeface="Arial"/>
+                        </a:rPr>
+                        <a:t>+17%</a:t>
+                      </a:r>
+                    </a:p>
+                  </a:txBody>
+                  <a:tcPr marL="36576" marR="36576" marT="9144" marB="9144" anchor="ctr">
+                    <a:solidFill>
+                      <a:srgbClr val="FFFFFF"/>
+                    </a:solidFill>
+                    <a:lnL w="0">
+                      <a:noFill/>
+                    </a:lnL>
+                    <a:lnR w="0">
+                      <a:noFill/>
+                    </a:lnR>
+                    <a:lnT w="6350">
+                      <a:solidFill>
+                        <a:srgbClr val="003255"/>
+                      </a:solidFill>
+                    </a:lnT>
+                    <a:lnB w="0">
+                      <a:noFill/>
+                    </a:lnB>
+                  </a:tcPr>
+                </a:tc>
+                <a:tc>
+                  <a:txBody>
+                    <a:bodyPr wrap="none"/>
+                    <a:lstStyle/>
+                    <a:p>
+                      <a:pPr algn="r"/>
+                      <a:r>
+                        <a:rPr sz="750" b="0" i="0">
+                          <a:solidFill>
+                            <a:srgbClr val="000000"/>
+                          </a:solidFill>
+                          <a:latin typeface="Arial"/>
+                        </a:rPr>
+                        <a:t>0.79</a:t>
+                      </a:r>
+                    </a:p>
+                  </a:txBody>
+                  <a:tcPr marL="36576" marR="36576" marT="9144" marB="9144" anchor="ctr">
+                    <a:solidFill>
+                      <a:srgbClr val="FFFFFF"/>
+                    </a:solidFill>
+                    <a:lnL w="0">
+                      <a:noFill/>
+                    </a:lnL>
+                    <a:lnR w="0">
+                      <a:noFill/>
+                    </a:lnR>
+                    <a:lnT w="6350">
+                      <a:solidFill>
+                        <a:srgbClr val="003255"/>
+                      </a:solidFill>
+                    </a:lnT>
+                    <a:lnB w="0">
+                      <a:noFill/>
+                    </a:lnB>
+                  </a:tcPr>
+                </a:tc>
+                <a:tc>
+                  <a:txBody>
+                    <a:bodyPr wrap="none"/>
+                    <a:lstStyle/>
+                    <a:p>
+                      <a:pPr algn="r"/>
+                      <a:r>
+                        <a:rPr sz="750" b="0" i="0">
+                          <a:solidFill>
+                            <a:srgbClr val="000000"/>
+                          </a:solidFill>
+                          <a:latin typeface="Arial"/>
+                        </a:rPr>
+                        <a:t>12.1%</a:t>
+                      </a:r>
+                    </a:p>
+                  </a:txBody>
+                  <a:tcPr marL="36576" marR="36576" marT="9144" marB="9144" anchor="ctr">
+                    <a:solidFill>
+                      <a:srgbClr val="FFFFFF"/>
+                    </a:solidFill>
+                    <a:lnL w="0">
+                      <a:noFill/>
+                    </a:lnL>
+                    <a:lnR w="0">
+                      <a:noFill/>
+                    </a:lnR>
+                    <a:lnT w="6350">
+                      <a:solidFill>
+                        <a:srgbClr val="003255"/>
+                      </a:solidFill>
+                    </a:lnT>
+                    <a:lnB w="0">
+                      <a:noFill/>
+                    </a:lnB>
+                  </a:tcPr>
+                </a:tc>
+                <a:tc>
+                  <a:txBody>
+                    <a:bodyPr wrap="none"/>
+                    <a:lstStyle/>
+                    <a:p>
+                      <a:pPr algn="r"/>
+                      <a:r>
+                        <a:rPr sz="750" b="0" i="0">
+                          <a:solidFill>
+                            <a:srgbClr val="000000"/>
+                          </a:solidFill>
+                          <a:latin typeface="Arial"/>
+                        </a:rPr>
+                        <a:t>2.7%</a:t>
+                      </a:r>
+                    </a:p>
+                  </a:txBody>
+                  <a:tcPr marL="36576" marR="36576" marT="9144" marB="9144" anchor="ctr">
+                    <a:solidFill>
+                      <a:srgbClr val="FFFFFF"/>
+                    </a:solidFill>
+                    <a:lnL w="0">
+                      <a:noFill/>
+                    </a:lnL>
+                    <a:lnR w="0">
+                      <a:noFill/>
+                    </a:lnR>
+                    <a:lnT w="6350">
+                      <a:solidFill>
+                        <a:srgbClr val="003255"/>
+                      </a:solidFill>
+                    </a:lnT>
+                    <a:lnB w="0">
+                      <a:noFill/>
+                    </a:lnB>
+                  </a:tcPr>
+                </a:tc>
+              </a:tr>
+              <a:tr h="237744">
+                <a:tc>
+                  <a:txBody>
+                    <a:bodyPr wrap="none"/>
+                    <a:lstStyle/>
+                    <a:p>
+                      <a:pPr algn="l"/>
+                      <a:r>
+                        <a:rPr sz="750" b="0" i="0">
+                          <a:solidFill>
+                            <a:srgbClr val="000000"/>
+                          </a:solidFill>
+                          <a:latin typeface="Arial"/>
+                        </a:rPr>
+                        <a:t>Tietoevry</a:t>
+                      </a:r>
+                    </a:p>
+                  </a:txBody>
+                  <a:tcPr marL="36576" marR="36576" marT="9144" marB="9144" anchor="ctr">
+                    <a:solidFill>
+                      <a:srgbClr val="EDEDED"/>
+                    </a:solidFill>
+                    <a:lnL w="0">
+                      <a:noFill/>
+                    </a:lnL>
+                    <a:lnR w="0">
+                      <a:noFill/>
+                    </a:lnR>
+                    <a:lnT w="0">
+                      <a:noFill/>
+                    </a:lnT>
+                    <a:lnB w="0">
+                      <a:noFill/>
+                    </a:lnB>
+                  </a:tcPr>
+                </a:tc>
+                <a:tc>
+                  <a:txBody>
+                    <a:bodyPr wrap="none"/>
+                    <a:lstStyle/>
+                    <a:p>
+                      <a:pPr algn="r"/>
+                      <a:r>
+                        <a:rPr sz="750" b="0" i="0">
+                          <a:solidFill>
+                            <a:srgbClr val="000000"/>
+                          </a:solidFill>
+                          <a:latin typeface="Arial"/>
+                        </a:rPr>
+                        <a:t>1.4x</a:t>
+                      </a:r>
+                    </a:p>
+                  </a:txBody>
+                  <a:tcPr marL="36576" marR="36576" marT="9144" marB="9144" anchor="ctr">
+                    <a:solidFill>
+                      <a:srgbClr val="EDEDED"/>
+                    </a:solidFill>
+                    <a:lnL w="0">
+                      <a:noFill/>
+                    </a:lnL>
+                    <a:lnR w="0">
+                      <a:noFill/>
+                    </a:lnR>
+                    <a:lnT w="0">
+                      <a:noFill/>
+                    </a:lnT>
+                    <a:lnB w="0">
+                      <a:noFill/>
+                    </a:lnB>
+                  </a:tcPr>
+                </a:tc>
+                <a:tc>
+                  <a:txBody>
+                    <a:bodyPr wrap="none"/>
+                    <a:lstStyle/>
+                    <a:p>
+                      <a:pPr algn="r"/>
+                      <a:r>
+                        <a:rPr sz="750" b="0" i="0">
+                          <a:solidFill>
+                            <a:srgbClr val="000000"/>
+                          </a:solidFill>
+                          <a:latin typeface="Arial"/>
+                        </a:rPr>
+                        <a:t>7.3x</a:t>
+                      </a:r>
+                    </a:p>
+                  </a:txBody>
+                  <a:tcPr marL="36576" marR="36576" marT="9144" marB="9144" anchor="ctr">
+                    <a:solidFill>
+                      <a:srgbClr val="EDEDED"/>
+                    </a:solidFill>
+                    <a:lnL w="0">
+                      <a:noFill/>
+                    </a:lnL>
+                    <a:lnR w="0">
+                      <a:noFill/>
+                    </a:lnR>
+                    <a:lnT w="0">
+                      <a:noFill/>
+                    </a:lnT>
+                    <a:lnB w="0">
+                      <a:noFill/>
+                    </a:lnB>
+                  </a:tcPr>
+                </a:tc>
+                <a:tc>
+                  <a:txBody>
+                    <a:bodyPr wrap="none"/>
+                    <a:lstStyle/>
+                    <a:p>
+                      <a:pPr algn="r"/>
+                      <a:r>
+                        <a:rPr sz="750" b="0" i="0">
+                          <a:solidFill>
+                            <a:srgbClr val="000000"/>
+                          </a:solidFill>
+                          <a:latin typeface="Arial"/>
+                        </a:rPr>
+                        <a:t>11.8x</a:t>
+                      </a:r>
+                    </a:p>
+                  </a:txBody>
+                  <a:tcPr marL="36576" marR="36576" marT="9144" marB="9144" anchor="ctr">
+                    <a:solidFill>
+                      <a:srgbClr val="EDEDED"/>
+                    </a:solidFill>
+                    <a:lnL w="0">
+                      <a:noFill/>
+                    </a:lnL>
+                    <a:lnR w="0">
+                      <a:noFill/>
+                    </a:lnR>
+                    <a:lnT w="0">
+                      <a:noFill/>
+                    </a:lnT>
+                    <a:lnB w="0">
+                      <a:noFill/>
+                    </a:lnB>
+                  </a:tcPr>
+                </a:tc>
+                <a:tc>
+                  <a:txBody>
+                    <a:bodyPr wrap="none"/>
+                    <a:lstStyle/>
+                    <a:p>
+                      <a:pPr algn="r"/>
+                      <a:r>
+                        <a:rPr sz="750" b="0" i="0">
+                          <a:solidFill>
+                            <a:srgbClr val="000000"/>
+                          </a:solidFill>
+                          <a:latin typeface="Arial"/>
+                        </a:rPr>
+                        <a:t>11.2x</a:t>
+                      </a:r>
+                    </a:p>
+                  </a:txBody>
+                  <a:tcPr marL="36576" marR="36576" marT="9144" marB="9144" anchor="ctr">
+                    <a:solidFill>
+                      <a:srgbClr val="EDEDED"/>
+                    </a:solidFill>
+                    <a:lnL w="0">
+                      <a:noFill/>
+                    </a:lnL>
+                    <a:lnR w="0">
+                      <a:noFill/>
+                    </a:lnR>
+                    <a:lnT w="0">
+                      <a:noFill/>
+                    </a:lnT>
+                    <a:lnB w="0">
+                      <a:noFill/>
+                    </a:lnB>
+                  </a:tcPr>
+                </a:tc>
+                <a:tc>
+                  <a:txBody>
+                    <a:bodyPr wrap="none"/>
+                    <a:lstStyle/>
+                    <a:p>
+                      <a:pPr algn="r"/>
+                      <a:r>
+                        <a:rPr sz="750" b="0" i="0">
+                          <a:solidFill>
+                            <a:srgbClr val="000000"/>
+                          </a:solidFill>
+                          <a:latin typeface="Arial"/>
+                        </a:rPr>
+                        <a:t>11.4x</a:t>
+                      </a:r>
+                    </a:p>
+                  </a:txBody>
+                  <a:tcPr marL="36576" marR="36576" marT="9144" marB="9144" anchor="ctr">
+                    <a:solidFill>
+                      <a:srgbClr val="EDEDED"/>
+                    </a:solidFill>
+                    <a:lnL w="0">
+                      <a:noFill/>
+                    </a:lnL>
+                    <a:lnR w="0">
+                      <a:noFill/>
+                    </a:lnR>
+                    <a:lnT w="0">
+                      <a:noFill/>
+                    </a:lnT>
+                    <a:lnB w="0">
+                      <a:noFill/>
+                    </a:lnB>
+                  </a:tcPr>
+                </a:tc>
+                <a:tc>
+                  <a:txBody>
+                    <a:bodyPr wrap="none"/>
+                    <a:lstStyle/>
+                    <a:p>
+                      <a:pPr algn="r"/>
+                      <a:r>
+                        <a:rPr sz="750" b="0" i="0">
+                          <a:solidFill>
+                            <a:srgbClr val="000000"/>
+                          </a:solidFill>
+                          <a:latin typeface="Arial"/>
+                        </a:rPr>
+                        <a:t>+5%</a:t>
+                      </a:r>
+                    </a:p>
+                  </a:txBody>
+                  <a:tcPr marL="36576" marR="36576" marT="9144" marB="9144" anchor="ctr">
+                    <a:solidFill>
+                      <a:srgbClr val="EDEDED"/>
+                    </a:solidFill>
+                    <a:lnL w="0">
+                      <a:noFill/>
+                    </a:lnL>
+                    <a:lnR w="0">
+                      <a:noFill/>
+                    </a:lnR>
+                    <a:lnT w="0">
+                      <a:noFill/>
+                    </a:lnT>
+                    <a:lnB w="0">
+                      <a:noFill/>
+                    </a:lnB>
+                  </a:tcPr>
+                </a:tc>
+                <a:tc>
+                  <a:txBody>
+                    <a:bodyPr wrap="none"/>
+                    <a:lstStyle/>
+                    <a:p>
+                      <a:pPr algn="r"/>
+                      <a:r>
+                        <a:rPr sz="750" b="0" i="0">
+                          <a:solidFill>
+                            <a:srgbClr val="000000"/>
+                          </a:solidFill>
+                          <a:latin typeface="Arial"/>
+                        </a:rPr>
+                        <a:t>2.35</a:t>
+                      </a:r>
+                    </a:p>
+                  </a:txBody>
+                  <a:tcPr marL="36576" marR="36576" marT="9144" marB="9144" anchor="ctr">
+                    <a:solidFill>
+                      <a:srgbClr val="EDEDED"/>
+                    </a:solidFill>
+                    <a:lnL w="0">
+                      <a:noFill/>
+                    </a:lnL>
+                    <a:lnR w="0">
+                      <a:noFill/>
+                    </a:lnR>
+                    <a:lnT w="0">
+                      <a:noFill/>
+                    </a:lnT>
+                    <a:lnB w="0">
+                      <a:noFill/>
+                    </a:lnB>
+                  </a:tcPr>
+                </a:tc>
+                <a:tc>
+                  <a:txBody>
+                    <a:bodyPr wrap="none"/>
+                    <a:lstStyle/>
+                    <a:p>
+                      <a:pPr algn="r"/>
+                      <a:r>
+                        <a:rPr sz="750" b="0" i="0">
+                          <a:solidFill>
+                            <a:srgbClr val="000000"/>
+                          </a:solidFill>
+                          <a:latin typeface="Arial"/>
+                        </a:rPr>
+                        <a:t>8.7%</a:t>
+                      </a:r>
+                    </a:p>
+                  </a:txBody>
+                  <a:tcPr marL="36576" marR="36576" marT="9144" marB="9144" anchor="ctr">
+                    <a:solidFill>
+                      <a:srgbClr val="EDEDED"/>
+                    </a:solidFill>
+                    <a:lnL w="0">
+                      <a:noFill/>
+                    </a:lnL>
+                    <a:lnR w="0">
+                      <a:noFill/>
+                    </a:lnR>
+                    <a:lnT w="0">
+                      <a:noFill/>
+                    </a:lnT>
+                    <a:lnB w="0">
+                      <a:noFill/>
+                    </a:lnB>
+                  </a:tcPr>
+                </a:tc>
+                <a:tc>
+                  <a:txBody>
+                    <a:bodyPr wrap="none"/>
+                    <a:lstStyle/>
+                    <a:p>
+                      <a:pPr algn="r"/>
+                      <a:r>
+                        <a:rPr sz="750" b="0" i="0">
+                          <a:solidFill>
+                            <a:srgbClr val="000000"/>
+                          </a:solidFill>
+                          <a:latin typeface="Arial"/>
+                        </a:rPr>
+                        <a:t>4.7%</a:t>
+                      </a:r>
+                    </a:p>
+                  </a:txBody>
+                  <a:tcPr marL="36576" marR="36576" marT="9144" marB="9144" anchor="ctr">
+                    <a:solidFill>
+                      <a:srgbClr val="EDEDED"/>
+                    </a:solidFill>
+                    <a:lnL w="0">
+                      <a:noFill/>
+                    </a:lnL>
+                    <a:lnR w="0">
+                      <a:noFill/>
+                    </a:lnR>
+                    <a:lnT w="0">
+                      <a:noFill/>
+                    </a:lnT>
+                    <a:lnB w="0">
+                      <a:noFill/>
+                    </a:lnB>
+                  </a:tcPr>
+                </a:tc>
+              </a:tr>
+              <a:tr h="237744">
+                <a:tc>
+                  <a:txBody>
+                    <a:bodyPr wrap="none"/>
+                    <a:lstStyle/>
+                    <a:p>
+                      <a:pPr algn="l"/>
+                      <a:r>
+                        <a:rPr sz="750" b="0" i="0">
+                          <a:solidFill>
+                            <a:srgbClr val="000000"/>
+                          </a:solidFill>
+                          <a:latin typeface="Arial"/>
+                        </a:rPr>
+                        <a:t>Netcompany</a:t>
+                      </a:r>
+                    </a:p>
+                  </a:txBody>
+                  <a:tcPr marL="36576" marR="36576" marT="9144" marB="9144" anchor="ctr">
+                    <a:solidFill>
+                      <a:srgbClr val="FFFFFF"/>
+                    </a:solidFill>
+                    <a:lnL w="0">
+                      <a:noFill/>
+                    </a:lnL>
+                    <a:lnR w="0">
+                      <a:noFill/>
+                    </a:lnR>
+                    <a:lnT w="0">
+                      <a:noFill/>
+                    </a:lnT>
+                    <a:lnB w="0">
+                      <a:noFill/>
+                    </a:lnB>
+                  </a:tcPr>
+                </a:tc>
+                <a:tc>
+                  <a:txBody>
+                    <a:bodyPr wrap="none"/>
+                    <a:lstStyle/>
+                    <a:p>
+                      <a:pPr algn="r"/>
+                      <a:r>
+                        <a:rPr sz="750" b="0" i="0">
+                          <a:solidFill>
+                            <a:srgbClr val="000000"/>
+                          </a:solidFill>
+                          <a:latin typeface="Arial"/>
+                        </a:rPr>
+                        <a:t>1.7x</a:t>
+                      </a:r>
+                    </a:p>
+                  </a:txBody>
+                  <a:tcPr marL="36576" marR="36576" marT="9144" marB="9144" anchor="ctr">
+                    <a:solidFill>
+                      <a:srgbClr val="FFFFFF"/>
+                    </a:solidFill>
+                    <a:lnL w="0">
+                      <a:noFill/>
+                    </a:lnL>
+                    <a:lnR w="0">
+                      <a:noFill/>
+                    </a:lnR>
+                    <a:lnT w="0">
+                      <a:noFill/>
+                    </a:lnT>
+                    <a:lnB w="0">
+                      <a:noFill/>
+                    </a:lnB>
+                  </a:tcPr>
+                </a:tc>
+                <a:tc>
+                  <a:txBody>
+                    <a:bodyPr wrap="none"/>
+                    <a:lstStyle/>
+                    <a:p>
+                      <a:pPr algn="r"/>
+                      <a:r>
+                        <a:rPr sz="750" b="0" i="0">
+                          <a:solidFill>
+                            <a:srgbClr val="000000"/>
+                          </a:solidFill>
+                          <a:latin typeface="Arial"/>
+                        </a:rPr>
+                        <a:t>17.3x</a:t>
+                      </a:r>
+                    </a:p>
+                  </a:txBody>
+                  <a:tcPr marL="36576" marR="36576" marT="9144" marB="9144" anchor="ctr">
+                    <a:solidFill>
+                      <a:srgbClr val="FFFFFF"/>
+                    </a:solidFill>
+                    <a:lnL w="0">
+                      <a:noFill/>
+                    </a:lnL>
+                    <a:lnR w="0">
+                      <a:noFill/>
+                    </a:lnR>
+                    <a:lnT w="0">
+                      <a:noFill/>
+                    </a:lnT>
+                    <a:lnB w="0">
+                      <a:noFill/>
+                    </a:lnB>
+                  </a:tcPr>
+                </a:tc>
+                <a:tc>
+                  <a:txBody>
+                    <a:bodyPr wrap="none"/>
+                    <a:lstStyle/>
+                    <a:p>
+                      <a:pPr algn="r"/>
+                      <a:r>
+                        <a:rPr sz="750" b="0" i="0">
+                          <a:solidFill>
+                            <a:srgbClr val="000000"/>
+                          </a:solidFill>
+                          <a:latin typeface="Arial"/>
+                        </a:rPr>
+                        <a:t>18.4x</a:t>
+                      </a:r>
+                    </a:p>
+                  </a:txBody>
+                  <a:tcPr marL="36576" marR="36576" marT="9144" marB="9144" anchor="ctr">
+                    <a:solidFill>
+                      <a:srgbClr val="FFFFFF"/>
+                    </a:solidFill>
+                    <a:lnL w="0">
+                      <a:noFill/>
+                    </a:lnL>
+                    <a:lnR w="0">
+                      <a:noFill/>
+                    </a:lnR>
+                    <a:lnT w="0">
+                      <a:noFill/>
+                    </a:lnT>
+                    <a:lnB w="0">
+                      <a:noFill/>
+                    </a:lnB>
+                  </a:tcPr>
+                </a:tc>
+                <a:tc>
+                  <a:txBody>
+                    <a:bodyPr wrap="none"/>
+                    <a:lstStyle/>
+                    <a:p>
+                      <a:pPr algn="r"/>
+                      <a:r>
+                        <a:rPr sz="750" b="0" i="0">
+                          <a:solidFill>
+                            <a:srgbClr val="000000"/>
+                          </a:solidFill>
+                          <a:latin typeface="Arial"/>
+                        </a:rPr>
+                        <a:t>13.5x</a:t>
+                      </a:r>
+                    </a:p>
+                  </a:txBody>
+                  <a:tcPr marL="36576" marR="36576" marT="9144" marB="9144" anchor="ctr">
+                    <a:solidFill>
+                      <a:srgbClr val="FFFFFF"/>
+                    </a:solidFill>
+                    <a:lnL w="0">
+                      <a:noFill/>
+                    </a:lnL>
+                    <a:lnR w="0">
+                      <a:noFill/>
+                    </a:lnR>
+                    <a:lnT w="0">
+                      <a:noFill/>
+                    </a:lnT>
+                    <a:lnB w="0">
+                      <a:noFill/>
+                    </a:lnB>
+                  </a:tcPr>
+                </a:tc>
+                <a:tc>
+                  <a:txBody>
+                    <a:bodyPr wrap="none"/>
+                    <a:lstStyle/>
+                    <a:p>
+                      <a:pPr algn="r"/>
+                      <a:r>
+                        <a:rPr sz="750" b="0" i="0">
+                          <a:solidFill>
+                            <a:srgbClr val="000000"/>
+                          </a:solidFill>
+                          <a:latin typeface="Arial"/>
+                        </a:rPr>
+                        <a:t>14.6x</a:t>
+                      </a:r>
+                    </a:p>
+                  </a:txBody>
+                  <a:tcPr marL="36576" marR="36576" marT="9144" marB="9144" anchor="ctr">
+                    <a:solidFill>
+                      <a:srgbClr val="FFFFFF"/>
+                    </a:solidFill>
+                    <a:lnL w="0">
+                      <a:noFill/>
+                    </a:lnL>
+                    <a:lnR w="0">
+                      <a:noFill/>
+                    </a:lnR>
+                    <a:lnT w="0">
+                      <a:noFill/>
+                    </a:lnT>
+                    <a:lnB w="0">
+                      <a:noFill/>
+                    </a:lnB>
+                  </a:tcPr>
+                </a:tc>
+                <a:tc>
+                  <a:txBody>
+                    <a:bodyPr wrap="none"/>
+                    <a:lstStyle/>
+                    <a:p>
+                      <a:pPr algn="r"/>
+                      <a:r>
+                        <a:rPr sz="750" b="0" i="0">
+                          <a:solidFill>
+                            <a:srgbClr val="000000"/>
+                          </a:solidFill>
+                          <a:latin typeface="Arial"/>
+                        </a:rPr>
+                        <a:t>+37%</a:t>
+                      </a:r>
+                    </a:p>
+                  </a:txBody>
+                  <a:tcPr marL="36576" marR="36576" marT="9144" marB="9144" anchor="ctr">
+                    <a:solidFill>
+                      <a:srgbClr val="FFFFFF"/>
+                    </a:solidFill>
+                    <a:lnL w="0">
+                      <a:noFill/>
+                    </a:lnL>
+                    <a:lnR w="0">
+                      <a:noFill/>
+                    </a:lnR>
+                    <a:lnT w="0">
+                      <a:noFill/>
+                    </a:lnT>
+                    <a:lnB w="0">
+                      <a:noFill/>
+                    </a:lnB>
+                  </a:tcPr>
+                </a:tc>
+                <a:tc>
+                  <a:txBody>
+                    <a:bodyPr wrap="none"/>
+                    <a:lstStyle/>
+                    <a:p>
+                      <a:pPr algn="r"/>
+                      <a:r>
+                        <a:rPr sz="750" b="0" i="0">
+                          <a:solidFill>
+                            <a:srgbClr val="000000"/>
+                          </a:solidFill>
+                          <a:latin typeface="Arial"/>
+                        </a:rPr>
+                        <a:t>0.40</a:t>
+                      </a:r>
+                    </a:p>
+                  </a:txBody>
+                  <a:tcPr marL="36576" marR="36576" marT="9144" marB="9144" anchor="ctr">
+                    <a:solidFill>
+                      <a:srgbClr val="FFFFFF"/>
+                    </a:solidFill>
+                    <a:lnL w="0">
+                      <a:noFill/>
+                    </a:lnL>
+                    <a:lnR w="0">
+                      <a:noFill/>
+                    </a:lnR>
+                    <a:lnT w="0">
+                      <a:noFill/>
+                    </a:lnT>
+                    <a:lnB w="0">
+                      <a:noFill/>
+                    </a:lnB>
+                  </a:tcPr>
+                </a:tc>
+                <a:tc>
+                  <a:txBody>
+                    <a:bodyPr wrap="none"/>
+                    <a:lstStyle/>
+                    <a:p>
+                      <a:pPr algn="r"/>
+                      <a:r>
+                        <a:rPr sz="750" b="0" i="0">
+                          <a:solidFill>
+                            <a:srgbClr val="000000"/>
+                          </a:solidFill>
+                          <a:latin typeface="Arial"/>
+                        </a:rPr>
+                        <a:t>1.3%</a:t>
+                      </a:r>
+                    </a:p>
+                  </a:txBody>
+                  <a:tcPr marL="36576" marR="36576" marT="9144" marB="9144" anchor="ctr">
+                    <a:solidFill>
+                      <a:srgbClr val="FFFFFF"/>
+                    </a:solidFill>
+                    <a:lnL w="0">
+                      <a:noFill/>
+                    </a:lnL>
+                    <a:lnR w="0">
+                      <a:noFill/>
+                    </a:lnR>
+                    <a:lnT w="0">
+                      <a:noFill/>
+                    </a:lnT>
+                    <a:lnB w="0">
+                      <a:noFill/>
+                    </a:lnB>
+                  </a:tcPr>
+                </a:tc>
+                <a:tc>
+                  <a:txBody>
+                    <a:bodyPr wrap="none"/>
+                    <a:lstStyle/>
+                    <a:p>
+                      <a:pPr algn="r"/>
+                      <a:r>
+                        <a:rPr sz="750" b="0" i="0">
+                          <a:solidFill>
+                            <a:srgbClr val="000000"/>
+                          </a:solidFill>
+                          <a:latin typeface="Arial"/>
+                        </a:rPr>
+                        <a:t>–</a:t>
+                      </a:r>
+                    </a:p>
+                  </a:txBody>
+                  <a:tcPr marL="36576" marR="36576" marT="9144" marB="9144" anchor="ctr">
+                    <a:solidFill>
+                      <a:srgbClr val="FFFFFF"/>
+                    </a:solidFill>
+                    <a:lnL w="0">
+                      <a:noFill/>
+                    </a:lnL>
+                    <a:lnR w="0">
+                      <a:noFill/>
+                    </a:lnR>
+                    <a:lnT w="0">
+                      <a:noFill/>
+                    </a:lnT>
+                    <a:lnB w="0">
+                      <a:noFill/>
+                    </a:lnB>
+                  </a:tcPr>
+                </a:tc>
+              </a:tr>
+              <a:tr h="237744">
+                <a:tc>
+                  <a:txBody>
+                    <a:bodyPr wrap="none"/>
+                    <a:lstStyle/>
+                    <a:p>
+                      <a:pPr algn="l"/>
+                      <a:r>
+                        <a:rPr sz="750" b="0" i="0">
+                          <a:solidFill>
+                            <a:srgbClr val="000000"/>
+                          </a:solidFill>
+                          <a:latin typeface="Arial"/>
+                        </a:rPr>
+                        <a:t>Atea</a:t>
+                      </a:r>
+                    </a:p>
+                  </a:txBody>
+                  <a:tcPr marL="36576" marR="36576" marT="9144" marB="9144" anchor="ctr">
+                    <a:solidFill>
+                      <a:srgbClr val="EDEDED"/>
+                    </a:solidFill>
+                    <a:lnL w="0">
+                      <a:noFill/>
+                    </a:lnL>
+                    <a:lnR w="0">
+                      <a:noFill/>
+                    </a:lnR>
+                    <a:lnT w="0">
+                      <a:noFill/>
+                    </a:lnT>
+                    <a:lnB w="0">
+                      <a:noFill/>
+                    </a:lnB>
+                  </a:tcPr>
+                </a:tc>
+                <a:tc>
+                  <a:txBody>
+                    <a:bodyPr wrap="none"/>
+                    <a:lstStyle/>
+                    <a:p>
+                      <a:pPr algn="r"/>
+                      <a:r>
+                        <a:rPr sz="750" b="0" i="0">
+                          <a:solidFill>
+                            <a:srgbClr val="000000"/>
+                          </a:solidFill>
+                          <a:latin typeface="Arial"/>
+                        </a:rPr>
+                        <a:t>0.5x</a:t>
+                      </a:r>
+                    </a:p>
+                  </a:txBody>
+                  <a:tcPr marL="36576" marR="36576" marT="9144" marB="9144" anchor="ctr">
+                    <a:solidFill>
+                      <a:srgbClr val="EDEDED"/>
+                    </a:solidFill>
+                    <a:lnL w="0">
+                      <a:noFill/>
+                    </a:lnL>
+                    <a:lnR w="0">
+                      <a:noFill/>
+                    </a:lnR>
+                    <a:lnT w="0">
+                      <a:noFill/>
+                    </a:lnT>
+                    <a:lnB w="0">
+                      <a:noFill/>
+                    </a:lnB>
+                  </a:tcPr>
+                </a:tc>
+                <a:tc>
+                  <a:txBody>
+                    <a:bodyPr wrap="none"/>
+                    <a:lstStyle/>
+                    <a:p>
+                      <a:pPr algn="r"/>
+                      <a:r>
+                        <a:rPr sz="750" b="0" i="0">
+                          <a:solidFill>
+                            <a:srgbClr val="000000"/>
+                          </a:solidFill>
+                          <a:latin typeface="Arial"/>
+                        </a:rPr>
+                        <a:t>10.1x</a:t>
+                      </a:r>
+                    </a:p>
+                  </a:txBody>
+                  <a:tcPr marL="36576" marR="36576" marT="9144" marB="9144" anchor="ctr">
+                    <a:solidFill>
+                      <a:srgbClr val="EDEDED"/>
+                    </a:solidFill>
+                    <a:lnL w="0">
+                      <a:noFill/>
+                    </a:lnL>
+                    <a:lnR w="0">
+                      <a:noFill/>
+                    </a:lnR>
+                    <a:lnT w="0">
+                      <a:noFill/>
+                    </a:lnT>
+                    <a:lnB w="0">
+                      <a:noFill/>
+                    </a:lnB>
+                  </a:tcPr>
+                </a:tc>
+                <a:tc>
+                  <a:txBody>
+                    <a:bodyPr wrap="none"/>
+                    <a:lstStyle/>
+                    <a:p>
+                      <a:pPr algn="r"/>
+                      <a:r>
+                        <a:rPr sz="750" b="0" i="0">
+                          <a:solidFill>
+                            <a:srgbClr val="000000"/>
+                          </a:solidFill>
+                          <a:latin typeface="Arial"/>
+                        </a:rPr>
+                        <a:t>16.4x</a:t>
+                      </a:r>
+                    </a:p>
+                  </a:txBody>
+                  <a:tcPr marL="36576" marR="36576" marT="9144" marB="9144" anchor="ctr">
+                    <a:solidFill>
+                      <a:srgbClr val="EDEDED"/>
+                    </a:solidFill>
+                    <a:lnL w="0">
+                      <a:noFill/>
+                    </a:lnL>
+                    <a:lnR w="0">
+                      <a:noFill/>
+                    </a:lnR>
+                    <a:lnT w="0">
+                      <a:noFill/>
+                    </a:lnT>
+                    <a:lnB w="0">
+                      <a:noFill/>
+                    </a:lnB>
+                  </a:tcPr>
+                </a:tc>
+                <a:tc>
+                  <a:txBody>
+                    <a:bodyPr wrap="none"/>
+                    <a:lstStyle/>
+                    <a:p>
+                      <a:pPr algn="r"/>
+                      <a:r>
+                        <a:rPr sz="750" b="0" i="0">
+                          <a:solidFill>
+                            <a:srgbClr val="000000"/>
+                          </a:solidFill>
+                          <a:latin typeface="Arial"/>
+                        </a:rPr>
+                        <a:t>14.8x</a:t>
+                      </a:r>
+                    </a:p>
+                  </a:txBody>
+                  <a:tcPr marL="36576" marR="36576" marT="9144" marB="9144" anchor="ctr">
+                    <a:solidFill>
+                      <a:srgbClr val="EDEDED"/>
+                    </a:solidFill>
+                    <a:lnL w="0">
+                      <a:noFill/>
+                    </a:lnL>
+                    <a:lnR w="0">
+                      <a:noFill/>
+                    </a:lnR>
+                    <a:lnT w="0">
+                      <a:noFill/>
+                    </a:lnT>
+                    <a:lnB w="0">
+                      <a:noFill/>
+                    </a:lnB>
+                  </a:tcPr>
+                </a:tc>
+                <a:tc>
+                  <a:txBody>
+                    <a:bodyPr wrap="none"/>
+                    <a:lstStyle/>
+                    <a:p>
+                      <a:pPr algn="r"/>
+                      <a:r>
+                        <a:rPr sz="750" b="0" i="0">
+                          <a:solidFill>
+                            <a:srgbClr val="000000"/>
+                          </a:solidFill>
+                          <a:latin typeface="Arial"/>
+                        </a:rPr>
+                        <a:t>15.2x</a:t>
+                      </a:r>
+                    </a:p>
+                  </a:txBody>
+                  <a:tcPr marL="36576" marR="36576" marT="9144" marB="9144" anchor="ctr">
+                    <a:solidFill>
+                      <a:srgbClr val="EDEDED"/>
+                    </a:solidFill>
+                    <a:lnL w="0">
+                      <a:noFill/>
+                    </a:lnL>
+                    <a:lnR w="0">
+                      <a:noFill/>
+                    </a:lnR>
+                    <a:lnT w="0">
+                      <a:noFill/>
+                    </a:lnT>
+                    <a:lnB w="0">
+                      <a:noFill/>
+                    </a:lnB>
+                  </a:tcPr>
+                </a:tc>
+                <a:tc>
+                  <a:txBody>
+                    <a:bodyPr wrap="none"/>
+                    <a:lstStyle/>
+                    <a:p>
+                      <a:pPr algn="r"/>
+                      <a:r>
+                        <a:rPr sz="750" b="0" i="0">
+                          <a:solidFill>
+                            <a:srgbClr val="000000"/>
+                          </a:solidFill>
+                          <a:latin typeface="Arial"/>
+                        </a:rPr>
+                        <a:t>+11%</a:t>
+                      </a:r>
+                    </a:p>
+                  </a:txBody>
+                  <a:tcPr marL="36576" marR="36576" marT="9144" marB="9144" anchor="ctr">
+                    <a:solidFill>
+                      <a:srgbClr val="EDEDED"/>
+                    </a:solidFill>
+                    <a:lnL w="0">
+                      <a:noFill/>
+                    </a:lnL>
+                    <a:lnR w="0">
+                      <a:noFill/>
+                    </a:lnR>
+                    <a:lnT w="0">
+                      <a:noFill/>
+                    </a:lnT>
+                    <a:lnB w="0">
+                      <a:noFill/>
+                    </a:lnB>
+                  </a:tcPr>
+                </a:tc>
+                <a:tc>
+                  <a:txBody>
+                    <a:bodyPr wrap="none"/>
+                    <a:lstStyle/>
+                    <a:p>
+                      <a:pPr algn="r"/>
+                      <a:r>
+                        <a:rPr sz="750" b="0" i="0">
+                          <a:solidFill>
+                            <a:srgbClr val="000000"/>
+                          </a:solidFill>
+                          <a:latin typeface="Arial"/>
+                        </a:rPr>
+                        <a:t>1.40</a:t>
+                      </a:r>
+                    </a:p>
+                  </a:txBody>
+                  <a:tcPr marL="36576" marR="36576" marT="9144" marB="9144" anchor="ctr">
+                    <a:solidFill>
+                      <a:srgbClr val="EDEDED"/>
+                    </a:solidFill>
+                    <a:lnL w="0">
+                      <a:noFill/>
+                    </a:lnL>
+                    <a:lnR w="0">
+                      <a:noFill/>
+                    </a:lnR>
+                    <a:lnT w="0">
+                      <a:noFill/>
+                    </a:lnT>
+                    <a:lnB w="0">
+                      <a:noFill/>
+                    </a:lnB>
+                  </a:tcPr>
+                </a:tc>
+                <a:tc>
+                  <a:txBody>
+                    <a:bodyPr wrap="none"/>
+                    <a:lstStyle/>
+                    <a:p>
+                      <a:pPr algn="r"/>
+                      <a:r>
+                        <a:rPr sz="750" b="0" i="0">
+                          <a:solidFill>
+                            <a:srgbClr val="000000"/>
+                          </a:solidFill>
+                          <a:latin typeface="Arial"/>
+                        </a:rPr>
+                        <a:t>1.8%</a:t>
+                      </a:r>
+                    </a:p>
+                  </a:txBody>
+                  <a:tcPr marL="36576" marR="36576" marT="9144" marB="9144" anchor="ctr">
+                    <a:solidFill>
+                      <a:srgbClr val="EDEDED"/>
+                    </a:solidFill>
+                    <a:lnL w="0">
+                      <a:noFill/>
+                    </a:lnL>
+                    <a:lnR w="0">
+                      <a:noFill/>
+                    </a:lnR>
+                    <a:lnT w="0">
+                      <a:noFill/>
+                    </a:lnT>
+                    <a:lnB w="0">
+                      <a:noFill/>
+                    </a:lnB>
+                  </a:tcPr>
+                </a:tc>
+                <a:tc>
+                  <a:txBody>
+                    <a:bodyPr wrap="none"/>
+                    <a:lstStyle/>
+                    <a:p>
+                      <a:pPr algn="r"/>
+                      <a:r>
+                        <a:rPr sz="750" b="0" i="0">
+                          <a:solidFill>
+                            <a:srgbClr val="000000"/>
+                          </a:solidFill>
+                          <a:latin typeface="Arial"/>
+                        </a:rPr>
+                        <a:t>4.4%</a:t>
+                      </a:r>
+                    </a:p>
+                  </a:txBody>
+                  <a:tcPr marL="36576" marR="36576" marT="9144" marB="9144" anchor="ctr">
+                    <a:solidFill>
+                      <a:srgbClr val="EDEDED"/>
+                    </a:solidFill>
+                    <a:lnL w="0">
+                      <a:noFill/>
+                    </a:lnL>
+                    <a:lnR w="0">
+                      <a:noFill/>
+                    </a:lnR>
+                    <a:lnT w="0">
+                      <a:noFill/>
+                    </a:lnT>
+                    <a:lnB w="0">
+                      <a:noFill/>
+                    </a:lnB>
+                  </a:tcPr>
+                </a:tc>
+              </a:tr>
+              <a:tr h="237744">
+                <a:tc>
+                  <a:txBody>
+                    <a:bodyPr wrap="none"/>
+                    <a:lstStyle/>
+                    <a:p>
+                      <a:pPr algn="l"/>
+                      <a:r>
+                        <a:rPr sz="750" b="0" i="0">
+                          <a:solidFill>
+                            <a:srgbClr val="000000"/>
+                          </a:solidFill>
+                          <a:latin typeface="Arial"/>
+                        </a:rPr>
+                        <a:t>Sopra Steria</a:t>
+                      </a:r>
+                    </a:p>
+                  </a:txBody>
+                  <a:tcPr marL="36576" marR="36576" marT="9144" marB="9144" anchor="ctr">
+                    <a:solidFill>
+                      <a:srgbClr val="FFFFFF"/>
+                    </a:solidFill>
+                    <a:lnL w="0">
+                      <a:noFill/>
+                    </a:lnL>
+                    <a:lnR w="0">
+                      <a:noFill/>
+                    </a:lnR>
+                    <a:lnT w="0">
+                      <a:noFill/>
+                    </a:lnT>
+                    <a:lnB w="0">
+                      <a:noFill/>
+                    </a:lnB>
+                  </a:tcPr>
+                </a:tc>
+                <a:tc>
+                  <a:txBody>
+                    <a:bodyPr wrap="none"/>
+                    <a:lstStyle/>
+                    <a:p>
+                      <a:pPr algn="r"/>
+                      <a:r>
+                        <a:rPr sz="750" b="0" i="0">
+                          <a:solidFill>
+                            <a:srgbClr val="000000"/>
+                          </a:solidFill>
+                          <a:latin typeface="Arial"/>
+                        </a:rPr>
+                        <a:t>0.6x</a:t>
+                      </a:r>
+                    </a:p>
+                  </a:txBody>
+                  <a:tcPr marL="36576" marR="36576" marT="9144" marB="9144" anchor="ctr">
+                    <a:solidFill>
+                      <a:srgbClr val="FFFFFF"/>
+                    </a:solidFill>
+                    <a:lnL w="0">
+                      <a:noFill/>
+                    </a:lnL>
+                    <a:lnR w="0">
+                      <a:noFill/>
+                    </a:lnR>
+                    <a:lnT w="0">
+                      <a:noFill/>
+                    </a:lnT>
+                    <a:lnB w="0">
+                      <a:noFill/>
+                    </a:lnB>
+                  </a:tcPr>
+                </a:tc>
+                <a:tc>
+                  <a:txBody>
+                    <a:bodyPr wrap="none"/>
+                    <a:lstStyle/>
+                    <a:p>
+                      <a:pPr algn="r"/>
+                      <a:r>
+                        <a:rPr sz="750" b="0" i="0">
+                          <a:solidFill>
+                            <a:srgbClr val="000000"/>
+                          </a:solidFill>
+                          <a:latin typeface="Arial"/>
+                        </a:rPr>
+                        <a:t>7.2x</a:t>
+                      </a:r>
+                    </a:p>
+                  </a:txBody>
+                  <a:tcPr marL="36576" marR="36576" marT="9144" marB="9144" anchor="ctr">
+                    <a:solidFill>
+                      <a:srgbClr val="FFFFFF"/>
+                    </a:solidFill>
+                    <a:lnL w="0">
+                      <a:noFill/>
+                    </a:lnL>
+                    <a:lnR w="0">
+                      <a:noFill/>
+                    </a:lnR>
+                    <a:lnT w="0">
+                      <a:noFill/>
+                    </a:lnT>
+                    <a:lnB w="0">
+                      <a:noFill/>
+                    </a:lnB>
+                  </a:tcPr>
+                </a:tc>
+                <a:tc>
+                  <a:txBody>
+                    <a:bodyPr wrap="none"/>
+                    <a:lstStyle/>
+                    <a:p>
+                      <a:pPr algn="r"/>
+                      <a:r>
+                        <a:rPr sz="750" b="0" i="0">
+                          <a:solidFill>
+                            <a:srgbClr val="000000"/>
+                          </a:solidFill>
+                          <a:latin typeface="Arial"/>
+                        </a:rPr>
+                        <a:t>8.9x</a:t>
+                      </a:r>
+                    </a:p>
+                  </a:txBody>
+                  <a:tcPr marL="36576" marR="36576" marT="9144" marB="9144" anchor="ctr">
+                    <a:solidFill>
+                      <a:srgbClr val="FFFFFF"/>
+                    </a:solidFill>
+                    <a:lnL w="0">
+                      <a:noFill/>
+                    </a:lnL>
+                    <a:lnR w="0">
+                      <a:noFill/>
+                    </a:lnR>
+                    <a:lnT w="0">
+                      <a:noFill/>
+                    </a:lnT>
+                    <a:lnB w="0">
+                      <a:noFill/>
+                    </a:lnB>
+                  </a:tcPr>
+                </a:tc>
+                <a:tc>
+                  <a:txBody>
+                    <a:bodyPr wrap="none"/>
+                    <a:lstStyle/>
+                    <a:p>
+                      <a:pPr algn="r"/>
+                      <a:r>
+                        <a:rPr sz="750" b="0" i="0">
+                          <a:solidFill>
+                            <a:srgbClr val="000000"/>
+                          </a:solidFill>
+                          <a:latin typeface="Arial"/>
+                        </a:rPr>
+                        <a:t>8.1x</a:t>
+                      </a:r>
+                    </a:p>
+                  </a:txBody>
+                  <a:tcPr marL="36576" marR="36576" marT="9144" marB="9144" anchor="ctr">
+                    <a:solidFill>
+                      <a:srgbClr val="FFFFFF"/>
+                    </a:solidFill>
+                    <a:lnL w="0">
+                      <a:noFill/>
+                    </a:lnL>
+                    <a:lnR w="0">
+                      <a:noFill/>
+                    </a:lnR>
+                    <a:lnT w="0">
+                      <a:noFill/>
+                    </a:lnT>
+                    <a:lnB w="0">
+                      <a:noFill/>
+                    </a:lnB>
+                  </a:tcPr>
+                </a:tc>
+                <a:tc>
+                  <a:txBody>
+                    <a:bodyPr wrap="none"/>
+                    <a:lstStyle/>
+                    <a:p>
+                      <a:pPr algn="r"/>
+                      <a:r>
+                        <a:rPr sz="750" b="0" i="0">
+                          <a:solidFill>
+                            <a:srgbClr val="000000"/>
+                          </a:solidFill>
+                          <a:latin typeface="Arial"/>
+                        </a:rPr>
+                        <a:t>8.3x</a:t>
+                      </a:r>
+                    </a:p>
+                  </a:txBody>
+                  <a:tcPr marL="36576" marR="36576" marT="9144" marB="9144" anchor="ctr">
+                    <a:solidFill>
+                      <a:srgbClr val="FFFFFF"/>
+                    </a:solidFill>
+                    <a:lnL w="0">
+                      <a:noFill/>
+                    </a:lnL>
+                    <a:lnR w="0">
+                      <a:noFill/>
+                    </a:lnR>
+                    <a:lnT w="0">
+                      <a:noFill/>
+                    </a:lnT>
+                    <a:lnB w="0">
+                      <a:noFill/>
+                    </a:lnB>
+                  </a:tcPr>
+                </a:tc>
+                <a:tc>
+                  <a:txBody>
+                    <a:bodyPr wrap="none"/>
+                    <a:lstStyle/>
+                    <a:p>
+                      <a:pPr algn="r"/>
+                      <a:r>
+                        <a:rPr sz="750" b="0" i="0">
+                          <a:solidFill>
+                            <a:srgbClr val="000000"/>
+                          </a:solidFill>
+                          <a:latin typeface="Arial"/>
+                        </a:rPr>
+                        <a:t>+10%</a:t>
+                      </a:r>
+                    </a:p>
+                  </a:txBody>
+                  <a:tcPr marL="36576" marR="36576" marT="9144" marB="9144" anchor="ctr">
+                    <a:solidFill>
+                      <a:srgbClr val="FFFFFF"/>
+                    </a:solidFill>
+                    <a:lnL w="0">
+                      <a:noFill/>
+                    </a:lnL>
+                    <a:lnR w="0">
+                      <a:noFill/>
+                    </a:lnR>
+                    <a:lnT w="0">
+                      <a:noFill/>
+                    </a:lnT>
+                    <a:lnB w="0">
+                      <a:noFill/>
+                    </a:lnB>
+                  </a:tcPr>
+                </a:tc>
+                <a:tc>
+                  <a:txBody>
+                    <a:bodyPr wrap="none"/>
+                    <a:lstStyle/>
+                    <a:p>
+                      <a:pPr algn="r"/>
+                      <a:r>
+                        <a:rPr sz="750" b="0" i="0">
+                          <a:solidFill>
+                            <a:srgbClr val="000000"/>
+                          </a:solidFill>
+                          <a:latin typeface="Arial"/>
+                        </a:rPr>
+                        <a:t>0.79</a:t>
+                      </a:r>
+                    </a:p>
+                  </a:txBody>
+                  <a:tcPr marL="36576" marR="36576" marT="9144" marB="9144" anchor="ctr">
+                    <a:solidFill>
+                      <a:srgbClr val="FFFFFF"/>
+                    </a:solidFill>
+                    <a:lnL w="0">
+                      <a:noFill/>
+                    </a:lnL>
+                    <a:lnR w="0">
+                      <a:noFill/>
+                    </a:lnR>
+                    <a:lnT w="0">
+                      <a:noFill/>
+                    </a:lnT>
+                    <a:lnB w="0">
+                      <a:noFill/>
+                    </a:lnB>
+                  </a:tcPr>
+                </a:tc>
+                <a:tc>
+                  <a:txBody>
+                    <a:bodyPr wrap="none"/>
+                    <a:lstStyle/>
+                    <a:p>
+                      <a:pPr algn="r"/>
+                      <a:r>
+                        <a:rPr sz="750" b="0" i="0">
+                          <a:solidFill>
+                            <a:srgbClr val="000000"/>
+                          </a:solidFill>
+                          <a:latin typeface="Arial"/>
+                        </a:rPr>
+                        <a:t>11.7%</a:t>
+                      </a:r>
+                    </a:p>
+                  </a:txBody>
+                  <a:tcPr marL="36576" marR="36576" marT="9144" marB="9144" anchor="ctr">
+                    <a:solidFill>
+                      <a:srgbClr val="FFFFFF"/>
+                    </a:solidFill>
+                    <a:lnL w="0">
+                      <a:noFill/>
+                    </a:lnL>
+                    <a:lnR w="0">
+                      <a:noFill/>
+                    </a:lnR>
+                    <a:lnT w="0">
+                      <a:noFill/>
+                    </a:lnT>
+                    <a:lnB w="0">
+                      <a:noFill/>
+                    </a:lnB>
+                  </a:tcPr>
+                </a:tc>
+                <a:tc>
+                  <a:txBody>
+                    <a:bodyPr wrap="none"/>
+                    <a:lstStyle/>
+                    <a:p>
+                      <a:pPr algn="r"/>
+                      <a:r>
+                        <a:rPr sz="750" b="0" i="0">
+                          <a:solidFill>
+                            <a:srgbClr val="000000"/>
+                          </a:solidFill>
+                          <a:latin typeface="Arial"/>
+                        </a:rPr>
+                        <a:t>3.3%</a:t>
+                      </a:r>
+                    </a:p>
+                  </a:txBody>
+                  <a:tcPr marL="36576" marR="36576" marT="9144" marB="9144" anchor="ctr">
+                    <a:solidFill>
+                      <a:srgbClr val="FFFFFF"/>
+                    </a:solidFill>
+                    <a:lnL w="0">
+                      <a:noFill/>
+                    </a:lnL>
+                    <a:lnR w="0">
+                      <a:noFill/>
+                    </a:lnR>
+                    <a:lnT w="0">
+                      <a:noFill/>
+                    </a:lnT>
+                    <a:lnB w="0">
+                      <a:noFill/>
+                    </a:lnB>
+                  </a:tcPr>
+                </a:tc>
+              </a:tr>
+              <a:tr h="237744">
+                <a:tc>
+                  <a:txBody>
+                    <a:bodyPr wrap="none"/>
+                    <a:lstStyle/>
+                    <a:p>
+                      <a:pPr algn="l"/>
+                      <a:r>
+                        <a:rPr sz="750" b="0" i="0">
+                          <a:solidFill>
+                            <a:srgbClr val="000000"/>
+                          </a:solidFill>
+                          <a:latin typeface="Arial"/>
+                        </a:rPr>
+                        <a:t>Capgemini</a:t>
+                      </a:r>
+                    </a:p>
+                  </a:txBody>
+                  <a:tcPr marL="36576" marR="36576" marT="9144" marB="9144" anchor="ctr">
+                    <a:solidFill>
+                      <a:srgbClr val="EDEDED"/>
+                    </a:solidFill>
+                    <a:lnL w="0">
+                      <a:noFill/>
+                    </a:lnL>
+                    <a:lnR w="0">
+                      <a:noFill/>
+                    </a:lnR>
+                    <a:lnT w="0">
+                      <a:noFill/>
+                    </a:lnT>
+                    <a:lnB w="0">
+                      <a:noFill/>
+                    </a:lnB>
+                  </a:tcPr>
+                </a:tc>
+                <a:tc>
+                  <a:txBody>
+                    <a:bodyPr wrap="none"/>
+                    <a:lstStyle/>
+                    <a:p>
+                      <a:pPr algn="r"/>
+                      <a:r>
+                        <a:rPr sz="750" b="0" i="0">
+                          <a:solidFill>
+                            <a:srgbClr val="000000"/>
+                          </a:solidFill>
+                          <a:latin typeface="Arial"/>
+                        </a:rPr>
+                        <a:t>1.0x</a:t>
+                      </a:r>
+                    </a:p>
+                  </a:txBody>
+                  <a:tcPr marL="36576" marR="36576" marT="9144" marB="9144" anchor="ctr">
+                    <a:solidFill>
+                      <a:srgbClr val="EDEDED"/>
+                    </a:solidFill>
+                    <a:lnL w="0">
+                      <a:noFill/>
+                    </a:lnL>
+                    <a:lnR w="0">
+                      <a:noFill/>
+                    </a:lnR>
+                    <a:lnT w="0">
+                      <a:noFill/>
+                    </a:lnT>
+                    <a:lnB w="0">
+                      <a:noFill/>
+                    </a:lnB>
+                  </a:tcPr>
+                </a:tc>
+                <a:tc>
+                  <a:txBody>
+                    <a:bodyPr wrap="none"/>
+                    <a:lstStyle/>
+                    <a:p>
+                      <a:pPr algn="r"/>
+                      <a:r>
+                        <a:rPr sz="750" b="0" i="0">
+                          <a:solidFill>
+                            <a:srgbClr val="000000"/>
+                          </a:solidFill>
+                          <a:latin typeface="Arial"/>
+                        </a:rPr>
+                        <a:t>8.1x</a:t>
+                      </a:r>
+                    </a:p>
+                  </a:txBody>
+                  <a:tcPr marL="36576" marR="36576" marT="9144" marB="9144" anchor="ctr">
+                    <a:solidFill>
+                      <a:srgbClr val="EDEDED"/>
+                    </a:solidFill>
+                    <a:lnL w="0">
+                      <a:noFill/>
+                    </a:lnL>
+                    <a:lnR w="0">
+                      <a:noFill/>
+                    </a:lnR>
+                    <a:lnT w="0">
+                      <a:noFill/>
+                    </a:lnT>
+                    <a:lnB w="0">
+                      <a:noFill/>
+                    </a:lnB>
+                  </a:tcPr>
+                </a:tc>
+                <a:tc>
+                  <a:txBody>
+                    <a:bodyPr wrap="none"/>
+                    <a:lstStyle/>
+                    <a:p>
+                      <a:pPr algn="r"/>
+                      <a:r>
+                        <a:rPr sz="750" b="0" i="0">
+                          <a:solidFill>
+                            <a:srgbClr val="000000"/>
+                          </a:solidFill>
+                          <a:latin typeface="Arial"/>
+                        </a:rPr>
+                        <a:t>8.4x</a:t>
+                      </a:r>
+                    </a:p>
+                  </a:txBody>
+                  <a:tcPr marL="36576" marR="36576" marT="9144" marB="9144" anchor="ctr">
+                    <a:solidFill>
+                      <a:srgbClr val="EDEDED"/>
+                    </a:solidFill>
+                    <a:lnL w="0">
+                      <a:noFill/>
+                    </a:lnL>
+                    <a:lnR w="0">
+                      <a:noFill/>
+                    </a:lnR>
+                    <a:lnT w="0">
+                      <a:noFill/>
+                    </a:lnT>
+                    <a:lnB w="0">
+                      <a:noFill/>
+                    </a:lnB>
+                  </a:tcPr>
+                </a:tc>
+                <a:tc>
+                  <a:txBody>
+                    <a:bodyPr wrap="none"/>
+                    <a:lstStyle/>
+                    <a:p>
+                      <a:pPr algn="r"/>
+                      <a:r>
+                        <a:rPr sz="750" b="0" i="0">
+                          <a:solidFill>
+                            <a:srgbClr val="000000"/>
+                          </a:solidFill>
+                          <a:latin typeface="Arial"/>
+                        </a:rPr>
+                        <a:t>7.7x</a:t>
+                      </a:r>
+                    </a:p>
+                  </a:txBody>
+                  <a:tcPr marL="36576" marR="36576" marT="9144" marB="9144" anchor="ctr">
+                    <a:solidFill>
+                      <a:srgbClr val="EDEDED"/>
+                    </a:solidFill>
+                    <a:lnL w="0">
+                      <a:noFill/>
+                    </a:lnL>
+                    <a:lnR w="0">
+                      <a:noFill/>
+                    </a:lnR>
+                    <a:lnT w="0">
+                      <a:noFill/>
+                    </a:lnT>
+                    <a:lnB w="0">
+                      <a:noFill/>
+                    </a:lnB>
+                  </a:tcPr>
+                </a:tc>
+                <a:tc>
+                  <a:txBody>
+                    <a:bodyPr wrap="none"/>
+                    <a:lstStyle/>
+                    <a:p>
+                      <a:pPr algn="r"/>
+                      <a:r>
+                        <a:rPr sz="750" b="0" i="0">
+                          <a:solidFill>
+                            <a:srgbClr val="000000"/>
+                          </a:solidFill>
+                          <a:latin typeface="Arial"/>
+                        </a:rPr>
+                        <a:t>7.9x</a:t>
+                      </a:r>
+                    </a:p>
+                  </a:txBody>
+                  <a:tcPr marL="36576" marR="36576" marT="9144" marB="9144" anchor="ctr">
+                    <a:solidFill>
+                      <a:srgbClr val="EDEDED"/>
+                    </a:solidFill>
+                    <a:lnL w="0">
+                      <a:noFill/>
+                    </a:lnL>
+                    <a:lnR w="0">
+                      <a:noFill/>
+                    </a:lnR>
+                    <a:lnT w="0">
+                      <a:noFill/>
+                    </a:lnT>
+                    <a:lnB w="0">
+                      <a:noFill/>
+                    </a:lnB>
+                  </a:tcPr>
+                </a:tc>
+                <a:tc>
+                  <a:txBody>
+                    <a:bodyPr wrap="none"/>
+                    <a:lstStyle/>
+                    <a:p>
+                      <a:pPr algn="r"/>
+                      <a:r>
+                        <a:rPr sz="750" b="0" i="0">
+                          <a:solidFill>
+                            <a:srgbClr val="000000"/>
+                          </a:solidFill>
+                          <a:latin typeface="Arial"/>
+                        </a:rPr>
+                        <a:t>+8%</a:t>
+                      </a:r>
+                    </a:p>
+                  </a:txBody>
+                  <a:tcPr marL="36576" marR="36576" marT="9144" marB="9144" anchor="ctr">
+                    <a:solidFill>
+                      <a:srgbClr val="EDEDED"/>
+                    </a:solidFill>
+                    <a:lnL w="0">
+                      <a:noFill/>
+                    </a:lnL>
+                    <a:lnR w="0">
+                      <a:noFill/>
+                    </a:lnR>
+                    <a:lnT w="0">
+                      <a:noFill/>
+                    </a:lnT>
+                    <a:lnB w="0">
+                      <a:noFill/>
+                    </a:lnB>
+                  </a:tcPr>
+                </a:tc>
+                <a:tc>
+                  <a:txBody>
+                    <a:bodyPr wrap="none"/>
+                    <a:lstStyle/>
+                    <a:p>
+                      <a:pPr algn="r"/>
+                      <a:r>
+                        <a:rPr sz="750" b="0" i="0">
+                          <a:solidFill>
+                            <a:srgbClr val="000000"/>
+                          </a:solidFill>
+                          <a:latin typeface="Arial"/>
+                        </a:rPr>
+                        <a:t>0.97</a:t>
+                      </a:r>
+                    </a:p>
+                  </a:txBody>
+                  <a:tcPr marL="36576" marR="36576" marT="9144" marB="9144" anchor="ctr">
+                    <a:solidFill>
+                      <a:srgbClr val="EDEDED"/>
+                    </a:solidFill>
+                    <a:lnL w="0">
+                      <a:noFill/>
+                    </a:lnL>
+                    <a:lnR w="0">
+                      <a:noFill/>
+                    </a:lnR>
+                    <a:lnT w="0">
+                      <a:noFill/>
+                    </a:lnT>
+                    <a:lnB w="0">
+                      <a:noFill/>
+                    </a:lnB>
+                  </a:tcPr>
+                </a:tc>
+                <a:tc>
+                  <a:txBody>
+                    <a:bodyPr wrap="none"/>
+                    <a:lstStyle/>
+                    <a:p>
+                      <a:pPr algn="r"/>
+                      <a:r>
+                        <a:rPr sz="750" b="0" i="0">
+                          <a:solidFill>
+                            <a:srgbClr val="000000"/>
+                          </a:solidFill>
+                          <a:latin typeface="Arial"/>
+                        </a:rPr>
+                        <a:t>10.8%</a:t>
+                      </a:r>
+                    </a:p>
+                  </a:txBody>
+                  <a:tcPr marL="36576" marR="36576" marT="9144" marB="9144" anchor="ctr">
+                    <a:solidFill>
+                      <a:srgbClr val="EDEDED"/>
+                    </a:solidFill>
+                    <a:lnL w="0">
+                      <a:noFill/>
+                    </a:lnL>
+                    <a:lnR w="0">
+                      <a:noFill/>
+                    </a:lnR>
+                    <a:lnT w="0">
+                      <a:noFill/>
+                    </a:lnT>
+                    <a:lnB w="0">
+                      <a:noFill/>
+                    </a:lnB>
+                  </a:tcPr>
+                </a:tc>
+                <a:tc>
+                  <a:txBody>
+                    <a:bodyPr wrap="none"/>
+                    <a:lstStyle/>
+                    <a:p>
+                      <a:pPr algn="r"/>
+                      <a:r>
+                        <a:rPr sz="750" b="0" i="0">
+                          <a:solidFill>
+                            <a:srgbClr val="000000"/>
+                          </a:solidFill>
+                          <a:latin typeface="Arial"/>
+                        </a:rPr>
+                        <a:t>3.2%</a:t>
+                      </a:r>
+                    </a:p>
+                  </a:txBody>
+                  <a:tcPr marL="36576" marR="36576" marT="9144" marB="9144" anchor="ctr">
+                    <a:solidFill>
+                      <a:srgbClr val="EDEDED"/>
+                    </a:solidFill>
+                    <a:lnL w="0">
+                      <a:noFill/>
+                    </a:lnL>
+                    <a:lnR w="0">
+                      <a:noFill/>
+                    </a:lnR>
+                    <a:lnT w="0">
+                      <a:noFill/>
+                    </a:lnT>
+                    <a:lnB w="0">
+                      <a:noFill/>
+                    </a:lnB>
+                  </a:tcPr>
+                </a:tc>
+              </a:tr>
+              <a:tr h="237744">
+                <a:tc>
+                  <a:txBody>
+                    <a:bodyPr wrap="none"/>
+                    <a:lstStyle/>
+                    <a:p>
+                      <a:pPr algn="l"/>
+                      <a:r>
+                        <a:rPr sz="750" b="0" i="0">
+                          <a:solidFill>
+                            <a:srgbClr val="000000"/>
+                          </a:solidFill>
+                          <a:latin typeface="Arial"/>
+                        </a:rPr>
+                        <a:t>Reply</a:t>
+                      </a:r>
+                    </a:p>
+                  </a:txBody>
+                  <a:tcPr marL="36576" marR="36576" marT="9144" marB="9144" anchor="ctr">
+                    <a:solidFill>
+                      <a:srgbClr val="FFFFFF"/>
+                    </a:solidFill>
+                    <a:lnL w="0">
+                      <a:noFill/>
+                    </a:lnL>
+                    <a:lnR w="0">
+                      <a:noFill/>
+                    </a:lnR>
+                    <a:lnT w="0">
+                      <a:noFill/>
+                    </a:lnT>
+                    <a:lnB w="0">
+                      <a:noFill/>
+                    </a:lnB>
+                  </a:tcPr>
+                </a:tc>
+                <a:tc>
+                  <a:txBody>
+                    <a:bodyPr wrap="none"/>
+                    <a:lstStyle/>
+                    <a:p>
+                      <a:pPr algn="r"/>
+                      <a:r>
+                        <a:rPr sz="750" b="0" i="0">
+                          <a:solidFill>
+                            <a:srgbClr val="000000"/>
+                          </a:solidFill>
+                          <a:latin typeface="Arial"/>
+                        </a:rPr>
+                        <a:t>1.3x</a:t>
+                      </a:r>
+                    </a:p>
+                  </a:txBody>
+                  <a:tcPr marL="36576" marR="36576" marT="9144" marB="9144" anchor="ctr">
+                    <a:solidFill>
+                      <a:srgbClr val="FFFFFF"/>
+                    </a:solidFill>
+                    <a:lnL w="0">
+                      <a:noFill/>
+                    </a:lnL>
+                    <a:lnR w="0">
+                      <a:noFill/>
+                    </a:lnR>
+                    <a:lnT w="0">
+                      <a:noFill/>
+                    </a:lnT>
+                    <a:lnB w="0">
+                      <a:noFill/>
+                    </a:lnB>
+                  </a:tcPr>
+                </a:tc>
+                <a:tc>
+                  <a:txBody>
+                    <a:bodyPr wrap="none"/>
+                    <a:lstStyle/>
+                    <a:p>
+                      <a:pPr algn="r"/>
+                      <a:r>
+                        <a:rPr sz="750" b="0" i="0">
+                          <a:solidFill>
+                            <a:srgbClr val="000000"/>
+                          </a:solidFill>
+                          <a:latin typeface="Arial"/>
+                        </a:rPr>
+                        <a:t>8.0x</a:t>
+                      </a:r>
+                    </a:p>
+                  </a:txBody>
+                  <a:tcPr marL="36576" marR="36576" marT="9144" marB="9144" anchor="ctr">
+                    <a:solidFill>
+                      <a:srgbClr val="FFFFFF"/>
+                    </a:solidFill>
+                    <a:lnL w="0">
+                      <a:noFill/>
+                    </a:lnL>
+                    <a:lnR w="0">
+                      <a:noFill/>
+                    </a:lnR>
+                    <a:lnT w="0">
+                      <a:noFill/>
+                    </a:lnT>
+                    <a:lnB w="0">
+                      <a:noFill/>
+                    </a:lnB>
+                  </a:tcPr>
+                </a:tc>
+                <a:tc>
+                  <a:txBody>
+                    <a:bodyPr wrap="none"/>
+                    <a:lstStyle/>
+                    <a:p>
+                      <a:pPr algn="r"/>
+                      <a:r>
+                        <a:rPr sz="750" b="0" i="0">
+                          <a:solidFill>
+                            <a:srgbClr val="000000"/>
+                          </a:solidFill>
+                          <a:latin typeface="Arial"/>
+                        </a:rPr>
+                        <a:t>15.4x</a:t>
+                      </a:r>
+                    </a:p>
+                  </a:txBody>
+                  <a:tcPr marL="36576" marR="36576" marT="9144" marB="9144" anchor="ctr">
+                    <a:solidFill>
+                      <a:srgbClr val="FFFFFF"/>
+                    </a:solidFill>
+                    <a:lnL w="0">
+                      <a:noFill/>
+                    </a:lnL>
+                    <a:lnR w="0">
+                      <a:noFill/>
+                    </a:lnR>
+                    <a:lnT w="0">
+                      <a:noFill/>
+                    </a:lnT>
+                    <a:lnB w="0">
+                      <a:noFill/>
+                    </a:lnB>
+                  </a:tcPr>
+                </a:tc>
+                <a:tc>
+                  <a:txBody>
+                    <a:bodyPr wrap="none"/>
+                    <a:lstStyle/>
+                    <a:p>
+                      <a:pPr algn="r"/>
+                      <a:r>
+                        <a:rPr sz="750" b="0" i="0">
+                          <a:solidFill>
+                            <a:srgbClr val="000000"/>
+                          </a:solidFill>
+                          <a:latin typeface="Arial"/>
+                        </a:rPr>
+                        <a:t>14.3x</a:t>
+                      </a:r>
+                    </a:p>
+                  </a:txBody>
+                  <a:tcPr marL="36576" marR="36576" marT="9144" marB="9144" anchor="ctr">
+                    <a:solidFill>
+                      <a:srgbClr val="FFFFFF"/>
+                    </a:solidFill>
+                    <a:lnL w="0">
+                      <a:noFill/>
+                    </a:lnL>
+                    <a:lnR w="0">
+                      <a:noFill/>
+                    </a:lnR>
+                    <a:lnT w="0">
+                      <a:noFill/>
+                    </a:lnT>
+                    <a:lnB w="0">
+                      <a:noFill/>
+                    </a:lnB>
+                  </a:tcPr>
+                </a:tc>
+                <a:tc>
+                  <a:txBody>
+                    <a:bodyPr wrap="none"/>
+                    <a:lstStyle/>
+                    <a:p>
+                      <a:pPr algn="r"/>
+                      <a:r>
+                        <a:rPr sz="750" b="0" i="0">
+                          <a:solidFill>
+                            <a:srgbClr val="000000"/>
+                          </a:solidFill>
+                          <a:latin typeface="Arial"/>
+                        </a:rPr>
+                        <a:t>14.6x</a:t>
+                      </a:r>
+                    </a:p>
+                  </a:txBody>
+                  <a:tcPr marL="36576" marR="36576" marT="9144" marB="9144" anchor="ctr">
+                    <a:solidFill>
+                      <a:srgbClr val="FFFFFF"/>
+                    </a:solidFill>
+                    <a:lnL w="0">
+                      <a:noFill/>
+                    </a:lnL>
+                    <a:lnR w="0">
+                      <a:noFill/>
+                    </a:lnR>
+                    <a:lnT w="0">
+                      <a:noFill/>
+                    </a:lnT>
+                    <a:lnB w="0">
+                      <a:noFill/>
+                    </a:lnB>
+                  </a:tcPr>
+                </a:tc>
+                <a:tc>
+                  <a:txBody>
+                    <a:bodyPr wrap="none"/>
+                    <a:lstStyle/>
+                    <a:p>
+                      <a:pPr algn="r"/>
+                      <a:r>
+                        <a:rPr sz="750" b="0" i="0">
+                          <a:solidFill>
+                            <a:srgbClr val="000000"/>
+                          </a:solidFill>
+                          <a:latin typeface="Arial"/>
+                        </a:rPr>
+                        <a:t>+8%</a:t>
+                      </a:r>
+                    </a:p>
+                  </a:txBody>
+                  <a:tcPr marL="36576" marR="36576" marT="9144" marB="9144" anchor="ctr">
+                    <a:solidFill>
+                      <a:srgbClr val="FFFFFF"/>
+                    </a:solidFill>
+                    <a:lnL w="0">
+                      <a:noFill/>
+                    </a:lnL>
+                    <a:lnR w="0">
+                      <a:noFill/>
+                    </a:lnR>
+                    <a:lnT w="0">
+                      <a:noFill/>
+                    </a:lnT>
+                    <a:lnB w="0">
+                      <a:noFill/>
+                    </a:lnB>
+                  </a:tcPr>
+                </a:tc>
+                <a:tc>
+                  <a:txBody>
+                    <a:bodyPr wrap="none"/>
+                    <a:lstStyle/>
+                    <a:p>
+                      <a:pPr algn="r"/>
+                      <a:r>
+                        <a:rPr sz="750" b="0" i="0">
+                          <a:solidFill>
+                            <a:srgbClr val="000000"/>
+                          </a:solidFill>
+                          <a:latin typeface="Arial"/>
+                        </a:rPr>
+                        <a:t>1.80</a:t>
+                      </a:r>
+                    </a:p>
+                  </a:txBody>
+                  <a:tcPr marL="36576" marR="36576" marT="9144" marB="9144" anchor="ctr">
+                    <a:solidFill>
+                      <a:srgbClr val="FFFFFF"/>
+                    </a:solidFill>
+                    <a:lnL w="0">
+                      <a:noFill/>
+                    </a:lnL>
+                    <a:lnR w="0">
+                      <a:noFill/>
+                    </a:lnR>
+                    <a:lnT w="0">
+                      <a:noFill/>
+                    </a:lnT>
+                    <a:lnB w="0">
+                      <a:noFill/>
+                    </a:lnB>
+                  </a:tcPr>
+                </a:tc>
+                <a:tc>
+                  <a:txBody>
+                    <a:bodyPr wrap="none"/>
+                    <a:lstStyle/>
+                    <a:p>
+                      <a:pPr algn="r"/>
+                      <a:r>
+                        <a:rPr sz="750" b="0" i="0">
+                          <a:solidFill>
+                            <a:srgbClr val="000000"/>
+                          </a:solidFill>
+                          <a:latin typeface="Arial"/>
+                        </a:rPr>
+                        <a:t>5.7%</a:t>
+                      </a:r>
+                    </a:p>
+                  </a:txBody>
+                  <a:tcPr marL="36576" marR="36576" marT="9144" marB="9144" anchor="ctr">
+                    <a:solidFill>
+                      <a:srgbClr val="FFFFFF"/>
+                    </a:solidFill>
+                    <a:lnL w="0">
+                      <a:noFill/>
+                    </a:lnL>
+                    <a:lnR w="0">
+                      <a:noFill/>
+                    </a:lnR>
+                    <a:lnT w="0">
+                      <a:noFill/>
+                    </a:lnT>
+                    <a:lnB w="0">
+                      <a:noFill/>
+                    </a:lnB>
+                  </a:tcPr>
+                </a:tc>
+                <a:tc>
+                  <a:txBody>
+                    <a:bodyPr wrap="none"/>
+                    <a:lstStyle/>
+                    <a:p>
+                      <a:pPr algn="r"/>
+                      <a:r>
+                        <a:rPr sz="750" b="0" i="0">
+                          <a:solidFill>
+                            <a:srgbClr val="000000"/>
+                          </a:solidFill>
+                          <a:latin typeface="Arial"/>
+                        </a:rPr>
+                        <a:t>1.1%</a:t>
+                      </a:r>
+                    </a:p>
+                  </a:txBody>
+                  <a:tcPr marL="36576" marR="36576" marT="9144" marB="9144" anchor="ctr">
+                    <a:solidFill>
+                      <a:srgbClr val="FFFFFF"/>
+                    </a:solidFill>
+                    <a:lnL w="0">
+                      <a:noFill/>
+                    </a:lnL>
+                    <a:lnR w="0">
+                      <a:noFill/>
+                    </a:lnR>
+                    <a:lnT w="0">
+                      <a:noFill/>
+                    </a:lnT>
+                    <a:lnB w="0">
+                      <a:noFill/>
+                    </a:lnB>
+                  </a:tcPr>
+                </a:tc>
+              </a:tr>
+              <a:tr h="237744">
+                <a:tc>
+                  <a:txBody>
+                    <a:bodyPr wrap="none"/>
+                    <a:lstStyle/>
+                    <a:p>
+                      <a:pPr algn="l"/>
+                      <a:r>
+                        <a:rPr sz="750" b="0" i="0">
+                          <a:solidFill>
+                            <a:srgbClr val="000000"/>
+                          </a:solidFill>
+                          <a:latin typeface="Arial"/>
+                        </a:rPr>
+                        <a:t>Accenture</a:t>
+                      </a:r>
+                    </a:p>
+                  </a:txBody>
+                  <a:tcPr marL="36576" marR="36576" marT="9144" marB="9144" anchor="ctr">
+                    <a:solidFill>
+                      <a:srgbClr val="EDEDED"/>
+                    </a:solidFill>
+                    <a:lnL w="0">
+                      <a:noFill/>
+                    </a:lnL>
+                    <a:lnR w="0">
+                      <a:noFill/>
+                    </a:lnR>
+                    <a:lnT w="0">
+                      <a:noFill/>
+                    </a:lnT>
+                    <a:lnB w="0">
+                      <a:noFill/>
+                    </a:lnB>
+                  </a:tcPr>
+                </a:tc>
+                <a:tc>
+                  <a:txBody>
+                    <a:bodyPr wrap="none"/>
+                    <a:lstStyle/>
+                    <a:p>
+                      <a:pPr algn="r"/>
+                      <a:r>
+                        <a:rPr sz="750" b="0" i="0">
+                          <a:solidFill>
+                            <a:srgbClr val="000000"/>
+                          </a:solidFill>
+                          <a:latin typeface="Arial"/>
+                        </a:rPr>
+                        <a:t>1.4x</a:t>
+                      </a:r>
+                    </a:p>
+                  </a:txBody>
+                  <a:tcPr marL="36576" marR="36576" marT="9144" marB="9144" anchor="ctr">
+                    <a:solidFill>
+                      <a:srgbClr val="EDEDED"/>
+                    </a:solidFill>
+                    <a:lnL w="0">
+                      <a:noFill/>
+                    </a:lnL>
+                    <a:lnR w="0">
+                      <a:noFill/>
+                    </a:lnR>
+                    <a:lnT w="0">
+                      <a:noFill/>
+                    </a:lnT>
+                    <a:lnB w="0">
+                      <a:noFill/>
+                    </a:lnB>
+                  </a:tcPr>
+                </a:tc>
+                <a:tc>
+                  <a:txBody>
+                    <a:bodyPr wrap="none"/>
+                    <a:lstStyle/>
+                    <a:p>
+                      <a:pPr algn="r"/>
+                      <a:r>
+                        <a:rPr sz="750" b="0" i="0">
+                          <a:solidFill>
+                            <a:srgbClr val="000000"/>
+                          </a:solidFill>
+                          <a:latin typeface="Arial"/>
+                        </a:rPr>
+                        <a:t>8.6x</a:t>
+                      </a:r>
+                    </a:p>
+                  </a:txBody>
+                  <a:tcPr marL="36576" marR="36576" marT="9144" marB="9144" anchor="ctr">
+                    <a:solidFill>
+                      <a:srgbClr val="EDEDED"/>
+                    </a:solidFill>
+                    <a:lnL w="0">
+                      <a:noFill/>
+                    </a:lnL>
+                    <a:lnR w="0">
+                      <a:noFill/>
+                    </a:lnR>
+                    <a:lnT w="0">
+                      <a:noFill/>
+                    </a:lnT>
+                    <a:lnB w="0">
+                      <a:noFill/>
+                    </a:lnB>
+                  </a:tcPr>
+                </a:tc>
+                <a:tc>
+                  <a:txBody>
+                    <a:bodyPr wrap="none"/>
+                    <a:lstStyle/>
+                    <a:p>
+                      <a:pPr algn="r"/>
+                      <a:r>
+                        <a:rPr sz="750" b="0" i="0">
+                          <a:solidFill>
+                            <a:srgbClr val="000000"/>
+                          </a:solidFill>
+                          <a:latin typeface="Arial"/>
+                        </a:rPr>
+                        <a:t>13.3x</a:t>
+                      </a:r>
+                    </a:p>
+                  </a:txBody>
+                  <a:tcPr marL="36576" marR="36576" marT="9144" marB="9144" anchor="ctr">
+                    <a:solidFill>
+                      <a:srgbClr val="EDEDED"/>
+                    </a:solidFill>
+                    <a:lnL w="0">
+                      <a:noFill/>
+                    </a:lnL>
+                    <a:lnR w="0">
+                      <a:noFill/>
+                    </a:lnR>
+                    <a:lnT w="0">
+                      <a:noFill/>
+                    </a:lnT>
+                    <a:lnB w="0">
+                      <a:noFill/>
+                    </a:lnB>
+                  </a:tcPr>
+                </a:tc>
+                <a:tc>
+                  <a:txBody>
+                    <a:bodyPr wrap="none"/>
+                    <a:lstStyle/>
+                    <a:p>
+                      <a:pPr algn="r"/>
+                      <a:r>
+                        <a:rPr sz="750" b="0" i="0">
+                          <a:solidFill>
+                            <a:srgbClr val="000000"/>
+                          </a:solidFill>
+                          <a:latin typeface="Arial"/>
+                        </a:rPr>
+                        <a:t>12.6x</a:t>
+                      </a:r>
+                    </a:p>
+                  </a:txBody>
+                  <a:tcPr marL="36576" marR="36576" marT="9144" marB="9144" anchor="ctr">
+                    <a:solidFill>
+                      <a:srgbClr val="EDEDED"/>
+                    </a:solidFill>
+                    <a:lnL w="0">
+                      <a:noFill/>
+                    </a:lnL>
+                    <a:lnR w="0">
+                      <a:noFill/>
+                    </a:lnR>
+                    <a:lnT w="0">
+                      <a:noFill/>
+                    </a:lnT>
+                    <a:lnB w="0">
+                      <a:noFill/>
+                    </a:lnB>
+                  </a:tcPr>
+                </a:tc>
+                <a:tc>
+                  <a:txBody>
+                    <a:bodyPr wrap="none"/>
+                    <a:lstStyle/>
+                    <a:p>
+                      <a:pPr algn="r"/>
+                      <a:r>
+                        <a:rPr sz="750" b="0" i="0">
+                          <a:solidFill>
+                            <a:srgbClr val="000000"/>
+                          </a:solidFill>
+                          <a:latin typeface="Arial"/>
+                        </a:rPr>
+                        <a:t>12.6x</a:t>
+                      </a:r>
+                    </a:p>
+                  </a:txBody>
+                  <a:tcPr marL="36576" marR="36576" marT="9144" marB="9144" anchor="ctr">
+                    <a:solidFill>
+                      <a:srgbClr val="EDEDED"/>
+                    </a:solidFill>
+                    <a:lnL w="0">
+                      <a:noFill/>
+                    </a:lnL>
+                    <a:lnR w="0">
+                      <a:noFill/>
+                    </a:lnR>
+                    <a:lnT w="0">
+                      <a:noFill/>
+                    </a:lnT>
+                    <a:lnB w="0">
+                      <a:noFill/>
+                    </a:lnB>
+                  </a:tcPr>
+                </a:tc>
+                <a:tc>
+                  <a:txBody>
+                    <a:bodyPr wrap="none"/>
+                    <a:lstStyle/>
+                    <a:p>
+                      <a:pPr algn="r"/>
+                      <a:r>
+                        <a:rPr sz="750" b="0" i="0">
+                          <a:solidFill>
+                            <a:srgbClr val="000000"/>
+                          </a:solidFill>
+                          <a:latin typeface="Arial"/>
+                        </a:rPr>
+                        <a:t>+6%</a:t>
+                      </a:r>
+                    </a:p>
+                  </a:txBody>
+                  <a:tcPr marL="36576" marR="36576" marT="9144" marB="9144" anchor="ctr">
+                    <a:solidFill>
+                      <a:srgbClr val="EDEDED"/>
+                    </a:solidFill>
+                    <a:lnL w="0">
+                      <a:noFill/>
+                    </a:lnL>
+                    <a:lnR w="0">
+                      <a:noFill/>
+                    </a:lnR>
+                    <a:lnT w="0">
+                      <a:noFill/>
+                    </a:lnT>
+                    <a:lnB w="0">
+                      <a:noFill/>
+                    </a:lnB>
+                  </a:tcPr>
+                </a:tc>
+                <a:tc>
+                  <a:txBody>
+                    <a:bodyPr wrap="none"/>
+                    <a:lstStyle/>
+                    <a:p>
+                      <a:pPr algn="r"/>
+                      <a:r>
+                        <a:rPr sz="750" b="0" i="0">
+                          <a:solidFill>
+                            <a:srgbClr val="000000"/>
+                          </a:solidFill>
+                          <a:latin typeface="Arial"/>
+                        </a:rPr>
+                        <a:t>2.16</a:t>
+                      </a:r>
+                    </a:p>
+                  </a:txBody>
+                  <a:tcPr marL="36576" marR="36576" marT="9144" marB="9144" anchor="ctr">
+                    <a:solidFill>
+                      <a:srgbClr val="EDEDED"/>
+                    </a:solidFill>
+                    <a:lnL w="0">
+                      <a:noFill/>
+                    </a:lnL>
+                    <a:lnR w="0">
+                      <a:noFill/>
+                    </a:lnR>
+                    <a:lnT w="0">
+                      <a:noFill/>
+                    </a:lnT>
+                    <a:lnB w="0">
+                      <a:noFill/>
+                    </a:lnB>
+                  </a:tcPr>
+                </a:tc>
+                <a:tc>
+                  <a:txBody>
+                    <a:bodyPr wrap="none"/>
+                    <a:lstStyle/>
+                    <a:p>
+                      <a:pPr algn="r"/>
+                      <a:r>
+                        <a:rPr sz="750" b="0" i="0">
+                          <a:solidFill>
+                            <a:srgbClr val="000000"/>
+                          </a:solidFill>
+                          <a:latin typeface="Arial"/>
+                        </a:rPr>
+                        <a:t>9.6%</a:t>
+                      </a:r>
+                    </a:p>
+                  </a:txBody>
+                  <a:tcPr marL="36576" marR="36576" marT="9144" marB="9144" anchor="ctr">
+                    <a:solidFill>
+                      <a:srgbClr val="EDEDED"/>
+                    </a:solidFill>
+                    <a:lnL w="0">
+                      <a:noFill/>
+                    </a:lnL>
+                    <a:lnR w="0">
+                      <a:noFill/>
+                    </a:lnR>
+                    <a:lnT w="0">
+                      <a:noFill/>
+                    </a:lnT>
+                    <a:lnB w="0">
+                      <a:noFill/>
+                    </a:lnB>
+                  </a:tcPr>
+                </a:tc>
+                <a:tc>
+                  <a:txBody>
+                    <a:bodyPr wrap="none"/>
+                    <a:lstStyle/>
+                    <a:p>
+                      <a:pPr algn="r"/>
+                      <a:r>
+                        <a:rPr sz="750" b="0" i="0">
+                          <a:solidFill>
+                            <a:srgbClr val="000000"/>
+                          </a:solidFill>
+                          <a:latin typeface="Arial"/>
+                        </a:rPr>
+                        <a:t>3.5%</a:t>
+                      </a:r>
+                    </a:p>
+                  </a:txBody>
+                  <a:tcPr marL="36576" marR="36576" marT="9144" marB="9144" anchor="ctr">
+                    <a:solidFill>
+                      <a:srgbClr val="EDEDED"/>
+                    </a:solidFill>
+                    <a:lnL w="0">
+                      <a:noFill/>
+                    </a:lnL>
+                    <a:lnR w="0">
+                      <a:noFill/>
+                    </a:lnR>
+                    <a:lnT w="0">
+                      <a:noFill/>
+                    </a:lnT>
+                    <a:lnB w="0">
+                      <a:noFill/>
+                    </a:lnB>
+                  </a:tcPr>
+                </a:tc>
+              </a:tr>
+              <a:tr h="237744">
+                <a:tc>
+                  <a:txBody>
+                    <a:bodyPr wrap="none"/>
+                    <a:lstStyle/>
+                    <a:p>
+                      <a:pPr algn="l"/>
+                      <a:r>
+                        <a:rPr sz="750" b="1" i="0">
+                          <a:solidFill>
+                            <a:srgbClr val="000000"/>
+                          </a:solidFill>
+                          <a:latin typeface="Arial"/>
+                        </a:rPr>
+                        <a:t>Peer median</a:t>
+                      </a:r>
+                    </a:p>
+                  </a:txBody>
+                  <a:tcPr marL="36576" marR="36576" marT="9144" marB="9144" anchor="ctr">
+                    <a:solidFill>
+                      <a:srgbClr val="FFFFFF"/>
+                    </a:solidFill>
+                    <a:lnL w="0">
+                      <a:noFill/>
+                    </a:lnL>
+                    <a:lnR w="0">
+                      <a:noFill/>
+                    </a:lnR>
+                    <a:lnT w="0">
+                      <a:noFill/>
+                    </a:lnT>
+                    <a:lnB w="6350">
+                      <a:solidFill>
+                        <a:srgbClr val="BFC5CA"/>
+                      </a:solidFill>
+                    </a:lnB>
+                  </a:tcPr>
+                </a:tc>
+                <a:tc>
+                  <a:txBody>
+                    <a:bodyPr wrap="none"/>
+                    <a:lstStyle/>
+                    <a:p>
+                      <a:pPr algn="r"/>
+                      <a:r>
+                        <a:rPr sz="750" b="1" i="0">
+                          <a:solidFill>
+                            <a:srgbClr val="000000"/>
+                          </a:solidFill>
+                          <a:latin typeface="Arial"/>
+                        </a:rPr>
+                        <a:t>1.2x</a:t>
+                      </a:r>
+                    </a:p>
+                  </a:txBody>
+                  <a:tcPr marL="36576" marR="36576" marT="9144" marB="9144" anchor="ctr">
+                    <a:solidFill>
+                      <a:srgbClr val="FFFFFF"/>
+                    </a:solidFill>
+                    <a:lnL w="0">
+                      <a:noFill/>
+                    </a:lnL>
+                    <a:lnR w="0">
+                      <a:noFill/>
+                    </a:lnR>
+                    <a:lnT w="0">
+                      <a:noFill/>
+                    </a:lnT>
+                    <a:lnB w="6350">
+                      <a:solidFill>
+                        <a:srgbClr val="BFC5CA"/>
+                      </a:solidFill>
+                    </a:lnB>
+                  </a:tcPr>
+                </a:tc>
+                <a:tc>
+                  <a:txBody>
+                    <a:bodyPr wrap="none"/>
+                    <a:lstStyle/>
+                    <a:p>
+                      <a:pPr algn="r"/>
+                      <a:r>
+                        <a:rPr sz="750" b="1" i="0">
+                          <a:solidFill>
+                            <a:srgbClr val="000000"/>
+                          </a:solidFill>
+                          <a:latin typeface="Arial"/>
+                        </a:rPr>
+                        <a:t>8.0x</a:t>
+                      </a:r>
+                    </a:p>
+                  </a:txBody>
+                  <a:tcPr marL="36576" marR="36576" marT="9144" marB="9144" anchor="ctr">
+                    <a:solidFill>
+                      <a:srgbClr val="FFFFFF"/>
+                    </a:solidFill>
+                    <a:lnL w="0">
+                      <a:noFill/>
+                    </a:lnL>
+                    <a:lnR w="0">
+                      <a:noFill/>
+                    </a:lnR>
+                    <a:lnT w="0">
+                      <a:noFill/>
+                    </a:lnT>
+                    <a:lnB w="6350">
+                      <a:solidFill>
+                        <a:srgbClr val="BFC5CA"/>
+                      </a:solidFill>
+                    </a:lnB>
+                  </a:tcPr>
+                </a:tc>
+                <a:tc>
+                  <a:txBody>
+                    <a:bodyPr wrap="none"/>
+                    <a:lstStyle/>
+                    <a:p>
+                      <a:pPr algn="r"/>
+                      <a:r>
+                        <a:rPr sz="750" b="1" i="0">
+                          <a:solidFill>
+                            <a:srgbClr val="000000"/>
+                          </a:solidFill>
+                          <a:latin typeface="Arial"/>
+                        </a:rPr>
+                        <a:t>14.1x</a:t>
+                      </a:r>
+                    </a:p>
+                  </a:txBody>
+                  <a:tcPr marL="36576" marR="36576" marT="9144" marB="9144" anchor="ctr">
+                    <a:solidFill>
+                      <a:srgbClr val="FFFFFF"/>
+                    </a:solidFill>
+                    <a:lnL w="0">
+                      <a:noFill/>
+                    </a:lnL>
+                    <a:lnR w="0">
+                      <a:noFill/>
+                    </a:lnR>
+                    <a:lnT w="0">
+                      <a:noFill/>
+                    </a:lnT>
+                    <a:lnB w="6350">
+                      <a:solidFill>
+                        <a:srgbClr val="BFC5CA"/>
+                      </a:solidFill>
+                    </a:lnB>
+                  </a:tcPr>
+                </a:tc>
+                <a:tc>
+                  <a:txBody>
+                    <a:bodyPr wrap="none"/>
+                    <a:lstStyle/>
+                    <a:p>
+                      <a:pPr algn="r"/>
+                      <a:r>
+                        <a:rPr sz="750" b="1" i="0">
+                          <a:solidFill>
+                            <a:srgbClr val="000000"/>
+                          </a:solidFill>
+                          <a:latin typeface="Arial"/>
+                        </a:rPr>
+                        <a:t>12.6x</a:t>
+                      </a:r>
+                    </a:p>
+                  </a:txBody>
+                  <a:tcPr marL="36576" marR="36576" marT="9144" marB="9144" anchor="ctr">
+                    <a:solidFill>
+                      <a:srgbClr val="FFFFFF"/>
+                    </a:solidFill>
+                    <a:lnL w="0">
+                      <a:noFill/>
+                    </a:lnL>
+                    <a:lnR w="0">
+                      <a:noFill/>
+                    </a:lnR>
+                    <a:lnT w="0">
+                      <a:noFill/>
+                    </a:lnT>
+                    <a:lnB w="6350">
+                      <a:solidFill>
+                        <a:srgbClr val="BFC5CA"/>
+                      </a:solidFill>
+                    </a:lnB>
+                  </a:tcPr>
+                </a:tc>
+                <a:tc>
+                  <a:txBody>
+                    <a:bodyPr wrap="none"/>
+                    <a:lstStyle/>
+                    <a:p>
+                      <a:pPr algn="r"/>
+                      <a:r>
+                        <a:rPr sz="750" b="1" i="0">
+                          <a:solidFill>
+                            <a:srgbClr val="000000"/>
+                          </a:solidFill>
+                          <a:latin typeface="Arial"/>
+                        </a:rPr>
+                        <a:t>12.9x</a:t>
+                      </a:r>
+                    </a:p>
+                  </a:txBody>
+                  <a:tcPr marL="36576" marR="36576" marT="9144" marB="9144" anchor="ctr">
+                    <a:solidFill>
+                      <a:srgbClr val="FFFFFF"/>
+                    </a:solidFill>
+                    <a:lnL w="0">
+                      <a:noFill/>
+                    </a:lnL>
+                    <a:lnR w="0">
+                      <a:noFill/>
+                    </a:lnR>
+                    <a:lnT w="0">
+                      <a:noFill/>
+                    </a:lnT>
+                    <a:lnB w="6350">
+                      <a:solidFill>
+                        <a:srgbClr val="BFC5CA"/>
+                      </a:solidFill>
+                    </a:lnB>
+                  </a:tcPr>
+                </a:tc>
+                <a:tc>
+                  <a:txBody>
+                    <a:bodyPr wrap="none"/>
+                    <a:lstStyle/>
+                    <a:p>
+                      <a:pPr algn="r"/>
+                      <a:r>
+                        <a:rPr sz="750" b="1" i="0">
+                          <a:solidFill>
+                            <a:srgbClr val="000000"/>
+                          </a:solidFill>
+                          <a:latin typeface="Arial"/>
+                        </a:rPr>
+                        <a:t>+9%</a:t>
+                      </a:r>
+                    </a:p>
+                  </a:txBody>
+                  <a:tcPr marL="36576" marR="36576" marT="9144" marB="9144" anchor="ctr">
+                    <a:solidFill>
+                      <a:srgbClr val="FFFFFF"/>
+                    </a:solidFill>
+                    <a:lnL w="0">
+                      <a:noFill/>
+                    </a:lnL>
+                    <a:lnR w="0">
+                      <a:noFill/>
+                    </a:lnR>
+                    <a:lnT w="0">
+                      <a:noFill/>
+                    </a:lnT>
+                    <a:lnB w="6350">
+                      <a:solidFill>
+                        <a:srgbClr val="BFC5CA"/>
+                      </a:solidFill>
+                    </a:lnB>
+                  </a:tcPr>
+                </a:tc>
+                <a:tc>
+                  <a:txBody>
+                    <a:bodyPr wrap="none"/>
+                    <a:lstStyle/>
+                    <a:p>
+                      <a:pPr algn="r"/>
+                      <a:r>
+                        <a:rPr sz="750" b="1" i="0">
+                          <a:solidFill>
+                            <a:srgbClr val="000000"/>
+                          </a:solidFill>
+                          <a:latin typeface="Arial"/>
+                        </a:rPr>
+                        <a:t>1.19</a:t>
+                      </a:r>
+                    </a:p>
+                  </a:txBody>
+                  <a:tcPr marL="36576" marR="36576" marT="9144" marB="9144" anchor="ctr">
+                    <a:solidFill>
+                      <a:srgbClr val="FFFFFF"/>
+                    </a:solidFill>
+                    <a:lnL w="0">
+                      <a:noFill/>
+                    </a:lnL>
+                    <a:lnR w="0">
+                      <a:noFill/>
+                    </a:lnR>
+                    <a:lnT w="0">
+                      <a:noFill/>
+                    </a:lnT>
+                    <a:lnB w="6350">
+                      <a:solidFill>
+                        <a:srgbClr val="BFC5CA"/>
+                      </a:solidFill>
+                    </a:lnB>
+                  </a:tcPr>
+                </a:tc>
+                <a:tc>
+                  <a:txBody>
+                    <a:bodyPr wrap="none"/>
+                    <a:lstStyle/>
+                    <a:p>
+                      <a:pPr algn="r"/>
+                      <a:r>
+                        <a:rPr sz="750" b="1" i="0">
+                          <a:solidFill>
+                            <a:srgbClr val="000000"/>
+                          </a:solidFill>
+                          <a:latin typeface="Arial"/>
+                        </a:rPr>
+                        <a:t>9.2%</a:t>
+                      </a:r>
+                    </a:p>
+                  </a:txBody>
+                  <a:tcPr marL="36576" marR="36576" marT="9144" marB="9144" anchor="ctr">
+                    <a:solidFill>
+                      <a:srgbClr val="FFFFFF"/>
+                    </a:solidFill>
+                    <a:lnL w="0">
+                      <a:noFill/>
+                    </a:lnL>
+                    <a:lnR w="0">
+                      <a:noFill/>
+                    </a:lnR>
+                    <a:lnT w="0">
+                      <a:noFill/>
+                    </a:lnT>
+                    <a:lnB w="6350">
+                      <a:solidFill>
+                        <a:srgbClr val="BFC5CA"/>
+                      </a:solidFill>
+                    </a:lnB>
+                  </a:tcPr>
+                </a:tc>
+                <a:tc>
+                  <a:txBody>
+                    <a:bodyPr wrap="none"/>
+                    <a:lstStyle/>
+                    <a:p>
+                      <a:pPr algn="r"/>
+                      <a:r>
+                        <a:rPr sz="750" b="1" i="0">
+                          <a:solidFill>
+                            <a:srgbClr val="000000"/>
+                          </a:solidFill>
+                          <a:latin typeface="Arial"/>
+                        </a:rPr>
+                        <a:t>3.3%</a:t>
+                      </a:r>
+                    </a:p>
+                  </a:txBody>
+                  <a:tcPr marL="36576" marR="36576" marT="9144" marB="9144" anchor="ctr">
+                    <a:solidFill>
+                      <a:srgbClr val="FFFFFF"/>
+                    </a:solidFill>
+                    <a:lnL w="0">
+                      <a:noFill/>
+                    </a:lnL>
+                    <a:lnR w="0">
+                      <a:noFill/>
+                    </a:lnR>
+                    <a:lnT w="0">
+                      <a:noFill/>
+                    </a:lnT>
+                    <a:lnB w="6350">
+                      <a:solidFill>
+                        <a:srgbClr val="BFC5CA"/>
+                      </a:solidFill>
+                    </a:lnB>
+                  </a:tcPr>
+                </a:tc>
+              </a:tr>
+              <a:tr h="237744">
+                <a:tc>
+                  <a:txBody>
+                    <a:bodyPr wrap="none"/>
+                    <a:lstStyle/>
+                    <a:p>
+                      <a:pPr algn="l"/>
+                      <a:r>
+                        <a:rPr sz="750" b="1" i="0">
+                          <a:solidFill>
+                            <a:srgbClr val="000000"/>
+                          </a:solidFill>
+                          <a:latin typeface="Arial"/>
+                        </a:rPr>
+                        <a:t>Bouvet</a:t>
+                      </a:r>
+                    </a:p>
+                  </a:txBody>
+                  <a:tcPr marL="36576" marR="36576" marT="9144" marB="9144" anchor="ctr">
+                    <a:solidFill>
+                      <a:srgbClr val="DCE6F0"/>
+                    </a:solidFill>
+                    <a:lnL w="0">
+                      <a:noFill/>
+                    </a:lnL>
+                    <a:lnR w="0">
+                      <a:noFill/>
+                    </a:lnR>
+                    <a:lnT w="0">
+                      <a:noFill/>
+                    </a:lnT>
+                    <a:lnB w="6350">
+                      <a:solidFill>
+                        <a:srgbClr val="BFC5CA"/>
+                      </a:solidFill>
+                    </a:lnB>
+                  </a:tcPr>
+                </a:tc>
+                <a:tc>
+                  <a:txBody>
+                    <a:bodyPr wrap="none"/>
+                    <a:lstStyle/>
+                    <a:p>
+                      <a:pPr algn="r"/>
+                      <a:r>
+                        <a:rPr sz="750" b="1" i="0">
+                          <a:solidFill>
+                            <a:srgbClr val="000000"/>
+                          </a:solidFill>
+                          <a:latin typeface="Arial"/>
+                        </a:rPr>
+                        <a:t>1.1x</a:t>
+                      </a:r>
+                    </a:p>
+                  </a:txBody>
+                  <a:tcPr marL="36576" marR="36576" marT="9144" marB="9144" anchor="ctr">
+                    <a:solidFill>
+                      <a:srgbClr val="DCE6F0"/>
+                    </a:solidFill>
+                    <a:lnL w="0">
+                      <a:noFill/>
+                    </a:lnL>
+                    <a:lnR w="0">
+                      <a:noFill/>
+                    </a:lnR>
+                    <a:lnT w="0">
+                      <a:noFill/>
+                    </a:lnT>
+                    <a:lnB w="6350">
+                      <a:solidFill>
+                        <a:srgbClr val="BFC5CA"/>
+                      </a:solidFill>
+                    </a:lnB>
+                  </a:tcPr>
+                </a:tc>
+                <a:tc>
+                  <a:txBody>
+                    <a:bodyPr wrap="none"/>
+                    <a:lstStyle/>
+                    <a:p>
+                      <a:pPr algn="r"/>
+                      <a:r>
+                        <a:rPr sz="750" b="1" i="0">
+                          <a:solidFill>
+                            <a:srgbClr val="000000"/>
+                          </a:solidFill>
+                          <a:latin typeface="Arial"/>
+                        </a:rPr>
+                        <a:t>8.8x</a:t>
+                      </a:r>
+                    </a:p>
+                  </a:txBody>
+                  <a:tcPr marL="36576" marR="36576" marT="9144" marB="9144" anchor="ctr">
+                    <a:solidFill>
+                      <a:srgbClr val="DCE6F0"/>
+                    </a:solidFill>
+                    <a:lnL w="0">
+                      <a:noFill/>
+                    </a:lnL>
+                    <a:lnR w="0">
+                      <a:noFill/>
+                    </a:lnR>
+                    <a:lnT w="0">
+                      <a:noFill/>
+                    </a:lnT>
+                    <a:lnB w="6350">
+                      <a:solidFill>
+                        <a:srgbClr val="BFC5CA"/>
+                      </a:solidFill>
+                    </a:lnB>
+                  </a:tcPr>
+                </a:tc>
+                <a:tc>
+                  <a:txBody>
+                    <a:bodyPr wrap="none"/>
+                    <a:lstStyle/>
+                    <a:p>
+                      <a:pPr algn="r"/>
+                      <a:r>
+                        <a:rPr sz="750" b="1" i="0">
+                          <a:solidFill>
+                            <a:srgbClr val="000000"/>
+                          </a:solidFill>
+                          <a:latin typeface="Arial"/>
+                        </a:rPr>
+                        <a:t>14.4x</a:t>
+                      </a:r>
+                    </a:p>
+                  </a:txBody>
+                  <a:tcPr marL="36576" marR="36576" marT="9144" marB="9144" anchor="ctr">
+                    <a:solidFill>
+                      <a:srgbClr val="DCE6F0"/>
+                    </a:solidFill>
+                    <a:lnL w="0">
+                      <a:noFill/>
+                    </a:lnL>
+                    <a:lnR w="0">
+                      <a:noFill/>
+                    </a:lnR>
+                    <a:lnT w="0">
+                      <a:noFill/>
+                    </a:lnT>
+                    <a:lnB w="6350">
+                      <a:solidFill>
+                        <a:srgbClr val="BFC5CA"/>
+                      </a:solidFill>
+                    </a:lnB>
+                  </a:tcPr>
+                </a:tc>
+                <a:tc>
+                  <a:txBody>
+                    <a:bodyPr wrap="none"/>
+                    <a:lstStyle/>
+                    <a:p>
+                      <a:pPr algn="r"/>
+                      <a:r>
+                        <a:rPr sz="750" b="1" i="0">
+                          <a:solidFill>
+                            <a:srgbClr val="000000"/>
+                          </a:solidFill>
+                          <a:latin typeface="Arial"/>
+                        </a:rPr>
+                        <a:t>12.9x</a:t>
+                      </a:r>
+                    </a:p>
+                  </a:txBody>
+                  <a:tcPr marL="36576" marR="36576" marT="9144" marB="9144" anchor="ctr">
+                    <a:solidFill>
+                      <a:srgbClr val="DCE6F0"/>
+                    </a:solidFill>
+                    <a:lnL w="0">
+                      <a:noFill/>
+                    </a:lnL>
+                    <a:lnR w="0">
+                      <a:noFill/>
+                    </a:lnR>
+                    <a:lnT w="0">
+                      <a:noFill/>
+                    </a:lnT>
+                    <a:lnB w="6350">
+                      <a:solidFill>
+                        <a:srgbClr val="BFC5CA"/>
+                      </a:solidFill>
+                    </a:lnB>
+                  </a:tcPr>
+                </a:tc>
+                <a:tc>
+                  <a:txBody>
+                    <a:bodyPr wrap="none"/>
+                    <a:lstStyle/>
+                    <a:p>
+                      <a:pPr algn="r"/>
+                      <a:r>
+                        <a:rPr sz="750" b="1" i="0">
+                          <a:solidFill>
+                            <a:srgbClr val="000000"/>
+                          </a:solidFill>
+                          <a:latin typeface="Arial"/>
+                        </a:rPr>
+                        <a:t>13.3x</a:t>
+                      </a:r>
+                    </a:p>
+                  </a:txBody>
+                  <a:tcPr marL="36576" marR="36576" marT="9144" marB="9144" anchor="ctr">
+                    <a:solidFill>
+                      <a:srgbClr val="DCE6F0"/>
+                    </a:solidFill>
+                    <a:lnL w="0">
+                      <a:noFill/>
+                    </a:lnL>
+                    <a:lnR w="0">
+                      <a:noFill/>
+                    </a:lnR>
+                    <a:lnT w="0">
+                      <a:noFill/>
+                    </a:lnT>
+                    <a:lnB w="6350">
+                      <a:solidFill>
+                        <a:srgbClr val="BFC5CA"/>
+                      </a:solidFill>
+                    </a:lnB>
+                  </a:tcPr>
+                </a:tc>
+                <a:tc>
+                  <a:txBody>
+                    <a:bodyPr wrap="none"/>
+                    <a:lstStyle/>
+                    <a:p>
+                      <a:pPr algn="r"/>
+                      <a:r>
+                        <a:rPr sz="750" b="1" i="0">
+                          <a:solidFill>
+                            <a:srgbClr val="000000"/>
+                          </a:solidFill>
+                          <a:latin typeface="Arial"/>
+                        </a:rPr>
+                        <a:t>+12%</a:t>
+                      </a:r>
+                    </a:p>
+                  </a:txBody>
+                  <a:tcPr marL="36576" marR="36576" marT="9144" marB="9144" anchor="ctr">
+                    <a:solidFill>
+                      <a:srgbClr val="DCE6F0"/>
+                    </a:solidFill>
+                    <a:lnL w="0">
+                      <a:noFill/>
+                    </a:lnL>
+                    <a:lnR w="0">
+                      <a:noFill/>
+                    </a:lnR>
+                    <a:lnT w="0">
+                      <a:noFill/>
+                    </a:lnT>
+                    <a:lnB w="6350">
+                      <a:solidFill>
+                        <a:srgbClr val="BFC5CA"/>
+                      </a:solidFill>
+                    </a:lnB>
+                  </a:tcPr>
+                </a:tc>
+                <a:tc>
+                  <a:txBody>
+                    <a:bodyPr wrap="none"/>
+                    <a:lstStyle/>
+                    <a:p>
+                      <a:pPr algn="r"/>
+                      <a:r>
+                        <a:rPr sz="750" b="1" i="0">
+                          <a:solidFill>
+                            <a:srgbClr val="000000"/>
+                          </a:solidFill>
+                          <a:latin typeface="Arial"/>
+                        </a:rPr>
+                        <a:t>1.16</a:t>
+                      </a:r>
+                    </a:p>
+                  </a:txBody>
+                  <a:tcPr marL="36576" marR="36576" marT="9144" marB="9144" anchor="ctr">
+                    <a:solidFill>
+                      <a:srgbClr val="DCE6F0"/>
+                    </a:solidFill>
+                    <a:lnL w="0">
+                      <a:noFill/>
+                    </a:lnL>
+                    <a:lnR w="0">
+                      <a:noFill/>
+                    </a:lnR>
+                    <a:lnT w="0">
+                      <a:noFill/>
+                    </a:lnT>
+                    <a:lnB w="6350">
+                      <a:solidFill>
+                        <a:srgbClr val="BFC5CA"/>
+                      </a:solidFill>
+                    </a:lnB>
+                  </a:tcPr>
+                </a:tc>
+                <a:tc>
+                  <a:txBody>
+                    <a:bodyPr wrap="none"/>
+                    <a:lstStyle/>
+                    <a:p>
+                      <a:pPr algn="r"/>
+                      <a:r>
+                        <a:rPr sz="750" b="1" i="0">
+                          <a:solidFill>
+                            <a:srgbClr val="000000"/>
+                          </a:solidFill>
+                          <a:latin typeface="Arial"/>
+                        </a:rPr>
+                        <a:t>5.4%</a:t>
+                      </a:r>
+                    </a:p>
+                  </a:txBody>
+                  <a:tcPr marL="36576" marR="36576" marT="9144" marB="9144" anchor="ctr">
+                    <a:solidFill>
+                      <a:srgbClr val="DCE6F0"/>
+                    </a:solidFill>
+                    <a:lnL w="0">
+                      <a:noFill/>
+                    </a:lnL>
+                    <a:lnR w="0">
+                      <a:noFill/>
+                    </a:lnR>
+                    <a:lnT w="0">
+                      <a:noFill/>
+                    </a:lnT>
+                    <a:lnB w="6350">
+                      <a:solidFill>
+                        <a:srgbClr val="BFC5CA"/>
+                      </a:solidFill>
+                    </a:lnB>
+                  </a:tcPr>
+                </a:tc>
+                <a:tc>
+                  <a:txBody>
+                    <a:bodyPr wrap="none"/>
+                    <a:lstStyle/>
+                    <a:p>
+                      <a:pPr algn="r"/>
+                      <a:r>
+                        <a:rPr sz="750" b="1" i="0">
+                          <a:solidFill>
+                            <a:srgbClr val="000000"/>
+                          </a:solidFill>
+                          <a:latin typeface="Arial"/>
+                        </a:rPr>
+                        <a:t>6.3%</a:t>
+                      </a:r>
+                    </a:p>
+                  </a:txBody>
+                  <a:tcPr marL="36576" marR="36576" marT="9144" marB="9144" anchor="ctr">
+                    <a:solidFill>
+                      <a:srgbClr val="DCE6F0"/>
+                    </a:solidFill>
+                    <a:lnL w="0">
+                      <a:noFill/>
+                    </a:lnL>
+                    <a:lnR w="0">
+                      <a:noFill/>
+                    </a:lnR>
+                    <a:lnT w="0">
+                      <a:noFill/>
+                    </a:lnT>
+                    <a:lnB w="6350">
+                      <a:solidFill>
+                        <a:srgbClr val="BFC5CA"/>
+                      </a:solidFill>
+                    </a:lnB>
+                  </a:tcPr>
+                </a:tc>
+              </a:tr>
+            </a:tbl>
+          </a:graphicData>
+        </a:graphic>
+      </p:graphicFrame>
+      <p:sp>
+        <p:nvSpPr>
+          <p:cNvPr id="19" name="TextBox 18"/>
+          <p:cNvSpPr txBox="1"/>
+          <p:nvPr/>
+        </p:nvSpPr>
+        <p:spPr>
+          <a:xfrm>
+            <a:off x="5550407" y="4288536"/>
+            <a:ext cx="6211519" cy="1938527"/>
+          </a:xfrm>
+          <a:prstGeom prst="rect">
+            <a:avLst/>
+          </a:prstGeom>
+          <a:noFill/>
+        </p:spPr>
+        <p:txBody>
+          <a:bodyPr wrap="square" anchor="t" lIns="27432" rIns="27432" tIns="27432" bIns="27432">
+            <a:spAutoFit/>
+          </a:bodyPr>
+          <a:lstStyle/>
+          <a:p>
+            <a:pPr algn="l">
+              <a:lnSpc>
+                <a:spcPct val="110000"/>
+              </a:lnSpc>
+            </a:pPr>
+            <a:r>
+              <a:rPr sz="680" b="0" i="1">
+                <a:solidFill>
+                  <a:srgbClr val="4A4A4A"/>
+                </a:solidFill>
+                <a:latin typeface="Arial"/>
+              </a:rPr>
+              <a:t>* NTM revenue at the LTM EBITDA margin: Yahoo Finance carries no EBITDA consensus. FY0 = fiscal year in progress; NTM = 27% of FY to 2026-12 + the rest of the following year. EV in each company's reporting currency (market cap converted from the listing currency) with the latest net debt; FCF yield is levered, after lease payments; n.m. = negative or above the cap.</a:t>
+            </a:r>
+          </a:p>
+        </p:txBody>
+      </p:sp>
+      <p:cxnSp>
+        <p:nvCxnSpPr>
+          <p:cNvPr id="20" name="Connector 19"/>
+          <p:cNvCxnSpPr/>
+          <p:nvPr/>
+        </p:nvCxnSpPr>
+        <p:spPr>
+          <a:xfrm>
+            <a:off x="429768" y="6336792"/>
+            <a:ext cx="10024567" cy="0"/>
+          </a:xfrm>
+          <a:prstGeom prst="line">
+            <a:avLst/>
+          </a:prstGeom>
+          <a:ln w="9525">
+            <a:solidFill>
+              <a:srgbClr val="003255"/>
+            </a:solidFill>
+          </a:ln>
+        </p:spPr>
+        <p:style>
+          <a:lnRef idx="2">
+            <a:schemeClr val="accent1"/>
+          </a:lnRef>
+          <a:fillRef idx="0">
+            <a:schemeClr val="accent1"/>
+          </a:fillRef>
+          <a:effectRef idx="1">
+            <a:schemeClr val="accent1"/>
+          </a:effectRef>
+          <a:fontRef idx="minor">
+            <a:schemeClr val="tx1"/>
+          </a:fontRef>
+        </p:style>
+      </p:cxnSp>
+      <p:sp>
+        <p:nvSpPr>
+          <p:cNvPr id="21" name="TextBox 20"/>
+          <p:cNvSpPr txBox="1"/>
+          <p:nvPr/>
+        </p:nvSpPr>
+        <p:spPr>
+          <a:xfrm>
+            <a:off x="429768" y="6355079"/>
+            <a:ext cx="9905695" cy="310896"/>
+          </a:xfrm>
+          <a:prstGeom prst="rect">
+            <a:avLst/>
+          </a:prstGeom>
+          <a:noFill/>
+        </p:spPr>
+        <p:txBody>
+          <a:bodyPr wrap="square" anchor="t" lIns="0" rIns="0" tIns="0" bIns="0">
+            <a:spAutoFit/>
+          </a:bodyPr>
+          <a:lstStyle/>
+          <a:p>
+            <a:pPr algn="l"/>
+            <a:r>
+              <a:rPr sz="650" b="0" i="1">
+                <a:solidFill>
+                  <a:srgbClr val="4A4A4A"/>
+                </a:solidFill>
+                <a:latin typeface="Arial"/>
+              </a:rPr>
+              <a:t>Sources: Company reports, Yahoo Finance, Equity Research Engine estimates; consensus: Yahoo Finance mean estimates; regression: OLS with an intercept over the peers shown</a:t>
+            </a:r>
+          </a:p>
+          <a:p>
+            <a:pPr algn="l"/>
+            <a:r>
+              <a:rPr sz="650" b="0" i="1">
+                <a:solidFill>
+                  <a:srgbClr val="4A4A4A"/>
+                </a:solidFill>
+                <a:latin typeface="Arial"/>
+              </a:rPr>
+              <a:t>For illustration only — not investment advice</a:t>
+            </a:r>
+          </a:p>
+        </p:txBody>
+      </p:sp>
+      <p:cxnSp>
+        <p:nvCxnSpPr>
+          <p:cNvPr id="22" name="Connector 21"/>
+          <p:cNvCxnSpPr/>
+          <p:nvPr/>
+        </p:nvCxnSpPr>
+        <p:spPr>
+          <a:xfrm>
+            <a:off x="10591495" y="6336792"/>
+            <a:ext cx="1170432" cy="0"/>
+          </a:xfrm>
+          <a:prstGeom prst="line">
+            <a:avLst/>
+          </a:prstGeom>
+          <a:ln w="9525">
+            <a:solidFill>
+              <a:srgbClr val="003255"/>
+            </a:solidFill>
+          </a:ln>
+        </p:spPr>
+        <p:style>
+          <a:lnRef idx="2">
+            <a:schemeClr val="accent1"/>
+          </a:lnRef>
+          <a:fillRef idx="0">
+            <a:schemeClr val="accent1"/>
+          </a:fillRef>
+          <a:effectRef idx="1">
+            <a:schemeClr val="accent1"/>
+          </a:effectRef>
+          <a:fontRef idx="minor">
+            <a:schemeClr val="tx1"/>
+          </a:fontRef>
+        </p:style>
+      </p:cxnSp>
+      <p:sp>
+        <p:nvSpPr>
+          <p:cNvPr id="23" name="TextBox 22"/>
+          <p:cNvSpPr txBox="1"/>
+          <p:nvPr/>
+        </p:nvSpPr>
+        <p:spPr>
+          <a:xfrm>
+            <a:off x="10591495" y="6373368"/>
+            <a:ext cx="914400" cy="274320"/>
+          </a:xfrm>
+          <a:prstGeom prst="rect">
+            <a:avLst/>
+          </a:prstGeom>
+          <a:noFill/>
+        </p:spPr>
+        <p:txBody>
+          <a:bodyPr wrap="square" anchor="t" lIns="0" rIns="0" tIns="0" bIns="0">
+            <a:spAutoFit/>
+          </a:bodyPr>
+          <a:lstStyle/>
+          <a:p>
+            <a:pPr algn="l"/>
+            <a:r>
+              <a:rPr sz="750" b="1" i="0">
+                <a:solidFill>
+                  <a:srgbClr val="003255"/>
+                </a:solidFill>
+                <a:latin typeface="Cambria"/>
+              </a:rPr>
+              <a:t>Equity Research Engine</a:t>
+            </a:r>
+          </a:p>
+        </p:txBody>
+      </p:sp>
+      <p:sp>
+        <p:nvSpPr>
+          <p:cNvPr id="24" name="TextBox 23"/>
+          <p:cNvSpPr txBox="1"/>
+          <p:nvPr/>
+        </p:nvSpPr>
+        <p:spPr>
+          <a:xfrm>
+            <a:off x="11533327" y="6373368"/>
+            <a:ext cx="228600" cy="274320"/>
+          </a:xfrm>
+          <a:prstGeom prst="rect">
+            <a:avLst/>
+          </a:prstGeom>
+          <a:noFill/>
+        </p:spPr>
+        <p:txBody>
+          <a:bodyPr wrap="square" anchor="t" lIns="0" rIns="0" tIns="0" bIns="0">
+            <a:spAutoFit/>
+          </a:bodyPr>
+          <a:lstStyle/>
+          <a:p>
+            <a:pPr algn="r"/>
+            <a:r>
+              <a:rPr sz="800" b="0" i="0">
+                <a:solidFill>
+                  <a:srgbClr val="003255"/>
+                </a:solidFill>
+                <a:latin typeface="Arial"/>
+              </a:rPr>
+              <a:t>12</a:t>
             </a:r>
           </a:p>
         </p:txBody>
@@ -5086,7 +12337,7 @@
                 </a:solidFill>
                 <a:latin typeface="Arial"/>
               </a:rPr>
-              <a:t>8.2% revenue CAGR, 13.4% EBITDA margin and a net cash balance sheet — market cap NOK 4.8bn</a:t>
+              <a:t>8.2% revenue CAGR, 13.4% EBITDA margin and a net cash balance sheet — market cap NOK 4.9bn</a:t>
             </a:r>
           </a:p>
         </p:txBody>
@@ -5399,7 +12650,7 @@
                 </a:solidFill>
                 <a:latin typeface="Arial"/>
               </a:rPr>
-              <a:t> NOK 4,847m | EV NOK 4,267m</a:t>
+              <a:t> NOK 4,852m | EV NOK 4,692m</a:t>
             </a:r>
           </a:p>
           <a:p>
@@ -5424,7 +12675,7 @@
                 </a:solidFill>
                 <a:latin typeface="Arial"/>
               </a:rPr>
-              <a:t> NOK 47.35 | 52w range 42.1–67.8</a:t>
+              <a:t> NOK 47.40 | 52w range 42.1–67.0</a:t>
             </a:r>
           </a:p>
         </p:txBody>
@@ -5744,7 +12995,7 @@
                 </a:solidFill>
                 <a:latin typeface="Arial"/>
               </a:rPr>
-              <a:t> net cash of NOK 580m, no financial leverage</a:t>
+              <a:t> net cash of NOK 160m, no financial leverage</a:t>
             </a:r>
           </a:p>
         </p:txBody>
@@ -16049,7 +23300,7 @@
                           </a:solidFill>
                           <a:latin typeface="Arial"/>
                         </a:rPr>
-                        <a:t>1.1x</a:t>
+                        <a:t>1.2x</a:t>
                       </a:r>
                     </a:p>
                   </a:txBody>
@@ -16086,7 +23337,7 @@
                           </a:solidFill>
                           <a:latin typeface="Arial"/>
                         </a:rPr>
-                        <a:t>1.1x</a:t>
+                        <a:t>1.2x</a:t>
                       </a:r>
                     </a:p>
                   </a:txBody>
@@ -16123,7 +23374,7 @@
                           </a:solidFill>
                           <a:latin typeface="Arial"/>
                         </a:rPr>
-                        <a:t>1.0x</a:t>
+                        <a:t>1.1x</a:t>
                       </a:r>
                     </a:p>
                   </a:txBody>
@@ -16160,7 +23411,7 @@
                           </a:solidFill>
                           <a:latin typeface="Arial"/>
                         </a:rPr>
-                        <a:t>0.9x</a:t>
+                        <a:t>1.0x</a:t>
                       </a:r>
                     </a:p>
                   </a:txBody>
@@ -16234,6 +23485,76 @@
                           </a:solidFill>
                           <a:latin typeface="Arial"/>
                         </a:rPr>
+                        <a:t>8.9x</a:t>
+                      </a:r>
+                    </a:p>
+                  </a:txBody>
+                  <a:tcPr marL="36576" marR="36576" marT="9144" marB="9144" anchor="ctr">
+                    <a:solidFill>
+                      <a:srgbClr val="FFFFFF"/>
+                    </a:solidFill>
+                    <a:lnL w="0">
+                      <a:noFill/>
+                    </a:lnL>
+                    <a:lnR w="0">
+                      <a:noFill/>
+                    </a:lnR>
+                    <a:lnT w="0">
+                      <a:noFill/>
+                    </a:lnT>
+                    <a:lnB w="0">
+                      <a:noFill/>
+                    </a:lnB>
+                  </a:tcPr>
+                </a:tc>
+                <a:tc>
+                  <a:txBody>
+                    <a:bodyPr wrap="none"/>
+                    <a:lstStyle/>
+                    <a:p>
+                      <a:pPr algn="r"/>
+                      <a:r>
+                        <a:rPr sz="700" b="0" i="0">
+                          <a:solidFill>
+                            <a:srgbClr val="000000"/>
+                          </a:solidFill>
+                          <a:latin typeface="Arial"/>
+                        </a:rPr>
+                        <a:t>8.8x</a:t>
+                      </a:r>
+                    </a:p>
+                  </a:txBody>
+                  <a:tcPr marL="36576" marR="36576" marT="9144" marB="9144" anchor="ctr">
+                    <a:solidFill>
+                      <a:srgbClr val="FFFFFF"/>
+                    </a:solidFill>
+                    <a:lnL w="0">
+                      <a:noFill/>
+                    </a:lnL>
+                    <a:lnR w="0">
+                      <a:noFill/>
+                    </a:lnR>
+                    <a:lnT w="0">
+                      <a:noFill/>
+                    </a:lnT>
+                    <a:lnB w="0">
+                      <a:noFill/>
+                    </a:lnB>
+                  </a:tcPr>
+                </a:tc>
+                <a:tc>
+                  <a:txBody>
+                    <a:bodyPr wrap="none"/>
+                    <a:lstStyle/>
+                    <a:p>
+                      <a:pPr algn="r"/>
+                      <a:r>
+                        <a:rPr sz="700" b="0" i="0">
+                          <a:solidFill>
+                            <a:srgbClr val="000000"/>
+                          </a:solidFill>
+                          <a:latin typeface="Arial"/>
+                        </a:rPr>
                         <a:t>8.1x</a:t>
                       </a:r>
                     </a:p>
@@ -16269,77 +23590,7 @@
                           </a:solidFill>
                           <a:latin typeface="Arial"/>
                         </a:rPr>
-                        <a:t>8.0x</a:t>
-                      </a:r>
-                    </a:p>
-                  </a:txBody>
-                  <a:tcPr marL="36576" marR="36576" marT="9144" marB="9144" anchor="ctr">
-                    <a:solidFill>
-                      <a:srgbClr val="FFFFFF"/>
-                    </a:solidFill>
-                    <a:lnL w="0">
-                      <a:noFill/>
-                    </a:lnL>
-                    <a:lnR w="0">
-                      <a:noFill/>
-                    </a:lnR>
-                    <a:lnT w="0">
-                      <a:noFill/>
-                    </a:lnT>
-                    <a:lnB w="0">
-                      <a:noFill/>
-                    </a:lnB>
-                  </a:tcPr>
-                </a:tc>
-                <a:tc>
-                  <a:txBody>
-                    <a:bodyPr wrap="none"/>
-                    <a:lstStyle/>
-                    <a:p>
-                      <a:pPr algn="r"/>
-                      <a:r>
-                        <a:rPr sz="700" b="0" i="0">
-                          <a:solidFill>
-                            <a:srgbClr val="000000"/>
-                          </a:solidFill>
-                          <a:latin typeface="Arial"/>
-                        </a:rPr>
-                        <a:t>7.4x</a:t>
-                      </a:r>
-                    </a:p>
-                  </a:txBody>
-                  <a:tcPr marL="36576" marR="36576" marT="9144" marB="9144" anchor="ctr">
-                    <a:solidFill>
-                      <a:srgbClr val="FFFFFF"/>
-                    </a:solidFill>
-                    <a:lnL w="0">
-                      <a:noFill/>
-                    </a:lnL>
-                    <a:lnR w="0">
-                      <a:noFill/>
-                    </a:lnR>
-                    <a:lnT w="0">
-                      <a:noFill/>
-                    </a:lnT>
-                    <a:lnB w="0">
-                      <a:noFill/>
-                    </a:lnB>
-                  </a:tcPr>
-                </a:tc>
-                <a:tc>
-                  <a:txBody>
-                    <a:bodyPr wrap="none"/>
-                    <a:lstStyle/>
-                    <a:p>
-                      <a:pPr algn="r"/>
-                      <a:r>
-                        <a:rPr sz="700" b="0" i="0">
-                          <a:solidFill>
-                            <a:srgbClr val="000000"/>
-                          </a:solidFill>
-                          <a:latin typeface="Arial"/>
-                        </a:rPr>
-                        <a:t>6.9x</a:t>
+                        <a:t>7.6x</a:t>
                       </a:r>
                     </a:p>
                   </a:txBody>
@@ -16411,7 +23662,7 @@
                           </a:solidFill>
                           <a:latin typeface="Arial"/>
                         </a:rPr>
-                        <a:t>8.8x</a:t>
+                        <a:t>9.7x</a:t>
                       </a:r>
                     </a:p>
                   </a:txBody>
@@ -16446,7 +23697,7 @@
                           </a:solidFill>
                           <a:latin typeface="Arial"/>
                         </a:rPr>
-                        <a:t>8.8x</a:t>
+                        <a:t>9.7x</a:t>
                       </a:r>
                     </a:p>
                   </a:txBody>
@@ -16481,7 +23732,7 @@
                           </a:solidFill>
                           <a:latin typeface="Arial"/>
                         </a:rPr>
-                        <a:t>8.2x</a:t>
+                        <a:t>9.0x</a:t>
                       </a:r>
                     </a:p>
                   </a:txBody>
@@ -16516,7 +23767,7 @@
                           </a:solidFill>
                           <a:latin typeface="Arial"/>
                         </a:rPr>
-                        <a:t>7.7x</a:t>
+                        <a:t>8.4x</a:t>
                       </a:r>
                     </a:p>
                   </a:txBody>
@@ -17049,7 +24300,7 @@
                 </a:solidFill>
                 <a:latin typeface="Arial"/>
               </a:rPr>
-              <a:t> BUY, TP NOK 78.50 (+66%)</a:t>
+              <a:t> BUY, TP NOK 77.00 (+62%)</a:t>
             </a:r>
           </a:p>
         </p:txBody>
@@ -17379,7 +24630,7 @@
                 </a:solidFill>
                 <a:latin typeface="Arial"/>
               </a:rPr>
-              <a:t> Bouvet trades at 8.1x LTM EV/EBITDA versus a peer median of 8.5x (-4%) and 13.7x P/E versus 15.2x</a:t>
+              <a:t> Bouvet trades at 9.5x LTM EV/EBITDA versus a peer median of 9.0x (+6%) and 14.8x P/E versus 14.7x</a:t>
             </a:r>
           </a:p>
           <a:p>
@@ -17412,7 +24663,7 @@
                 </a:solidFill>
                 <a:latin typeface="Arial"/>
               </a:rPr>
-              <a:t> consensus target of NOK 50.00 across 2 analysts (+6% vs current price)</a:t>
+              <a:t> consensus target of NOK 50.00 across 2 analysts (+5% vs current price)</a:t>
             </a:r>
           </a:p>
         </p:txBody>
@@ -17722,7 +24973,7 @@
                 </a:solidFill>
                 <a:latin typeface="Arial"/>
               </a:rPr>
-              <a:t>We recommend a BUY. Our 12-month target price of NOK 78.50 implies +66% upside and a +74% total return including dividend; 8.0x 2026E EV/EBITDA.</a:t>
+              <a:t>We recommend a BUY. Our 12-month target price of NOK 77.00 implies +62% upside and a +69% total return including dividend; 8.8x 2026E EV/EBITDA.</a:t>
             </a:r>
           </a:p>
         </p:txBody>
@@ -17775,7 +25026,7 @@
                 </a:solidFill>
                 <a:latin typeface="Arial"/>
               </a:rPr>
-              <a:t>DCF fair value NOK 75.76, peer multiples NOK 52.13, scenario-weighted NOK 77.79 versus a share price of NOK 47.35 — BUY</a:t>
+              <a:t>DCF fair value NOK 74.00, peer multiples NOK 46.77, scenario-weighted NOK 76.10 versus a share price of NOK 47.40 — BUY</a:t>
             </a:r>
           </a:p>
         </p:txBody>
@@ -17810,7 +25061,7 @@
                 </a:solidFill>
                 <a:latin typeface="Arial"/>
               </a:rPr>
-              <a:t>BUY – 12m TP NOK 78.50 · low agreement</a:t>
+              <a:t>BUY – 12m TP NOK 77.00 · low agreement</a:t>
             </a:r>
           </a:p>
         </p:txBody>
@@ -17936,7 +25187,7 @@
                 </a:solidFill>
                 <a:latin typeface="Arial"/>
               </a:rPr>
-              <a:t>DCF value of NOK 75.76 per share</a:t>
+              <a:t>DCF value of NOK 74.00 per share</a:t>
             </a:r>
             <a:r>
               <a:rPr sz="800" b="0" i="0">
@@ -17945,7 +25196,7 @@
                 </a:solidFill>
                 <a:latin typeface="Arial"/>
               </a:rPr>
-              <a:t> (WACC 8.3%, terminal growth 2.0%); terminal value is 71% of EV, implying 11.9x exit EV/EBITDA</a:t>
+              <a:t> (WACC 8.3%, terminal growth 2.0%); terminal value is 72% of EV, implying 11.9x exit EV/EBITDA</a:t>
             </a:r>
           </a:p>
           <a:p>
@@ -17969,7 +25220,7 @@
                 </a:solidFill>
                 <a:latin typeface="Arial"/>
               </a:rPr>
-              <a:t>Peer multiples imply NOK 52.13</a:t>
+              <a:t>Peer multiples imply NOK 46.77</a:t>
             </a:r>
             <a:r>
               <a:rPr sz="800" b="0" i="0">
@@ -18011,7 +25262,7 @@
                 </a:solidFill>
                 <a:latin typeface="Arial"/>
               </a:rPr>
-              <a:t> bear NOK 55 / base NOK 76 / bull NOK 104; probability-weighted NOK 77.79</a:t>
+              <a:t> bear NOK 53 / base NOK 74 / bull NOK 103; probability-weighted NOK 76.10</a:t>
             </a:r>
           </a:p>
           <a:p>
@@ -18035,7 +25286,7 @@
                 </a:solidFill>
                 <a:latin typeface="Arial"/>
               </a:rPr>
-              <a:t>12-month target price NOK 78.50:</a:t>
+              <a:t>12-month target price NOK 77.00:</a:t>
             </a:r>
             <a:r>
               <a:rPr sz="800" b="0" i="0">
@@ -18044,7 +25295,7 @@
                 </a:solidFill>
                 <a:latin typeface="Arial"/>
               </a:rPr>
-              <a:t> fair value NOK 75.76 rolled forward at the 8.3% cost of equity less NOK 3.71 dividend; expected total return +74%, rating BUY</a:t>
+              <a:t> fair value NOK 74.00 (valued at 23.09.2026) rolled forward at the 8.3% cost of equity less NOK 3.00 dividend; expected total return +69%, rating BUY</a:t>
             </a:r>
           </a:p>
         </p:txBody>
@@ -18179,8 +25430,8 @@
         </p:blipFill>
         <p:spPr>
           <a:xfrm>
-            <a:off x="475488" y="4192391"/>
-            <a:ext cx="3794760" cy="1984513"/>
+            <a:off x="475488" y="4265604"/>
+            <a:ext cx="3794760" cy="1838086"/>
           </a:xfrm>
           <a:prstGeom prst="rect">
             <a:avLst/>
@@ -18616,7 +25867,7 @@
                           </a:solidFill>
                           <a:latin typeface="Arial"/>
                         </a:rPr>
-                        <a:t>87.9</a:t>
+                        <a:t>86.0</a:t>
                       </a:r>
                     </a:p>
                   </a:txBody>
@@ -18653,7 +25904,7 @@
                           </a:solidFill>
                           <a:latin typeface="Arial"/>
                         </a:rPr>
-                        <a:t>81.0</a:t>
+                        <a:t>79.0</a:t>
                       </a:r>
                     </a:p>
                   </a:txBody>
@@ -18690,7 +25941,7 @@
                           </a:solidFill>
                           <a:latin typeface="Arial"/>
                         </a:rPr>
-                        <a:t>75.2</a:t>
+                        <a:t>73.1</a:t>
                       </a:r>
                     </a:p>
                   </a:txBody>
@@ -18727,7 +25978,7 @@
                           </a:solidFill>
                           <a:latin typeface="Arial"/>
                         </a:rPr>
-                        <a:t>70.2</a:t>
+                        <a:t>68.1</a:t>
                       </a:r>
                     </a:p>
                   </a:txBody>
@@ -18764,7 +26015,7 @@
                           </a:solidFill>
                           <a:latin typeface="Arial"/>
                         </a:rPr>
-                        <a:t>65.8</a:t>
+                        <a:t>63.7</a:t>
                       </a:r>
                     </a:p>
                   </a:txBody>
@@ -18801,7 +26052,7 @@
                           </a:solidFill>
                           <a:latin typeface="Arial"/>
                         </a:rPr>
-                        <a:t>62.0</a:t>
+                        <a:t>59.8</a:t>
                       </a:r>
                     </a:p>
                   </a:txBody>
@@ -18838,7 +26089,7 @@
                           </a:solidFill>
                           <a:latin typeface="Arial"/>
                         </a:rPr>
-                        <a:t>58.6</a:t>
+                        <a:t>56.4</a:t>
                       </a:r>
                     </a:p>
                   </a:txBody>
@@ -18912,7 +26163,7 @@
                           </a:solidFill>
                           <a:latin typeface="Arial"/>
                         </a:rPr>
-                        <a:t>90.9</a:t>
+                        <a:t>89.2</a:t>
                       </a:r>
                     </a:p>
                   </a:txBody>
@@ -18947,7 +26198,7 @@
                           </a:solidFill>
                           <a:latin typeface="Arial"/>
                         </a:rPr>
-                        <a:t>83.5</a:t>
+                        <a:t>81.6</a:t>
                       </a:r>
                     </a:p>
                   </a:txBody>
@@ -18982,7 +26233,7 @@
                           </a:solidFill>
                           <a:latin typeface="Arial"/>
                         </a:rPr>
-                        <a:t>77.2</a:t>
+                        <a:t>75.3</a:t>
                       </a:r>
                     </a:p>
                   </a:txBody>
@@ -19017,7 +26268,7 @@
                           </a:solidFill>
                           <a:latin typeface="Arial"/>
                         </a:rPr>
-                        <a:t>71.9</a:t>
+                        <a:t>69.9</a:t>
                       </a:r>
                     </a:p>
                   </a:txBody>
@@ -19052,7 +26303,7 @@
                           </a:solidFill>
                           <a:latin typeface="Arial"/>
                         </a:rPr>
-                        <a:t>67.3</a:t>
+                        <a:t>65.2</a:t>
                       </a:r>
                     </a:p>
                   </a:txBody>
@@ -19087,7 +26338,7 @@
                           </a:solidFill>
                           <a:latin typeface="Arial"/>
                         </a:rPr>
-                        <a:t>63.3</a:t>
+                        <a:t>61.2</a:t>
                       </a:r>
                     </a:p>
                   </a:txBody>
@@ -19122,7 +26373,7 @@
                           </a:solidFill>
                           <a:latin typeface="Arial"/>
                         </a:rPr>
-                        <a:t>59.7</a:t>
+                        <a:t>57.6</a:t>
                       </a:r>
                     </a:p>
                   </a:txBody>
@@ -19194,7 +26445,7 @@
                           </a:solidFill>
                           <a:latin typeface="Arial"/>
                         </a:rPr>
-                        <a:t>94.3</a:t>
+                        <a:t>92.6</a:t>
                       </a:r>
                     </a:p>
                   </a:txBody>
@@ -19229,7 +26480,7 @@
                           </a:solidFill>
                           <a:latin typeface="Arial"/>
                         </a:rPr>
-                        <a:t>86.2</a:t>
+                        <a:t>84.5</a:t>
                       </a:r>
                     </a:p>
                   </a:txBody>
@@ -19264,7 +26515,7 @@
                           </a:solidFill>
                           <a:latin typeface="Arial"/>
                         </a:rPr>
-                        <a:t>79.5</a:t>
+                        <a:t>77.6</a:t>
                       </a:r>
                     </a:p>
                   </a:txBody>
@@ -19299,7 +26550,7 @@
                           </a:solidFill>
                           <a:latin typeface="Arial"/>
                         </a:rPr>
-                        <a:t>73.8</a:t>
+                        <a:t>71.9</a:t>
                       </a:r>
                     </a:p>
                   </a:txBody>
@@ -19334,7 +26585,7 @@
                           </a:solidFill>
                           <a:latin typeface="Arial"/>
                         </a:rPr>
-                        <a:t>68.9</a:t>
+                        <a:t>66.9</a:t>
                       </a:r>
                     </a:p>
                   </a:txBody>
@@ -19369,7 +26620,7 @@
                           </a:solidFill>
                           <a:latin typeface="Arial"/>
                         </a:rPr>
-                        <a:t>64.6</a:t>
+                        <a:t>62.6</a:t>
                       </a:r>
                     </a:p>
                   </a:txBody>
@@ -19404,7 +26655,7 @@
                           </a:solidFill>
                           <a:latin typeface="Arial"/>
                         </a:rPr>
-                        <a:t>60.9</a:t>
+                        <a:t>58.8</a:t>
                       </a:r>
                     </a:p>
                   </a:txBody>
@@ -19478,7 +26729,7 @@
                           </a:solidFill>
                           <a:latin typeface="Arial"/>
                         </a:rPr>
-                        <a:t>97.9</a:t>
+                        <a:t>96.5</a:t>
                       </a:r>
                     </a:p>
                   </a:txBody>
@@ -19515,7 +26766,7 @@
                           </a:solidFill>
                           <a:latin typeface="Arial"/>
                         </a:rPr>
-                        <a:t>89.1</a:t>
+                        <a:t>87.6</a:t>
                       </a:r>
                     </a:p>
                   </a:txBody>
@@ -19552,7 +26803,7 @@
                           </a:solidFill>
                           <a:latin typeface="Arial"/>
                         </a:rPr>
-                        <a:t>81.9</a:t>
+                        <a:t>80.2</a:t>
                       </a:r>
                     </a:p>
                   </a:txBody>
@@ -19589,7 +26840,7 @@
                           </a:solidFill>
                           <a:latin typeface="Arial"/>
                         </a:rPr>
-                        <a:t>75.8</a:t>
+                        <a:t>74.0</a:t>
                       </a:r>
                     </a:p>
                   </a:txBody>
@@ -19626,7 +26877,7 @@
                           </a:solidFill>
                           <a:latin typeface="Arial"/>
                         </a:rPr>
-                        <a:t>70.5</a:t>
+                        <a:t>68.7</a:t>
                       </a:r>
                     </a:p>
                   </a:txBody>
@@ -19663,7 +26914,7 @@
                           </a:solidFill>
                           <a:latin typeface="Arial"/>
                         </a:rPr>
-                        <a:t>66.1</a:t>
+                        <a:t>64.1</a:t>
                       </a:r>
                     </a:p>
                   </a:txBody>
@@ -19700,7 +26951,7 @@
                           </a:solidFill>
                           <a:latin typeface="Arial"/>
                         </a:rPr>
-                        <a:t>62.1</a:t>
+                        <a:t>60.2</a:t>
                       </a:r>
                     </a:p>
                   </a:txBody>
@@ -19774,7 +27025,7 @@
                           </a:solidFill>
                           <a:latin typeface="Arial"/>
                         </a:rPr>
-                        <a:t>102.0</a:t>
+                        <a:t>100.8</a:t>
                       </a:r>
                     </a:p>
                   </a:txBody>
@@ -19809,7 +27060,7 @@
                           </a:solidFill>
                           <a:latin typeface="Arial"/>
                         </a:rPr>
-                        <a:t>92.4</a:t>
+                        <a:t>91.0</a:t>
                       </a:r>
                     </a:p>
                   </a:txBody>
@@ -19844,7 +27095,7 @@
                           </a:solidFill>
                           <a:latin typeface="Arial"/>
                         </a:rPr>
-                        <a:t>84.5</a:t>
+                        <a:t>83.0</a:t>
                       </a:r>
                     </a:p>
                   </a:txBody>
@@ -19879,7 +27130,7 @@
                           </a:solidFill>
                           <a:latin typeface="Arial"/>
                         </a:rPr>
-                        <a:t>77.9</a:t>
+                        <a:t>76.3</a:t>
                       </a:r>
                     </a:p>
                   </a:txBody>
@@ -19914,7 +27165,7 @@
                           </a:solidFill>
                           <a:latin typeface="Arial"/>
                         </a:rPr>
-                        <a:t>72.4</a:t>
+                        <a:t>70.6</a:t>
                       </a:r>
                     </a:p>
                   </a:txBody>
@@ -19949,7 +27200,7 @@
                           </a:solidFill>
                           <a:latin typeface="Arial"/>
                         </a:rPr>
-                        <a:t>67.6</a:t>
+                        <a:t>65.8</a:t>
                       </a:r>
                     </a:p>
                   </a:txBody>
@@ -19984,7 +27235,7 @@
                           </a:solidFill>
                           <a:latin typeface="Arial"/>
                         </a:rPr>
-                        <a:t>63.4</a:t>
+                        <a:t>61.6</a:t>
                       </a:r>
                     </a:p>
                   </a:txBody>
@@ -20056,7 +27307,7 @@
                           </a:solidFill>
                           <a:latin typeface="Arial"/>
                         </a:rPr>
-                        <a:t>106.5</a:t>
+                        <a:t>105.5</a:t>
                       </a:r>
                     </a:p>
                   </a:txBody>
@@ -20091,7 +27342,7 @@
                           </a:solidFill>
                           <a:latin typeface="Arial"/>
                         </a:rPr>
-                        <a:t>96.0</a:t>
+                        <a:t>94.8</a:t>
                       </a:r>
                     </a:p>
                   </a:txBody>
@@ -20126,7 +27377,7 @@
                           </a:solidFill>
                           <a:latin typeface="Arial"/>
                         </a:rPr>
-                        <a:t>87.4</a:t>
+                        <a:t>86.0</a:t>
                       </a:r>
                     </a:p>
                   </a:txBody>
@@ -20161,7 +27412,7 @@
                           </a:solidFill>
                           <a:latin typeface="Arial"/>
                         </a:rPr>
-                        <a:t>80.3</a:t>
+                        <a:t>78.8</a:t>
                       </a:r>
                     </a:p>
                   </a:txBody>
@@ -20196,7 +27447,7 @@
                           </a:solidFill>
                           <a:latin typeface="Arial"/>
                         </a:rPr>
-                        <a:t>74.3</a:t>
+                        <a:t>72.7</a:t>
                       </a:r>
                     </a:p>
                   </a:txBody>
@@ -20231,7 +27482,7 @@
                           </a:solidFill>
                           <a:latin typeface="Arial"/>
                         </a:rPr>
-                        <a:t>69.2</a:t>
+                        <a:t>67.5</a:t>
                       </a:r>
                     </a:p>
                   </a:txBody>
@@ -20266,7 +27517,7 @@
                           </a:solidFill>
                           <a:latin typeface="Arial"/>
                         </a:rPr>
-                        <a:t>64.8</a:t>
+                        <a:t>63.1</a:t>
                       </a:r>
                     </a:p>
                   </a:txBody>
@@ -20340,7 +27591,7 @@
                           </a:solidFill>
                           <a:latin typeface="Arial"/>
                         </a:rPr>
-                        <a:t>111.6</a:t>
+                        <a:t>110.9</a:t>
                       </a:r>
                     </a:p>
                   </a:txBody>
@@ -20377,7 +27628,7 @@
                           </a:solidFill>
                           <a:latin typeface="Arial"/>
                         </a:rPr>
-                        <a:t>99.9</a:t>
+                        <a:t>98.9</a:t>
                       </a:r>
                     </a:p>
                   </a:txBody>
@@ -20414,7 +27665,7 @@
                           </a:solidFill>
                           <a:latin typeface="Arial"/>
                         </a:rPr>
-                        <a:t>90.6</a:t>
+                        <a:t>89.4</a:t>
                       </a:r>
                     </a:p>
                   </a:txBody>
@@ -20451,7 +27702,7 @@
                           </a:solidFill>
                           <a:latin typeface="Arial"/>
                         </a:rPr>
-                        <a:t>82.9</a:t>
+                        <a:t>81.5</a:t>
                       </a:r>
                     </a:p>
                   </a:txBody>
@@ -20488,7 +27739,7 @@
                           </a:solidFill>
                           <a:latin typeface="Arial"/>
                         </a:rPr>
-                        <a:t>76.5</a:t>
+                        <a:t>75.0</a:t>
                       </a:r>
                     </a:p>
                   </a:txBody>
@@ -20525,7 +27776,7 @@
                           </a:solidFill>
                           <a:latin typeface="Arial"/>
                         </a:rPr>
-                        <a:t>71.0</a:t>
+                        <a:t>69.4</a:t>
                       </a:r>
                     </a:p>
                   </a:txBody>
@@ -20562,7 +27813,7 @@
                           </a:solidFill>
                           <a:latin typeface="Arial"/>
                         </a:rPr>
-                        <a:t>66.3</a:t>
+                        <a:t>64.7</a:t>
                       </a:r>
                     </a:p>
                   </a:txBody>
@@ -20747,7 +27998,7 @@
                 </a:solidFill>
                 <a:latin typeface="Arial"/>
               </a:rPr>
-              <a:t>Trading at a discount:</a:t>
+              <a:t>Trading at a premium:</a:t>
             </a:r>
             <a:r>
               <a:rPr sz="800" b="0" i="0">
@@ -20756,7 +28007,7 @@
                 </a:solidFill>
                 <a:latin typeface="Arial"/>
               </a:rPr>
-              <a:t> 8.1x EV/EBITDA vs 8.5x peer median (4% discount)</a:t>
+              <a:t> 9.5x EV/EBITDA vs 9.0x peer median (6% premium)</a:t>
             </a:r>
           </a:p>
           <a:p>
@@ -20789,7 +28040,7 @@
                 </a:solidFill>
                 <a:latin typeface="Arial"/>
               </a:rPr>
-              <a:t> 13.7x trailing P/E vs 15.2x for peers (-10%)</a:t>
+              <a:t> 14.8x trailing P/E vs 14.7x for peers (+0%); 13.3x vs 12.9x on next-twelve-month consensus</a:t>
             </a:r>
           </a:p>
           <a:p>
@@ -20822,7 +28073,7 @@
                 </a:solidFill>
                 <a:latin typeface="Arial"/>
               </a:rPr>
-              <a:t> 8.3x trailing EV/EBITDA is below the 3.5-year median of 11.3x (11% of weeks were cheaper)</a:t>
+              <a:t> 8.1x trailing EV/EBITDA is below the 3.5-year median of 11.3x (11% of weeks were cheaper)</a:t>
             </a:r>
           </a:p>
           <a:p>
@@ -20855,7 +28106,7 @@
                 </a:solidFill>
                 <a:latin typeface="Arial"/>
               </a:rPr>
-              <a:t> NOK 49.22 at the peer median of 8.5x (range 45–56 across the 25th–75th percentile)</a:t>
+              <a:t> NOK 44.86 at the peer median of 9.0x (range 38–47 across the 25th–75th percentile)</a:t>
             </a:r>
           </a:p>
           <a:p>
@@ -20879,7 +28130,7 @@
                 </a:solidFill>
                 <a:latin typeface="Arial"/>
               </a:rPr>
-              <a:t>Market-implied WACC 12.5%</a:t>
+              <a:t>Market-implied WACC 12.0%</a:t>
             </a:r>
             <a:r>
               <a:rPr sz="800" b="0" i="0">
@@ -20888,7 +28139,7 @@
                 </a:solidFill>
                 <a:latin typeface="Arial"/>
               </a:rPr>
-              <a:t>, above our 8.3%: the price discounts our cash flows at 422bp more than we do</a:t>
+              <a:t>, above our 8.3%: the price discounts our cash flows at 369bp more than we do</a:t>
             </a:r>
           </a:p>
           <a:p>
@@ -20921,7 +28172,7 @@
                 </a:solidFill>
                 <a:latin typeface="Arial"/>
               </a:rPr>
-              <a:t> at our WACC the price is consistent with a 2031E EBITDA margin of 8.4% versus 13.6% in our base case</a:t>
+              <a:t> at our WACC the price is consistent with a 2031E EBITDA margin of 8.9% versus 13.6% in our base case</a:t>
             </a:r>
           </a:p>
           <a:p>
@@ -20954,7 +28205,7 @@
                 </a:solidFill>
                 <a:latin typeface="Arial"/>
               </a:rPr>
-              <a:t> the DCF is 45% above the peer-multiple value (NOK 52.13) and our target is 57% above the consensus of 2 analysts (NOK 50.00); the recommendation rests on the DCF assumptions alone — treat the target as a hypothesis, not a result</a:t>
+              <a:t> the DCF is 58% above the peer-multiple value (NOK 46.77) and our target is 54% above the consensus of 2 analysts (NOK 50.00); the recommendation rests on the DCF assumptions alone — treat the target as a hypothesis, not a result</a:t>
             </a:r>
           </a:p>
         </p:txBody>
@@ -21400,7 +28651,7 @@
                 </a:solidFill>
                 <a:latin typeface="Arial"/>
               </a:rPr>
-              <a:t>WACC 8.30% and terminal growth 2.00% give a fair value of NOK 75.76 per share</a:t>
+              <a:t>WACC 8.30% and terminal growth 2.00% give a fair value of NOK 74.00 per share</a:t>
             </a:r>
           </a:p>
         </p:txBody>
@@ -22535,6 +29786,22 @@
                 <a:latin typeface="Arial"/>
               </a:rPr>
               <a:t>Beta: Yahoo Finance (5y monthly); regression vs OSEBX rejected (R2=0.01 &lt; 0.10), Blume-adjusted.</a:t>
+            </a:r>
+          </a:p>
+          <a:p>
+            <a:pPr algn="l">
+              <a:lnSpc>
+                <a:spcPct val="110000"/>
+              </a:lnSpc>
+            </a:pPr>
+            <a:r>
+              <a:rPr sz="750" b="0" i="1">
+                <a:solidFill>
+                  <a:srgbClr val="4A4A4A"/>
+                </a:solidFill>
+                <a:latin typeface="Arial"/>
+              </a:rPr>
+              <a:t>Cross-check: bottom-up beta 0.78 (8 peers, unlevered median 0.67).</a:t>
             </a:r>
           </a:p>
           <a:p>
@@ -22704,7 +29971,7 @@
         </p:nvGraphicFramePr>
         <p:xfrm>
           <a:off x="4087368" y="1618488"/>
-          <a:ext cx="5120634" cy="859536"/>
+          <a:ext cx="5120634" cy="1289304"/>
         </p:xfrm>
         <a:graphic>
           <a:graphicData uri="http://schemas.openxmlformats.org/drawingml/2006/table">
@@ -23241,6 +30508,500 @@
                           </a:solidFill>
                           <a:latin typeface="Arial"/>
                         </a:rPr>
+                        <a:t>Share still to come</a:t>
+                      </a:r>
+                    </a:p>
+                  </a:txBody>
+                  <a:tcPr marL="36576" marR="36576" marT="9144" marB="9144" anchor="ctr">
+                    <a:solidFill>
+                      <a:srgbClr val="FFFFFF"/>
+                    </a:solidFill>
+                    <a:lnL w="0">
+                      <a:noFill/>
+                    </a:lnL>
+                    <a:lnR w="0">
+                      <a:noFill/>
+                    </a:lnR>
+                    <a:lnT w="0">
+                      <a:noFill/>
+                    </a:lnT>
+                    <a:lnB w="0">
+                      <a:noFill/>
+                    </a:lnB>
+                  </a:tcPr>
+                </a:tc>
+                <a:tc>
+                  <a:txBody>
+                    <a:bodyPr wrap="none"/>
+                    <a:lstStyle/>
+                    <a:p>
+                      <a:pPr algn="r"/>
+                      <a:r>
+                        <a:rPr sz="800" b="0" i="0">
+                          <a:solidFill>
+                            <a:srgbClr val="000000"/>
+                          </a:solidFill>
+                          <a:latin typeface="Arial"/>
+                        </a:rPr>
+                        <a:t>50%</a:t>
+                      </a:r>
+                    </a:p>
+                  </a:txBody>
+                  <a:tcPr marL="36576" marR="36576" marT="9144" marB="9144" anchor="ctr">
+                    <a:solidFill>
+                      <a:srgbClr val="FFFFFF"/>
+                    </a:solidFill>
+                    <a:lnL w="0">
+                      <a:noFill/>
+                    </a:lnL>
+                    <a:lnR w="0">
+                      <a:noFill/>
+                    </a:lnR>
+                    <a:lnT w="0">
+                      <a:noFill/>
+                    </a:lnT>
+                    <a:lnB w="0">
+                      <a:noFill/>
+                    </a:lnB>
+                  </a:tcPr>
+                </a:tc>
+                <a:tc>
+                  <a:txBody>
+                    <a:bodyPr wrap="none"/>
+                    <a:lstStyle/>
+                    <a:p>
+                      <a:pPr algn="r"/>
+                      <a:r>
+                        <a:rPr sz="800" b="0" i="0">
+                          <a:solidFill>
+                            <a:srgbClr val="000000"/>
+                          </a:solidFill>
+                          <a:latin typeface="Arial"/>
+                        </a:rPr>
+                        <a:t>100%</a:t>
+                      </a:r>
+                    </a:p>
+                  </a:txBody>
+                  <a:tcPr marL="36576" marR="36576" marT="9144" marB="9144" anchor="ctr">
+                    <a:solidFill>
+                      <a:srgbClr val="FFFFFF"/>
+                    </a:solidFill>
+                    <a:lnL w="0">
+                      <a:noFill/>
+                    </a:lnL>
+                    <a:lnR w="0">
+                      <a:noFill/>
+                    </a:lnR>
+                    <a:lnT w="0">
+                      <a:noFill/>
+                    </a:lnT>
+                    <a:lnB w="0">
+                      <a:noFill/>
+                    </a:lnB>
+                  </a:tcPr>
+                </a:tc>
+                <a:tc>
+                  <a:txBody>
+                    <a:bodyPr wrap="none"/>
+                    <a:lstStyle/>
+                    <a:p>
+                      <a:pPr algn="r"/>
+                      <a:r>
+                        <a:rPr sz="800" b="0" i="0">
+                          <a:solidFill>
+                            <a:srgbClr val="000000"/>
+                          </a:solidFill>
+                          <a:latin typeface="Arial"/>
+                        </a:rPr>
+                        <a:t>100%</a:t>
+                      </a:r>
+                    </a:p>
+                  </a:txBody>
+                  <a:tcPr marL="36576" marR="36576" marT="9144" marB="9144" anchor="ctr">
+                    <a:solidFill>
+                      <a:srgbClr val="FFFFFF"/>
+                    </a:solidFill>
+                    <a:lnL w="0">
+                      <a:noFill/>
+                    </a:lnL>
+                    <a:lnR w="0">
+                      <a:noFill/>
+                    </a:lnR>
+                    <a:lnT w="0">
+                      <a:noFill/>
+                    </a:lnT>
+                    <a:lnB w="0">
+                      <a:noFill/>
+                    </a:lnB>
+                  </a:tcPr>
+                </a:tc>
+                <a:tc>
+                  <a:txBody>
+                    <a:bodyPr wrap="none"/>
+                    <a:lstStyle/>
+                    <a:p>
+                      <a:pPr algn="r"/>
+                      <a:r>
+                        <a:rPr sz="800" b="0" i="0">
+                          <a:solidFill>
+                            <a:srgbClr val="000000"/>
+                          </a:solidFill>
+                          <a:latin typeface="Arial"/>
+                        </a:rPr>
+                        <a:t>100%</a:t>
+                      </a:r>
+                    </a:p>
+                  </a:txBody>
+                  <a:tcPr marL="36576" marR="36576" marT="9144" marB="9144" anchor="ctr">
+                    <a:solidFill>
+                      <a:srgbClr val="FFFFFF"/>
+                    </a:solidFill>
+                    <a:lnL w="0">
+                      <a:noFill/>
+                    </a:lnL>
+                    <a:lnR w="0">
+                      <a:noFill/>
+                    </a:lnR>
+                    <a:lnT w="0">
+                      <a:noFill/>
+                    </a:lnT>
+                    <a:lnB w="0">
+                      <a:noFill/>
+                    </a:lnB>
+                  </a:tcPr>
+                </a:tc>
+                <a:tc>
+                  <a:txBody>
+                    <a:bodyPr wrap="none"/>
+                    <a:lstStyle/>
+                    <a:p>
+                      <a:pPr algn="r"/>
+                      <a:r>
+                        <a:rPr sz="800" b="0" i="0">
+                          <a:solidFill>
+                            <a:srgbClr val="000000"/>
+                          </a:solidFill>
+                          <a:latin typeface="Arial"/>
+                        </a:rPr>
+                        <a:t>100%</a:t>
+                      </a:r>
+                    </a:p>
+                  </a:txBody>
+                  <a:tcPr marL="36576" marR="36576" marT="9144" marB="9144" anchor="ctr">
+                    <a:solidFill>
+                      <a:srgbClr val="FFFFFF"/>
+                    </a:solidFill>
+                    <a:lnL w="0">
+                      <a:noFill/>
+                    </a:lnL>
+                    <a:lnR w="0">
+                      <a:noFill/>
+                    </a:lnR>
+                    <a:lnT w="0">
+                      <a:noFill/>
+                    </a:lnT>
+                    <a:lnB w="0">
+                      <a:noFill/>
+                    </a:lnB>
+                  </a:tcPr>
+                </a:tc>
+                <a:tc>
+                  <a:txBody>
+                    <a:bodyPr wrap="none"/>
+                    <a:lstStyle/>
+                    <a:p>
+                      <a:pPr algn="r"/>
+                      <a:r>
+                        <a:rPr sz="800" b="0" i="0">
+                          <a:solidFill>
+                            <a:srgbClr val="000000"/>
+                          </a:solidFill>
+                          <a:latin typeface="Arial"/>
+                        </a:rPr>
+                        <a:t>100%</a:t>
+                      </a:r>
+                    </a:p>
+                  </a:txBody>
+                  <a:tcPr marL="36576" marR="36576" marT="9144" marB="9144" anchor="ctr">
+                    <a:solidFill>
+                      <a:srgbClr val="FFFFFF"/>
+                    </a:solidFill>
+                    <a:lnL w="0">
+                      <a:noFill/>
+                    </a:lnL>
+                    <a:lnR w="0">
+                      <a:noFill/>
+                    </a:lnR>
+                    <a:lnT w="0">
+                      <a:noFill/>
+                    </a:lnT>
+                    <a:lnB w="0">
+                      <a:noFill/>
+                    </a:lnB>
+                  </a:tcPr>
+                </a:tc>
+              </a:tr>
+              <a:tr h="214884">
+                <a:tc>
+                  <a:txBody>
+                    <a:bodyPr wrap="none"/>
+                    <a:lstStyle/>
+                    <a:p>
+                      <a:pPr algn="l"/>
+                      <a:r>
+                        <a:rPr sz="800" b="0" i="0">
+                          <a:solidFill>
+                            <a:srgbClr val="000000"/>
+                          </a:solidFill>
+                          <a:latin typeface="Arial"/>
+                        </a:rPr>
+                        <a:t>Years to discount</a:t>
+                      </a:r>
+                    </a:p>
+                  </a:txBody>
+                  <a:tcPr marL="36576" marR="36576" marT="9144" marB="9144" anchor="ctr">
+                    <a:solidFill>
+                      <a:srgbClr val="FFFFFF"/>
+                    </a:solidFill>
+                    <a:lnL w="0">
+                      <a:noFill/>
+                    </a:lnL>
+                    <a:lnR w="0">
+                      <a:noFill/>
+                    </a:lnR>
+                    <a:lnT w="0">
+                      <a:noFill/>
+                    </a:lnT>
+                    <a:lnB w="0">
+                      <a:noFill/>
+                    </a:lnB>
+                  </a:tcPr>
+                </a:tc>
+                <a:tc>
+                  <a:txBody>
+                    <a:bodyPr wrap="none"/>
+                    <a:lstStyle/>
+                    <a:p>
+                      <a:pPr algn="r"/>
+                      <a:r>
+                        <a:rPr sz="800" b="0" i="0">
+                          <a:solidFill>
+                            <a:srgbClr val="000000"/>
+                          </a:solidFill>
+                          <a:latin typeface="Arial"/>
+                        </a:rPr>
+                        <a:t>0.27</a:t>
+                      </a:r>
+                    </a:p>
+                  </a:txBody>
+                  <a:tcPr marL="36576" marR="36576" marT="9144" marB="9144" anchor="ctr">
+                    <a:solidFill>
+                      <a:srgbClr val="FFFFFF"/>
+                    </a:solidFill>
+                    <a:lnL w="0">
+                      <a:noFill/>
+                    </a:lnL>
+                    <a:lnR w="0">
+                      <a:noFill/>
+                    </a:lnR>
+                    <a:lnT w="0">
+                      <a:noFill/>
+                    </a:lnT>
+                    <a:lnB w="0">
+                      <a:noFill/>
+                    </a:lnB>
+                  </a:tcPr>
+                </a:tc>
+                <a:tc>
+                  <a:txBody>
+                    <a:bodyPr wrap="none"/>
+                    <a:lstStyle/>
+                    <a:p>
+                      <a:pPr algn="r"/>
+                      <a:r>
+                        <a:rPr sz="800" b="0" i="0">
+                          <a:solidFill>
+                            <a:srgbClr val="000000"/>
+                          </a:solidFill>
+                          <a:latin typeface="Arial"/>
+                        </a:rPr>
+                        <a:t>1.27</a:t>
+                      </a:r>
+                    </a:p>
+                  </a:txBody>
+                  <a:tcPr marL="36576" marR="36576" marT="9144" marB="9144" anchor="ctr">
+                    <a:solidFill>
+                      <a:srgbClr val="FFFFFF"/>
+                    </a:solidFill>
+                    <a:lnL w="0">
+                      <a:noFill/>
+                    </a:lnL>
+                    <a:lnR w="0">
+                      <a:noFill/>
+                    </a:lnR>
+                    <a:lnT w="0">
+                      <a:noFill/>
+                    </a:lnT>
+                    <a:lnB w="0">
+                      <a:noFill/>
+                    </a:lnB>
+                  </a:tcPr>
+                </a:tc>
+                <a:tc>
+                  <a:txBody>
+                    <a:bodyPr wrap="none"/>
+                    <a:lstStyle/>
+                    <a:p>
+                      <a:pPr algn="r"/>
+                      <a:r>
+                        <a:rPr sz="800" b="0" i="0">
+                          <a:solidFill>
+                            <a:srgbClr val="000000"/>
+                          </a:solidFill>
+                          <a:latin typeface="Arial"/>
+                        </a:rPr>
+                        <a:t>2.27</a:t>
+                      </a:r>
+                    </a:p>
+                  </a:txBody>
+                  <a:tcPr marL="36576" marR="36576" marT="9144" marB="9144" anchor="ctr">
+                    <a:solidFill>
+                      <a:srgbClr val="FFFFFF"/>
+                    </a:solidFill>
+                    <a:lnL w="0">
+                      <a:noFill/>
+                    </a:lnL>
+                    <a:lnR w="0">
+                      <a:noFill/>
+                    </a:lnR>
+                    <a:lnT w="0">
+                      <a:noFill/>
+                    </a:lnT>
+                    <a:lnB w="0">
+                      <a:noFill/>
+                    </a:lnB>
+                  </a:tcPr>
+                </a:tc>
+                <a:tc>
+                  <a:txBody>
+                    <a:bodyPr wrap="none"/>
+                    <a:lstStyle/>
+                    <a:p>
+                      <a:pPr algn="r"/>
+                      <a:r>
+                        <a:rPr sz="800" b="0" i="0">
+                          <a:solidFill>
+                            <a:srgbClr val="000000"/>
+                          </a:solidFill>
+                          <a:latin typeface="Arial"/>
+                        </a:rPr>
+                        <a:t>3.27</a:t>
+                      </a:r>
+                    </a:p>
+                  </a:txBody>
+                  <a:tcPr marL="36576" marR="36576" marT="9144" marB="9144" anchor="ctr">
+                    <a:solidFill>
+                      <a:srgbClr val="FFFFFF"/>
+                    </a:solidFill>
+                    <a:lnL w="0">
+                      <a:noFill/>
+                    </a:lnL>
+                    <a:lnR w="0">
+                      <a:noFill/>
+                    </a:lnR>
+                    <a:lnT w="0">
+                      <a:noFill/>
+                    </a:lnT>
+                    <a:lnB w="0">
+                      <a:noFill/>
+                    </a:lnB>
+                  </a:tcPr>
+                </a:tc>
+                <a:tc>
+                  <a:txBody>
+                    <a:bodyPr wrap="none"/>
+                    <a:lstStyle/>
+                    <a:p>
+                      <a:pPr algn="r"/>
+                      <a:r>
+                        <a:rPr sz="800" b="0" i="0">
+                          <a:solidFill>
+                            <a:srgbClr val="000000"/>
+                          </a:solidFill>
+                          <a:latin typeface="Arial"/>
+                        </a:rPr>
+                        <a:t>4.27</a:t>
+                      </a:r>
+                    </a:p>
+                  </a:txBody>
+                  <a:tcPr marL="36576" marR="36576" marT="9144" marB="9144" anchor="ctr">
+                    <a:solidFill>
+                      <a:srgbClr val="FFFFFF"/>
+                    </a:solidFill>
+                    <a:lnL w="0">
+                      <a:noFill/>
+                    </a:lnL>
+                    <a:lnR w="0">
+                      <a:noFill/>
+                    </a:lnR>
+                    <a:lnT w="0">
+                      <a:noFill/>
+                    </a:lnT>
+                    <a:lnB w="0">
+                      <a:noFill/>
+                    </a:lnB>
+                  </a:tcPr>
+                </a:tc>
+                <a:tc>
+                  <a:txBody>
+                    <a:bodyPr wrap="none"/>
+                    <a:lstStyle/>
+                    <a:p>
+                      <a:pPr algn="r"/>
+                      <a:r>
+                        <a:rPr sz="800" b="0" i="0">
+                          <a:solidFill>
+                            <a:srgbClr val="000000"/>
+                          </a:solidFill>
+                          <a:latin typeface="Arial"/>
+                        </a:rPr>
+                        <a:t>5.27</a:t>
+                      </a:r>
+                    </a:p>
+                  </a:txBody>
+                  <a:tcPr marL="36576" marR="36576" marT="9144" marB="9144" anchor="ctr">
+                    <a:solidFill>
+                      <a:srgbClr val="FFFFFF"/>
+                    </a:solidFill>
+                    <a:lnL w="0">
+                      <a:noFill/>
+                    </a:lnL>
+                    <a:lnR w="0">
+                      <a:noFill/>
+                    </a:lnR>
+                    <a:lnT w="0">
+                      <a:noFill/>
+                    </a:lnT>
+                    <a:lnB w="0">
+                      <a:noFill/>
+                    </a:lnB>
+                  </a:tcPr>
+                </a:tc>
+              </a:tr>
+              <a:tr h="214884">
+                <a:tc>
+                  <a:txBody>
+                    <a:bodyPr wrap="none"/>
+                    <a:lstStyle/>
+                    <a:p>
+                      <a:pPr algn="l"/>
+                      <a:r>
+                        <a:rPr sz="800" b="0" i="0">
+                          <a:solidFill>
+                            <a:srgbClr val="000000"/>
+                          </a:solidFill>
+                          <a:latin typeface="Arial"/>
+                        </a:rPr>
                         <a:t>Discount factor</a:t>
                       </a:r>
                     </a:p>
@@ -23276,7 +31037,7 @@
                           </a:solidFill>
                           <a:latin typeface="Arial"/>
                         </a:rPr>
-                        <a:t>0.923</a:t>
+                        <a:t>0.979</a:t>
                       </a:r>
                     </a:p>
                   </a:txBody>
@@ -23311,7 +31072,7 @@
                           </a:solidFill>
                           <a:latin typeface="Arial"/>
                         </a:rPr>
-                        <a:t>0.853</a:t>
+                        <a:t>0.904</a:t>
                       </a:r>
                     </a:p>
                   </a:txBody>
@@ -23346,7 +31107,7 @@
                           </a:solidFill>
                           <a:latin typeface="Arial"/>
                         </a:rPr>
-                        <a:t>0.787</a:t>
+                        <a:t>0.834</a:t>
                       </a:r>
                     </a:p>
                   </a:txBody>
@@ -23381,7 +31142,7 @@
                           </a:solidFill>
                           <a:latin typeface="Arial"/>
                         </a:rPr>
-                        <a:t>0.727</a:t>
+                        <a:t>0.770</a:t>
                       </a:r>
                     </a:p>
                   </a:txBody>
@@ -23416,7 +31177,7 @@
                           </a:solidFill>
                           <a:latin typeface="Arial"/>
                         </a:rPr>
-                        <a:t>0.671</a:t>
+                        <a:t>0.711</a:t>
                       </a:r>
                     </a:p>
                   </a:txBody>
@@ -23451,7 +31212,7 @@
                           </a:solidFill>
                           <a:latin typeface="Arial"/>
                         </a:rPr>
-                        <a:t>0.620</a:t>
+                        <a:t>0.657</a:t>
                       </a:r>
                     </a:p>
                   </a:txBody>
@@ -23525,7 +31286,7 @@
                           </a:solidFill>
                           <a:latin typeface="Arial"/>
                         </a:rPr>
-                        <a:t>361</a:t>
+                        <a:t>193</a:t>
                       </a:r>
                     </a:p>
                   </a:txBody>
@@ -23562,7 +31323,7 @@
                           </a:solidFill>
                           <a:latin typeface="Arial"/>
                         </a:rPr>
-                        <a:t>375</a:t>
+                        <a:t>398</a:t>
                       </a:r>
                     </a:p>
                   </a:txBody>
@@ -23599,7 +31360,7 @@
                           </a:solidFill>
                           <a:latin typeface="Arial"/>
                         </a:rPr>
-                        <a:t>366</a:t>
+                        <a:t>388</a:t>
                       </a:r>
                     </a:p>
                   </a:txBody>
@@ -23636,7 +31397,7 @@
                           </a:solidFill>
                           <a:latin typeface="Arial"/>
                         </a:rPr>
-                        <a:t>353</a:t>
+                        <a:t>374</a:t>
                       </a:r>
                     </a:p>
                   </a:txBody>
@@ -23673,7 +31434,7 @@
                           </a:solidFill>
                           <a:latin typeface="Arial"/>
                         </a:rPr>
-                        <a:t>335</a:t>
+                        <a:t>355</a:t>
                       </a:r>
                     </a:p>
                   </a:txBody>
@@ -23710,7 +31471,7 @@
                           </a:solidFill>
                           <a:latin typeface="Arial"/>
                         </a:rPr>
-                        <a:t>313</a:t>
+                        <a:t>332</a:t>
                       </a:r>
                     </a:p>
                   </a:txBody>
@@ -23748,7 +31509,7 @@
           <p:nvPr/>
         </p:nvGraphicFramePr>
         <p:xfrm>
-          <a:off x="4087368" y="2615184"/>
+          <a:off x="4087368" y="3044951"/>
           <a:ext cx="5120640" cy="2615184"/>
         </p:xfrm>
         <a:graphic>
@@ -23882,7 +31643,7 @@
                           </a:solidFill>
                           <a:latin typeface="Arial"/>
                         </a:rPr>
-                        <a:t>2,104</a:t>
+                        <a:t>2,040</a:t>
                       </a:r>
                     </a:p>
                   </a:txBody>
@@ -24028,7 +31789,7 @@
                           </a:solidFill>
                           <a:latin typeface="Arial"/>
                         </a:rPr>
-                        <a:t>5,072</a:t>
+                        <a:t>5,375</a:t>
                       </a:r>
                     </a:p>
                   </a:txBody>
@@ -24102,7 +31863,7 @@
                           </a:solidFill>
                           <a:latin typeface="Arial"/>
                         </a:rPr>
-                        <a:t>7,175</a:t>
+                        <a:t>7,415</a:t>
                       </a:r>
                     </a:p>
                   </a:txBody>
@@ -24141,7 +31902,7 @@
                           </a:solidFill>
                           <a:latin typeface="Arial"/>
                         </a:rPr>
-                        <a:t>Less: net debt</a:t>
+                        <a:t>Less: net debt (30.06.2026)</a:t>
                       </a:r>
                     </a:p>
                   </a:txBody>
@@ -24176,7 +31937,7 @@
                           </a:solidFill>
                           <a:latin typeface="Arial"/>
                         </a:rPr>
-                        <a:t>580</a:t>
+                        <a:t>160</a:t>
                       </a:r>
                     </a:p>
                   </a:txBody>
@@ -24322,7 +32083,7 @@
                           </a:solidFill>
                           <a:latin typeface="Arial"/>
                         </a:rPr>
-                        <a:t>7,755</a:t>
+                        <a:t>7,574</a:t>
                       </a:r>
                     </a:p>
                   </a:txBody>
@@ -24433,7 +32194,7 @@
                           </a:solidFill>
                           <a:latin typeface="Arial"/>
                         </a:rPr>
-                        <a:t>Fair value per share (NOK)</a:t>
+                        <a:t>Fair value per share (NOK, 23.09.2026)</a:t>
                       </a:r>
                     </a:p>
                   </a:txBody>
@@ -24470,7 +32231,7 @@
                           </a:solidFill>
                           <a:latin typeface="Arial"/>
                         </a:rPr>
-                        <a:t>75.76</a:t>
+                        <a:t>74.00</a:t>
                       </a:r>
                     </a:p>
                   </a:txBody>
@@ -24544,7 +32305,7 @@
                           </a:solidFill>
                           <a:latin typeface="Arial"/>
                         </a:rPr>
-                        <a:t>82.05</a:t>
+                        <a:t>80.14</a:t>
                       </a:r>
                     </a:p>
                   </a:txBody>
@@ -24616,7 +32377,7 @@
                           </a:solidFill>
                           <a:latin typeface="Arial"/>
                         </a:rPr>
-                        <a:t>(3.71)</a:t>
+                        <a:t>(3.00)</a:t>
                       </a:r>
                     </a:p>
                   </a:txBody>
@@ -24690,7 +32451,7 @@
                           </a:solidFill>
                           <a:latin typeface="Arial"/>
                         </a:rPr>
-                        <a:t>78.50</a:t>
+                        <a:t>77.00</a:t>
                       </a:r>
                     </a:p>
                   </a:txBody>
@@ -24935,7 +32696,7 @@
                 </a:solidFill>
                 <a:latin typeface="Arial"/>
               </a:rPr>
-              <a:t> 12.52% vs our 8.30%</a:t>
+              <a:t> 11.99% vs our 8.30%</a:t>
             </a:r>
           </a:p>
           <a:p>
@@ -24968,7 +32729,7 @@
                 </a:solidFill>
                 <a:latin typeface="Arial"/>
               </a:rPr>
-              <a:t> -5.40% vs our 2.00%</a:t>
+              <a:t> -3.75% vs our 2.00%</a:t>
             </a:r>
           </a:p>
           <a:p>
@@ -25001,7 +32762,7 @@
                 </a:solidFill>
                 <a:latin typeface="Arial"/>
               </a:rPr>
-              <a:t> 8.4% vs our 13.6%</a:t>
+              <a:t> 8.9% vs our 13.6%</a:t>
             </a:r>
           </a:p>
           <a:p>
@@ -25246,7 +33007,7 @@
                 </a:solidFill>
                 <a:latin typeface="Arial"/>
               </a:rPr>
-              <a:t> is 71% of enterprise value</a:t>
+              <a:t> is 72% of enterprise value</a:t>
             </a:r>
           </a:p>
           <a:p>
@@ -25279,7 +33040,7 @@
                 </a:solidFill>
                 <a:latin typeface="Arial"/>
               </a:rPr>
-              <a:t> 11.9x EV/EBITDA vs 8.1x today</a:t>
+              <a:t> 11.9x EV/EBITDA vs 9.5x today</a:t>
             </a:r>
           </a:p>
           <a:p>
@@ -25655,7 +33416,7 @@
                 </a:solidFill>
                 <a:latin typeface="Arial"/>
               </a:rPr>
-              <a:t>Probability-weighted value of NOK 77.79 per share versus a share price of NOK 47.35</a:t>
+              <a:t>Probability-weighted value of NOK 76.10 per share versus a share price of NOK 47.40</a:t>
             </a:r>
           </a:p>
         </p:txBody>
@@ -26473,7 +34234,7 @@
                           </a:solidFill>
                           <a:latin typeface="Arial"/>
                         </a:rPr>
-                        <a:t>55.46</a:t>
+                        <a:t>52.93</a:t>
                       </a:r>
                     </a:p>
                   </a:txBody>
@@ -26510,7 +34271,7 @@
                           </a:solidFill>
                           <a:latin typeface="Arial"/>
                         </a:rPr>
-                        <a:t>+17%</a:t>
+                        <a:t>+12%</a:t>
                       </a:r>
                     </a:p>
                   </a:txBody>
@@ -26829,7 +34590,7 @@
                           </a:solidFill>
                           <a:latin typeface="Arial"/>
                         </a:rPr>
-                        <a:t>75.76</a:t>
+                        <a:t>74.00</a:t>
                       </a:r>
                     </a:p>
                   </a:txBody>
@@ -26864,7 +34625,7 @@
                           </a:solidFill>
                           <a:latin typeface="Arial"/>
                         </a:rPr>
-                        <a:t>+60%</a:t>
+                        <a:t>+56%</a:t>
                       </a:r>
                     </a:p>
                   </a:txBody>
@@ -27181,7 +34942,7 @@
                           </a:solidFill>
                           <a:latin typeface="Arial"/>
                         </a:rPr>
-                        <a:t>104.19</a:t>
+                        <a:t>103.49</a:t>
                       </a:r>
                     </a:p>
                   </a:txBody>
@@ -27216,7 +34977,7 @@
                           </a:solidFill>
                           <a:latin typeface="Arial"/>
                         </a:rPr>
-                        <a:t>+120%</a:t>
+                        <a:t>+118%</a:t>
                       </a:r>
                     </a:p>
                   </a:txBody>
@@ -27549,7 +35310,7 @@
                           </a:solidFill>
                           <a:latin typeface="Arial"/>
                         </a:rPr>
-                        <a:t>77.79</a:t>
+                        <a:t>76.10</a:t>
                       </a:r>
                     </a:p>
                   </a:txBody>
@@ -27586,7 +35347,7 @@
                           </a:solidFill>
                           <a:latin typeface="Arial"/>
                         </a:rPr>
-                        <a:t>+64%</a:t>
+                        <a:t>+61%</a:t>
                       </a:r>
                     </a:p>
                   </a:txBody>
@@ -27831,7 +35592,7 @@
                 </a:solidFill>
                 <a:latin typeface="Arial"/>
               </a:rPr>
-              <a:t> Growth 2pp lower, margin 1.5pp lower, WACC +50bp; revenue CAGR 2.3%, 2031E margin 12.1%, WACC 8.8% gives NOK 55.46 (+17% vs price)</a:t>
+              <a:t> Growth 2pp lower, margin 1.5pp lower, WACC +50bp; revenue CAGR 2.3%, 2031E margin 12.1%, WACC 8.8% gives NOK 52.93 (+12% vs price)</a:t>
             </a:r>
           </a:p>
           <a:p>
@@ -27864,7 +35625,7 @@
                 </a:solidFill>
                 <a:latin typeface="Arial"/>
               </a:rPr>
-              <a:t> Base-case drivers; revenue CAGR 4.3%, 2031E margin 13.6%, WACC 8.3% gives NOK 75.76 (+60% vs price)</a:t>
+              <a:t> Base-case drivers; revenue CAGR 4.3%, 2031E margin 13.6%, WACC 8.3% gives NOK 74.00 (+56% vs price)</a:t>
             </a:r>
           </a:p>
           <a:p>
@@ -27897,7 +35658,7 @@
                 </a:solidFill>
                 <a:latin typeface="Arial"/>
               </a:rPr>
-              <a:t> Growth 2pp higher, margin 1.5pp higher, WACC -50bp; revenue CAGR 6.3%, 2031E margin 15.1%, WACC 7.8% gives NOK 104.19 (+120% vs price)</a:t>
+              <a:t> Growth 2pp higher, margin 1.5pp higher, WACC -50bp; revenue CAGR 6.3%, 2031E margin 15.1%, WACC 7.8% gives NOK 103.49 (+118% vs price)</a:t>
             </a:r>
           </a:p>
           <a:p>
@@ -28422,7 +36183,7 @@
                 </a:solidFill>
                 <a:latin typeface="Arial"/>
               </a:rPr>
-              <a:t>Multiples on the last reported fiscal year, enterprise value on the same lease basis as the target company</a:t>
+              <a:t>Last-twelve-month multiples where the quarters are reported; EV on today's market cap, the latest net debt and the same lease basis as the target company</a:t>
             </a:r>
           </a:p>
         </p:txBody>
@@ -28820,7 +36581,7 @@
                           </a:solidFill>
                           <a:latin typeface="Arial"/>
                         </a:rPr>
-                        <a:t>P/E (fwd)</a:t>
+                        <a:t>P/E (NTM)</a:t>
                       </a:r>
                     </a:p>
                   </a:txBody>
@@ -28931,7 +36692,7 @@
                           </a:solidFill>
                           <a:latin typeface="Arial"/>
                         </a:rPr>
-                        <a:t>2,497</a:t>
+                        <a:t>2,423</a:t>
                       </a:r>
                     </a:p>
                   </a:txBody>
@@ -28968,7 +36729,7 @@
                           </a:solidFill>
                           <a:latin typeface="Arial"/>
                         </a:rPr>
-                        <a:t>2,501</a:t>
+                        <a:t>2,924</a:t>
                       </a:r>
                     </a:p>
                   </a:txBody>
@@ -29042,7 +36803,7 @@
                           </a:solidFill>
                           <a:latin typeface="Arial"/>
                         </a:rPr>
-                        <a:t>8.8%</a:t>
+                        <a:t>8.7%</a:t>
                       </a:r>
                     </a:p>
                   </a:txBody>
@@ -29116,7 +36877,7 @@
                           </a:solidFill>
                           <a:latin typeface="Arial"/>
                         </a:rPr>
-                        <a:t>5.1x</a:t>
+                        <a:t>6.3x</a:t>
                       </a:r>
                     </a:p>
                   </a:txBody>
@@ -29227,7 +36988,7 @@
                           </a:solidFill>
                           <a:latin typeface="Arial"/>
                         </a:rPr>
-                        <a:t>9.3x</a:t>
+                        <a:t>13.2x</a:t>
                       </a:r>
                     </a:p>
                   </a:txBody>
@@ -29336,7 +37097,7 @@
                           </a:solidFill>
                           <a:latin typeface="Arial"/>
                         </a:rPr>
-                        <a:t>22,628</a:t>
+                        <a:t>22,274</a:t>
                       </a:r>
                     </a:p>
                   </a:txBody>
@@ -29371,7 +37132,7 @@
                           </a:solidFill>
                           <a:latin typeface="Arial"/>
                         </a:rPr>
-                        <a:t>28,051</a:t>
+                        <a:t>25,743</a:t>
                       </a:r>
                     </a:p>
                   </a:txBody>
@@ -29441,7 +37202,7 @@
                           </a:solidFill>
                           <a:latin typeface="Arial"/>
                         </a:rPr>
-                        <a:t>17.6%</a:t>
+                        <a:t>18.5%</a:t>
                       </a:r>
                     </a:p>
                   </a:txBody>
@@ -29476,7 +37237,7 @@
                           </a:solidFill>
                           <a:latin typeface="Arial"/>
                         </a:rPr>
-                        <a:t>1.4x</a:t>
+                        <a:t>1.3x</a:t>
                       </a:r>
                     </a:p>
                   </a:txBody>
@@ -29511,7 +37272,7 @@
                           </a:solidFill>
                           <a:latin typeface="Arial"/>
                         </a:rPr>
-                        <a:t>8.0x</a:t>
+                        <a:t>7.1x</a:t>
                       </a:r>
                     </a:p>
                   </a:txBody>
@@ -29546,7 +37307,7 @@
                           </a:solidFill>
                           <a:latin typeface="Arial"/>
                         </a:rPr>
-                        <a:t>37.2x</a:t>
+                        <a:t>7.9x</a:t>
                       </a:r>
                     </a:p>
                   </a:txBody>
@@ -29581,7 +37342,7 @@
                           </a:solidFill>
                           <a:latin typeface="Arial"/>
                         </a:rPr>
-                        <a:t>10.1x</a:t>
+                        <a:t>9.9x</a:t>
                       </a:r>
                     </a:p>
                   </a:txBody>
@@ -29723,7 +37484,7 @@
                           </a:solidFill>
                           <a:latin typeface="Arial"/>
                         </a:rPr>
-                        <a:t>20,082</a:t>
+                        <a:t>20,421</a:t>
                       </a:r>
                     </a:p>
                   </a:txBody>
@@ -29758,7 +37519,7 @@
                           </a:solidFill>
                           <a:latin typeface="Arial"/>
                         </a:rPr>
-                        <a:t>23,435</a:t>
+                        <a:t>25,027</a:t>
                       </a:r>
                     </a:p>
                   </a:txBody>
@@ -29828,7 +37589,7 @@
                           </a:solidFill>
                           <a:latin typeface="Arial"/>
                         </a:rPr>
-                        <a:t>8.9%</a:t>
+                        <a:t>9.9%</a:t>
                       </a:r>
                     </a:p>
                   </a:txBody>
@@ -29863,7 +37624,7 @@
                           </a:solidFill>
                           <a:latin typeface="Arial"/>
                         </a:rPr>
-                        <a:t>2.1x</a:t>
+                        <a:t>1.9x</a:t>
                       </a:r>
                     </a:p>
                   </a:txBody>
@@ -29898,7 +37659,7 @@
                           </a:solidFill>
                           <a:latin typeface="Arial"/>
                         </a:rPr>
-                        <a:t>23.2x</a:t>
+                        <a:t>18.8x</a:t>
                       </a:r>
                     </a:p>
                   </a:txBody>
@@ -29933,7 +37694,7 @@
                           </a:solidFill>
                           <a:latin typeface="Arial"/>
                         </a:rPr>
-                        <a:t>36.1x</a:t>
+                        <a:t>26.6x</a:t>
                       </a:r>
                     </a:p>
                   </a:txBody>
@@ -29968,7 +37729,7 @@
                           </a:solidFill>
                           <a:latin typeface="Arial"/>
                         </a:rPr>
-                        <a:t>34.5x</a:t>
+                        <a:t>34.9x</a:t>
                       </a:r>
                     </a:p>
                   </a:txBody>
@@ -30003,7 +37764,7 @@
                           </a:solidFill>
                           <a:latin typeface="Arial"/>
                         </a:rPr>
-                        <a:t>13.3x</a:t>
+                        <a:t>14.6x</a:t>
                       </a:r>
                     </a:p>
                   </a:txBody>
@@ -30110,7 +37871,7 @@
                           </a:solidFill>
                           <a:latin typeface="Arial"/>
                         </a:rPr>
-                        <a:t>18,898</a:t>
+                        <a:t>19,121</a:t>
                       </a:r>
                     </a:p>
                   </a:txBody>
@@ -30145,7 +37906,7 @@
                           </a:solidFill>
                           <a:latin typeface="Arial"/>
                         </a:rPr>
-                        <a:t>17,896</a:t>
+                        <a:t>20,385</a:t>
                       </a:r>
                     </a:p>
                   </a:txBody>
@@ -30215,7 +37976,7 @@
                           </a:solidFill>
                           <a:latin typeface="Arial"/>
                         </a:rPr>
-                        <a:t>4.3%</a:t>
+                        <a:t>4.8%</a:t>
                       </a:r>
                     </a:p>
                   </a:txBody>
@@ -30285,7 +38046,7 @@
                           </a:solidFill>
                           <a:latin typeface="Arial"/>
                         </a:rPr>
-                        <a:t>11.2x</a:t>
+                        <a:t>10.7x</a:t>
                       </a:r>
                     </a:p>
                   </a:txBody>
@@ -30320,7 +38081,7 @@
                           </a:solidFill>
                           <a:latin typeface="Arial"/>
                         </a:rPr>
-                        <a:t>14.3x</a:t>
+                        <a:t>12.9x</a:t>
                       </a:r>
                     </a:p>
                   </a:txBody>
@@ -30355,7 +38116,7 @@
                           </a:solidFill>
                           <a:latin typeface="Arial"/>
                         </a:rPr>
-                        <a:t>16.5x</a:t>
+                        <a:t>16.7x</a:t>
                       </a:r>
                     </a:p>
                   </a:txBody>
@@ -30390,7 +38151,7 @@
                           </a:solidFill>
                           <a:latin typeface="Arial"/>
                         </a:rPr>
-                        <a:t>14.6x</a:t>
+                        <a:t>15.2x</a:t>
                       </a:r>
                     </a:p>
                   </a:txBody>
@@ -30497,7 +38258,7 @@
                           </a:solidFill>
                           <a:latin typeface="Arial"/>
                         </a:rPr>
-                        <a:t>34,043</a:t>
+                        <a:t>33,798</a:t>
                       </a:r>
                     </a:p>
                   </a:txBody>
@@ -30532,7 +38293,7 @@
                           </a:solidFill>
                           <a:latin typeface="Arial"/>
                         </a:rPr>
-                        <a:t>37,341</a:t>
+                        <a:t>41,168</a:t>
                       </a:r>
                     </a:p>
                   </a:txBody>
@@ -30637,7 +38398,7 @@
                           </a:solidFill>
                           <a:latin typeface="Arial"/>
                         </a:rPr>
-                        <a:t>0.6x</a:t>
+                        <a:t>0.7x</a:t>
                       </a:r>
                     </a:p>
                   </a:txBody>
@@ -30672,7 +38433,7 @@
                           </a:solidFill>
                           <a:latin typeface="Arial"/>
                         </a:rPr>
-                        <a:t>6.9x</a:t>
+                        <a:t>7.6x</a:t>
                       </a:r>
                     </a:p>
                   </a:txBody>
@@ -30707,7 +38468,7 @@
                           </a:solidFill>
                           <a:latin typeface="Arial"/>
                         </a:rPr>
-                        <a:t>8.1x</a:t>
+                        <a:t>8.8x</a:t>
                       </a:r>
                     </a:p>
                   </a:txBody>
@@ -30742,7 +38503,7 @@
                           </a:solidFill>
                           <a:latin typeface="Arial"/>
                         </a:rPr>
-                        <a:t>10.5x</a:t>
+                        <a:t>10.4x</a:t>
                       </a:r>
                     </a:p>
                   </a:txBody>
@@ -30777,7 +38538,7 @@
                           </a:solidFill>
                           <a:latin typeface="Arial"/>
                         </a:rPr>
-                        <a:t>8.1x</a:t>
+                        <a:t>8.3x</a:t>
                       </a:r>
                     </a:p>
                   </a:txBody>
@@ -30884,7 +38645,7 @@
                           </a:solidFill>
                           <a:latin typeface="Arial"/>
                         </a:rPr>
-                        <a:t>189,192</a:t>
+                        <a:t>191,093</a:t>
                       </a:r>
                     </a:p>
                   </a:txBody>
@@ -30919,7 +38680,7 @@
                           </a:solidFill>
                           <a:latin typeface="Arial"/>
                         </a:rPr>
-                        <a:t>249,041</a:t>
+                        <a:t>264,753</a:t>
                       </a:r>
                     </a:p>
                   </a:txBody>
@@ -31024,7 +38785,7 @@
                           </a:solidFill>
                           <a:latin typeface="Arial"/>
                         </a:rPr>
-                        <a:t>1.0x</a:t>
+                        <a:t>1.1x</a:t>
                       </a:r>
                     </a:p>
                   </a:txBody>
@@ -31059,7 +38820,7 @@
                           </a:solidFill>
                           <a:latin typeface="Arial"/>
                         </a:rPr>
-                        <a:t>8.5x</a:t>
+                        <a:t>9.0x</a:t>
                       </a:r>
                     </a:p>
                   </a:txBody>
@@ -31094,7 +38855,7 @@
                           </a:solidFill>
                           <a:latin typeface="Arial"/>
                         </a:rPr>
-                        <a:t>9.9x</a:t>
+                        <a:t>10.5x</a:t>
                       </a:r>
                     </a:p>
                   </a:txBody>
@@ -31129,7 +38890,7 @@
                           </a:solidFill>
                           <a:latin typeface="Arial"/>
                         </a:rPr>
-                        <a:t>13.4x</a:t>
+                        <a:t>13.5x</a:t>
                       </a:r>
                     </a:p>
                   </a:txBody>
@@ -31164,7 +38925,7 @@
                           </a:solidFill>
                           <a:latin typeface="Arial"/>
                         </a:rPr>
-                        <a:t>7.7x</a:t>
+                        <a:t>7.9x</a:t>
                       </a:r>
                     </a:p>
                   </a:txBody>
@@ -31271,7 +39032,7 @@
                           </a:solidFill>
                           <a:latin typeface="Arial"/>
                         </a:rPr>
-                        <a:t>44,793</a:t>
+                        <a:t>46,697</a:t>
                       </a:r>
                     </a:p>
                   </a:txBody>
@@ -31306,7 +39067,7 @@
                           </a:solidFill>
                           <a:latin typeface="Arial"/>
                         </a:rPr>
-                        <a:t>39,143</a:t>
+                        <a:t>41,599</a:t>
                       </a:r>
                     </a:p>
                   </a:txBody>
@@ -31376,7 +39137,7 @@
                           </a:solidFill>
                           <a:latin typeface="Arial"/>
                         </a:rPr>
-                        <a:t>17.4%</a:t>
+                        <a:t>16.8%</a:t>
                       </a:r>
                     </a:p>
                   </a:txBody>
@@ -31446,7 +39207,7 @@
                           </a:solidFill>
                           <a:latin typeface="Arial"/>
                         </a:rPr>
-                        <a:t>8.5x</a:t>
+                        <a:t>9.0x</a:t>
                       </a:r>
                     </a:p>
                   </a:txBody>
@@ -31481,7 +39242,7 @@
                           </a:solidFill>
                           <a:latin typeface="Arial"/>
                         </a:rPr>
-                        <a:t>9.7x</a:t>
+                        <a:t>9.8x</a:t>
                       </a:r>
                     </a:p>
                   </a:txBody>
@@ -31516,7 +39277,7 @@
                           </a:solidFill>
                           <a:latin typeface="Arial"/>
                         </a:rPr>
-                        <a:t>16.4x</a:t>
+                        <a:t>17.0x</a:t>
                       </a:r>
                     </a:p>
                   </a:txBody>
@@ -31551,7 +39312,7 @@
                           </a:solidFill>
                           <a:latin typeface="Arial"/>
                         </a:rPr>
-                        <a:t>13.7x</a:t>
+                        <a:t>14.6x</a:t>
                       </a:r>
                     </a:p>
                   </a:txBody>
@@ -31658,7 +39419,7 @@
                           </a:solidFill>
                           <a:latin typeface="Arial"/>
                         </a:rPr>
-                        <a:t>1,090,733</a:t>
+                        <a:t>1,067,188</a:t>
                       </a:r>
                     </a:p>
                   </a:txBody>
@@ -31693,7 +39454,7 @@
                           </a:solidFill>
                           <a:latin typeface="Arial"/>
                         </a:rPr>
-                        <a:t>1,041,316</a:t>
+                        <a:t>1,035,030</a:t>
                       </a:r>
                     </a:p>
                   </a:txBody>
@@ -31763,7 +39524,7 @@
                           </a:solidFill>
                           <a:latin typeface="Arial"/>
                         </a:rPr>
-                        <a:t>16.8%</a:t>
+                        <a:t>16.7%</a:t>
                       </a:r>
                     </a:p>
                   </a:txBody>
@@ -31798,7 +39559,7 @@
                           </a:solidFill>
                           <a:latin typeface="Arial"/>
                         </a:rPr>
-                        <a:t>1.6x</a:t>
+                        <a:t>1.5x</a:t>
                       </a:r>
                     </a:p>
                   </a:txBody>
@@ -31833,7 +39594,7 @@
                           </a:solidFill>
                           <a:latin typeface="Arial"/>
                         </a:rPr>
-                        <a:t>9.5x</a:t>
+                        <a:t>9.0x</a:t>
                       </a:r>
                     </a:p>
                   </a:txBody>
@@ -31868,7 +39629,7 @@
                           </a:solidFill>
                           <a:latin typeface="Arial"/>
                         </a:rPr>
-                        <a:t>10.7x</a:t>
+                        <a:t>10.2x</a:t>
                       </a:r>
                     </a:p>
                   </a:txBody>
@@ -31903,7 +39664,7 @@
                           </a:solidFill>
                           <a:latin typeface="Arial"/>
                         </a:rPr>
-                        <a:t>15.2x</a:t>
+                        <a:t>14.7x</a:t>
                       </a:r>
                     </a:p>
                   </a:txBody>
@@ -31938,7 +39699,7 @@
                           </a:solidFill>
                           <a:latin typeface="Arial"/>
                         </a:rPr>
-                        <a:t>13.0x</a:t>
+                        <a:t>12.6x</a:t>
                       </a:r>
                     </a:p>
                   </a:txBody>
@@ -32160,7 +39921,7 @@
                           </a:solidFill>
                           <a:latin typeface="Arial"/>
                         </a:rPr>
-                        <a:t>10.5%</a:t>
+                        <a:t>11.0%</a:t>
                       </a:r>
                     </a:p>
                   </a:txBody>
@@ -32234,7 +39995,7 @@
                           </a:solidFill>
                           <a:latin typeface="Arial"/>
                         </a:rPr>
-                        <a:t>8.5x</a:t>
+                        <a:t>9.0x</a:t>
                       </a:r>
                     </a:p>
                   </a:txBody>
@@ -32271,7 +40032,7 @@
                           </a:solidFill>
                           <a:latin typeface="Arial"/>
                         </a:rPr>
-                        <a:t>10.7x</a:t>
+                        <a:t>10.2x</a:t>
                       </a:r>
                     </a:p>
                   </a:txBody>
@@ -32308,7 +40069,7 @@
                           </a:solidFill>
                           <a:latin typeface="Arial"/>
                         </a:rPr>
-                        <a:t>15.2x</a:t>
+                        <a:t>14.7x</a:t>
                       </a:r>
                     </a:p>
                   </a:txBody>
@@ -32345,7 +40106,7 @@
                           </a:solidFill>
                           <a:latin typeface="Arial"/>
                         </a:rPr>
-                        <a:t>12.2x</a:t>
+                        <a:t>12.9x</a:t>
                       </a:r>
                     </a:p>
                   </a:txBody>
@@ -32559,7 +40320,7 @@
                           </a:solidFill>
                           <a:latin typeface="Arial"/>
                         </a:rPr>
-                        <a:t>11.8%</a:t>
+                        <a:t>12.0%</a:t>
                       </a:r>
                     </a:p>
                   </a:txBody>
@@ -32629,7 +40390,7 @@
                           </a:solidFill>
                           <a:latin typeface="Arial"/>
                         </a:rPr>
-                        <a:t>10.1x</a:t>
+                        <a:t>9.7x</a:t>
                       </a:r>
                     </a:p>
                   </a:txBody>
@@ -32664,7 +40425,7 @@
                           </a:solidFill>
                           <a:latin typeface="Arial"/>
                         </a:rPr>
-                        <a:t>18.0x</a:t>
+                        <a:t>12.4x</a:t>
                       </a:r>
                     </a:p>
                   </a:txBody>
@@ -32734,7 +40495,7 @@
                           </a:solidFill>
                           <a:latin typeface="Arial"/>
                         </a:rPr>
-                        <a:t>11.4x</a:t>
+                        <a:t>12.2x</a:t>
                       </a:r>
                     </a:p>
                   </a:txBody>
@@ -33016,7 +40777,7 @@
                           </a:solidFill>
                           <a:latin typeface="Arial"/>
                         </a:rPr>
-                        <a:t>7.7x</a:t>
+                        <a:t>7.5x</a:t>
                       </a:r>
                     </a:p>
                   </a:txBody>
@@ -33051,7 +40812,7 @@
                           </a:solidFill>
                           <a:latin typeface="Arial"/>
                         </a:rPr>
-                        <a:t>9.8x</a:t>
+                        <a:t>9.3x</a:t>
                       </a:r>
                     </a:p>
                   </a:txBody>
@@ -33086,7 +40847,7 @@
                           </a:solidFill>
                           <a:latin typeface="Arial"/>
                         </a:rPr>
-                        <a:t>12.0x</a:t>
+                        <a:t>11.9x</a:t>
                       </a:r>
                     </a:p>
                   </a:txBody>
@@ -33121,7 +40882,7 @@
                           </a:solidFill>
                           <a:latin typeface="Arial"/>
                         </a:rPr>
-                        <a:t>9.0x</a:t>
+                        <a:t>10.6x</a:t>
                       </a:r>
                     </a:p>
                   </a:txBody>
@@ -33333,7 +41094,7 @@
                           </a:solidFill>
                           <a:latin typeface="Arial"/>
                         </a:rPr>
-                        <a:t>17.0%</a:t>
+                        <a:t>16.7%</a:t>
                       </a:r>
                     </a:p>
                   </a:txBody>
@@ -33403,7 +41164,7 @@
                           </a:solidFill>
                           <a:latin typeface="Arial"/>
                         </a:rPr>
-                        <a:t>9.9x</a:t>
+                        <a:t>9.5x</a:t>
                       </a:r>
                     </a:p>
                   </a:txBody>
@@ -33438,7 +41199,7 @@
                           </a:solidFill>
                           <a:latin typeface="Arial"/>
                         </a:rPr>
-                        <a:t>25.2x</a:t>
+                        <a:t>11.7x</a:t>
                       </a:r>
                     </a:p>
                   </a:txBody>
@@ -33473,7 +41234,7 @@
                           </a:solidFill>
                           <a:latin typeface="Arial"/>
                         </a:rPr>
-                        <a:t>16.4x</a:t>
+                        <a:t>16.8x</a:t>
                       </a:r>
                     </a:p>
                   </a:txBody>
@@ -33508,7 +41269,7 @@
                           </a:solidFill>
                           <a:latin typeface="Arial"/>
                         </a:rPr>
-                        <a:t>13.4x</a:t>
+                        <a:t>14.6x</a:t>
                       </a:r>
                     </a:p>
                   </a:txBody>
@@ -33619,7 +41380,7 @@
                           </a:solidFill>
                           <a:latin typeface="Arial"/>
                         </a:rPr>
-                        <a:t>4,847</a:t>
+                        <a:t>4,852</a:t>
                       </a:r>
                     </a:p>
                   </a:txBody>
@@ -33656,7 +41417,7 @@
                           </a:solidFill>
                           <a:latin typeface="Arial"/>
                         </a:rPr>
-                        <a:t>4,267</a:t>
+                        <a:t>4,692</a:t>
                       </a:r>
                     </a:p>
                   </a:txBody>
@@ -33730,7 +41491,7 @@
                           </a:solidFill>
                           <a:latin typeface="Arial"/>
                         </a:rPr>
-                        <a:t>13.4%</a:t>
+                        <a:t>12.7%</a:t>
                       </a:r>
                     </a:p>
                   </a:txBody>
@@ -33767,7 +41528,7 @@
                           </a:solidFill>
                           <a:latin typeface="Arial"/>
                         </a:rPr>
-                        <a:t>1.1x</a:t>
+                        <a:t>1.2x</a:t>
                       </a:r>
                     </a:p>
                   </a:txBody>
@@ -33804,7 +41565,7 @@
                           </a:solidFill>
                           <a:latin typeface="Arial"/>
                         </a:rPr>
-                        <a:t>8.1x</a:t>
+                        <a:t>9.5x</a:t>
                       </a:r>
                     </a:p>
                   </a:txBody>
@@ -33841,7 +41602,7 @@
                           </a:solidFill>
                           <a:latin typeface="Arial"/>
                         </a:rPr>
-                        <a:t>8.8x</a:t>
+                        <a:t>10.4x</a:t>
                       </a:r>
                     </a:p>
                   </a:txBody>
@@ -33878,7 +41639,7 @@
                           </a:solidFill>
                           <a:latin typeface="Arial"/>
                         </a:rPr>
-                        <a:t>13.7x</a:t>
+                        <a:t>14.8x</a:t>
                       </a:r>
                     </a:p>
                   </a:txBody>
@@ -33915,7 +41676,7 @@
                           </a:solidFill>
                           <a:latin typeface="Arial"/>
                         </a:rPr>
-                        <a:t>14.4x</a:t>
+                        <a:t>13.3x</a:t>
                       </a:r>
                     </a:p>
                   </a:txBody>
@@ -34009,7 +41770,7 @@
                 </a:solidFill>
                 <a:latin typeface="Arial"/>
               </a:rPr>
-              <a:t>Sources: Company reports, Yahoo Finance, Equity Research Engine estimates; n.m. = not meaningful (negative or above 60x)</a:t>
+              <a:t>Sources: Company reports, Yahoo Finance, Equity Research Engine estimates; income basis: Bouvet LTM Jun 2026; peers LTM Jun 2026 (5), FY2025 (2), LTM May 2026 (1); n.m. = not meaningful (negative or above 60x)</a:t>
             </a:r>
           </a:p>
           <a:p>
